--- a/tests/corpus/pptx/generated/text-basic.pptx
+++ b/tests/corpus/pptx/generated/text-basic.pptx
@@ -133,7 +133,7 @@
           <p:cNvPr id="2" name="Titel 1">
             <a:extLst>
               <a:ext uri="{FF2B5EF4-FFF2-40B4-BE49-F238E27FC236}">
-                <a16:creationId xmlns:a16="http://schemas.microsoft.com/office/drawing/2014/main" id="{0920916F-BE73-A648-2461-BA7FD001FFC6}"/>
+                <a16:creationId xmlns:a16="http://schemas.microsoft.com/office/drawing/2014/main" id="{BED882FF-B7B5-54A0-CDE2-D4F510B2CA90}"/>
               </a:ext>
             </a:extLst>
           </p:cNvPr>
@@ -170,7 +170,7 @@
           <p:cNvPr id="3" name="Untertitel 2">
             <a:extLst>
               <a:ext uri="{FF2B5EF4-FFF2-40B4-BE49-F238E27FC236}">
-                <a16:creationId xmlns:a16="http://schemas.microsoft.com/office/drawing/2014/main" id="{7CE93DDB-9A8B-6E8C-C6DB-B1386429DFAE}"/>
+                <a16:creationId xmlns:a16="http://schemas.microsoft.com/office/drawing/2014/main" id="{C344E853-A1F0-252D-63C0-CFDD23266ABD}"/>
               </a:ext>
             </a:extLst>
           </p:cNvPr>
@@ -240,7 +240,7 @@
           <p:cNvPr id="4" name="Datumsplatzhalter 3">
             <a:extLst>
               <a:ext uri="{FF2B5EF4-FFF2-40B4-BE49-F238E27FC236}">
-                <a16:creationId xmlns:a16="http://schemas.microsoft.com/office/drawing/2014/main" id="{B22BF1F4-41AD-C218-978F-600542FBCF5B}"/>
+                <a16:creationId xmlns:a16="http://schemas.microsoft.com/office/drawing/2014/main" id="{8AECBD03-8C65-F2D4-6CD5-4CC85B749FA2}"/>
               </a:ext>
             </a:extLst>
           </p:cNvPr>
@@ -256,7 +256,7 @@
           <a:bodyPr/>
           <a:lstStyle/>
           <a:p>
-            <a:fld id="{265970A2-FCDD-49F9-A648-6CBE47DAE7A9}" type="datetimeFigureOut">
+            <a:fld id="{AC902F5A-E3F6-4856-8EE3-15CF50364D0A}" type="datetimeFigureOut">
               <a:rPr lang="de-DE" smtClean="0"/>
               <a:t>08.10.2026</a:t>
             </a:fld>
@@ -269,7 +269,7 @@
           <p:cNvPr id="5" name="Fußzeilenplatzhalter 4">
             <a:extLst>
               <a:ext uri="{FF2B5EF4-FFF2-40B4-BE49-F238E27FC236}">
-                <a16:creationId xmlns:a16="http://schemas.microsoft.com/office/drawing/2014/main" id="{535EEA2A-B69F-484D-5AAD-B8976F14C1D3}"/>
+                <a16:creationId xmlns:a16="http://schemas.microsoft.com/office/drawing/2014/main" id="{EE4AAEF9-4186-85E2-9855-0CE84174249D}"/>
               </a:ext>
             </a:extLst>
           </p:cNvPr>
@@ -294,7 +294,7 @@
           <p:cNvPr id="6" name="Foliennummernplatzhalter 5">
             <a:extLst>
               <a:ext uri="{FF2B5EF4-FFF2-40B4-BE49-F238E27FC236}">
-                <a16:creationId xmlns:a16="http://schemas.microsoft.com/office/drawing/2014/main" id="{F34FB6D4-B39E-CFC2-544C-47D74554273B}"/>
+                <a16:creationId xmlns:a16="http://schemas.microsoft.com/office/drawing/2014/main" id="{56AD4F57-9089-4BEC-7FD1-9FDB18567ADB}"/>
               </a:ext>
             </a:extLst>
           </p:cNvPr>
@@ -310,7 +310,7 @@
           <a:bodyPr/>
           <a:lstStyle/>
           <a:p>
-            <a:fld id="{0A9764AB-229B-4A83-B043-EB433F5F0E3C}" type="slidenum">
+            <a:fld id="{E9424090-0FA0-4F74-87C3-2B9C08679DEB}" type="slidenum">
               <a:rPr lang="de-DE" smtClean="0"/>
               <a:t>‹Nr.›</a:t>
             </a:fld>
@@ -321,7 +321,7 @@
     </p:spTree>
     <p:extLst>
       <p:ext uri="{BB962C8B-B14F-4D97-AF65-F5344CB8AC3E}">
-        <p14:creationId xmlns:p14="http://schemas.microsoft.com/office/powerpoint/2010/main" val="877543923"/>
+        <p14:creationId xmlns:p14="http://schemas.microsoft.com/office/powerpoint/2010/main" val="716649679"/>
       </p:ext>
     </p:extLst>
   </p:cSld>
@@ -353,7 +353,7 @@
           <p:cNvPr id="2" name="Titel 1">
             <a:extLst>
               <a:ext uri="{FF2B5EF4-FFF2-40B4-BE49-F238E27FC236}">
-                <a16:creationId xmlns:a16="http://schemas.microsoft.com/office/drawing/2014/main" id="{17EC873C-8BE6-3541-96EF-7A8E2712C9F3}"/>
+                <a16:creationId xmlns:a16="http://schemas.microsoft.com/office/drawing/2014/main" id="{FE719E72-6A81-8895-4668-0F0C38D44CF3}"/>
               </a:ext>
             </a:extLst>
           </p:cNvPr>
@@ -381,7 +381,7 @@
           <p:cNvPr id="3" name="Vertikaler Textplatzhalter 2">
             <a:extLst>
               <a:ext uri="{FF2B5EF4-FFF2-40B4-BE49-F238E27FC236}">
-                <a16:creationId xmlns:a16="http://schemas.microsoft.com/office/drawing/2014/main" id="{8D92DDAA-85C5-D20B-E239-978B7E754E2B}"/>
+                <a16:creationId xmlns:a16="http://schemas.microsoft.com/office/drawing/2014/main" id="{581C8FBE-D82D-8A7D-0227-DF8AED2AD94F}"/>
               </a:ext>
             </a:extLst>
           </p:cNvPr>
@@ -438,7 +438,7 @@
           <p:cNvPr id="4" name="Datumsplatzhalter 3">
             <a:extLst>
               <a:ext uri="{FF2B5EF4-FFF2-40B4-BE49-F238E27FC236}">
-                <a16:creationId xmlns:a16="http://schemas.microsoft.com/office/drawing/2014/main" id="{367300A5-2BBC-7E47-0A9E-44E2F51B8012}"/>
+                <a16:creationId xmlns:a16="http://schemas.microsoft.com/office/drawing/2014/main" id="{2ED6E830-FD08-52BA-4A33-853967F4CCE8}"/>
               </a:ext>
             </a:extLst>
           </p:cNvPr>
@@ -454,7 +454,7 @@
           <a:bodyPr/>
           <a:lstStyle/>
           <a:p>
-            <a:fld id="{265970A2-FCDD-49F9-A648-6CBE47DAE7A9}" type="datetimeFigureOut">
+            <a:fld id="{AC902F5A-E3F6-4856-8EE3-15CF50364D0A}" type="datetimeFigureOut">
               <a:rPr lang="de-DE" smtClean="0"/>
               <a:t>08.10.2026</a:t>
             </a:fld>
@@ -467,7 +467,7 @@
           <p:cNvPr id="5" name="Fußzeilenplatzhalter 4">
             <a:extLst>
               <a:ext uri="{FF2B5EF4-FFF2-40B4-BE49-F238E27FC236}">
-                <a16:creationId xmlns:a16="http://schemas.microsoft.com/office/drawing/2014/main" id="{0D28A738-98F3-2F73-19C7-16E3FBCB20F7}"/>
+                <a16:creationId xmlns:a16="http://schemas.microsoft.com/office/drawing/2014/main" id="{8C77060B-EF1C-74B6-800B-6DAFB64AE953}"/>
               </a:ext>
             </a:extLst>
           </p:cNvPr>
@@ -492,7 +492,7 @@
           <p:cNvPr id="6" name="Foliennummernplatzhalter 5">
             <a:extLst>
               <a:ext uri="{FF2B5EF4-FFF2-40B4-BE49-F238E27FC236}">
-                <a16:creationId xmlns:a16="http://schemas.microsoft.com/office/drawing/2014/main" id="{21DBE673-0646-89F4-18ED-F75B8C621E23}"/>
+                <a16:creationId xmlns:a16="http://schemas.microsoft.com/office/drawing/2014/main" id="{F0B2C4EF-D778-5CAE-37BD-D828D21FDE03}"/>
               </a:ext>
             </a:extLst>
           </p:cNvPr>
@@ -508,7 +508,7 @@
           <a:bodyPr/>
           <a:lstStyle/>
           <a:p>
-            <a:fld id="{0A9764AB-229B-4A83-B043-EB433F5F0E3C}" type="slidenum">
+            <a:fld id="{E9424090-0FA0-4F74-87C3-2B9C08679DEB}" type="slidenum">
               <a:rPr lang="de-DE" smtClean="0"/>
               <a:t>‹Nr.›</a:t>
             </a:fld>
@@ -519,7 +519,7 @@
     </p:spTree>
     <p:extLst>
       <p:ext uri="{BB962C8B-B14F-4D97-AF65-F5344CB8AC3E}">
-        <p14:creationId xmlns:p14="http://schemas.microsoft.com/office/powerpoint/2010/main" val="3373759977"/>
+        <p14:creationId xmlns:p14="http://schemas.microsoft.com/office/powerpoint/2010/main" val="2249460223"/>
       </p:ext>
     </p:extLst>
   </p:cSld>
@@ -551,7 +551,7 @@
           <p:cNvPr id="2" name="Vertikaler Titel 1">
             <a:extLst>
               <a:ext uri="{FF2B5EF4-FFF2-40B4-BE49-F238E27FC236}">
-                <a16:creationId xmlns:a16="http://schemas.microsoft.com/office/drawing/2014/main" id="{F83D202D-517E-8C72-BC4E-2C6751A1357E}"/>
+                <a16:creationId xmlns:a16="http://schemas.microsoft.com/office/drawing/2014/main" id="{370D7060-149C-C151-FFF3-C0CB32C54426}"/>
               </a:ext>
             </a:extLst>
           </p:cNvPr>
@@ -584,7 +584,7 @@
           <p:cNvPr id="3" name="Vertikaler Textplatzhalter 2">
             <a:extLst>
               <a:ext uri="{FF2B5EF4-FFF2-40B4-BE49-F238E27FC236}">
-                <a16:creationId xmlns:a16="http://schemas.microsoft.com/office/drawing/2014/main" id="{10A3D81D-6D97-F476-48CF-F1CBC184CAED}"/>
+                <a16:creationId xmlns:a16="http://schemas.microsoft.com/office/drawing/2014/main" id="{F3975B96-A136-9D70-BC04-2DC174675B35}"/>
               </a:ext>
             </a:extLst>
           </p:cNvPr>
@@ -646,7 +646,7 @@
           <p:cNvPr id="4" name="Datumsplatzhalter 3">
             <a:extLst>
               <a:ext uri="{FF2B5EF4-FFF2-40B4-BE49-F238E27FC236}">
-                <a16:creationId xmlns:a16="http://schemas.microsoft.com/office/drawing/2014/main" id="{76219022-9DC6-D2CA-B657-B30CA9CA846B}"/>
+                <a16:creationId xmlns:a16="http://schemas.microsoft.com/office/drawing/2014/main" id="{282E553A-E4EE-5A32-CA3E-E5685AF5122A}"/>
               </a:ext>
             </a:extLst>
           </p:cNvPr>
@@ -662,7 +662,7 @@
           <a:bodyPr/>
           <a:lstStyle/>
           <a:p>
-            <a:fld id="{265970A2-FCDD-49F9-A648-6CBE47DAE7A9}" type="datetimeFigureOut">
+            <a:fld id="{AC902F5A-E3F6-4856-8EE3-15CF50364D0A}" type="datetimeFigureOut">
               <a:rPr lang="de-DE" smtClean="0"/>
               <a:t>08.10.2026</a:t>
             </a:fld>
@@ -675,7 +675,7 @@
           <p:cNvPr id="5" name="Fußzeilenplatzhalter 4">
             <a:extLst>
               <a:ext uri="{FF2B5EF4-FFF2-40B4-BE49-F238E27FC236}">
-                <a16:creationId xmlns:a16="http://schemas.microsoft.com/office/drawing/2014/main" id="{8F3A04B2-228E-8B55-5D01-1F9D655ADD34}"/>
+                <a16:creationId xmlns:a16="http://schemas.microsoft.com/office/drawing/2014/main" id="{4995F88B-D6BF-CDFF-1AAF-BD5674A35981}"/>
               </a:ext>
             </a:extLst>
           </p:cNvPr>
@@ -700,7 +700,7 @@
           <p:cNvPr id="6" name="Foliennummernplatzhalter 5">
             <a:extLst>
               <a:ext uri="{FF2B5EF4-FFF2-40B4-BE49-F238E27FC236}">
-                <a16:creationId xmlns:a16="http://schemas.microsoft.com/office/drawing/2014/main" id="{1EE8ADDD-72AB-94DA-5834-CF8FA78A0CBA}"/>
+                <a16:creationId xmlns:a16="http://schemas.microsoft.com/office/drawing/2014/main" id="{CBF81619-A9D0-4E96-4F7D-D73640049E91}"/>
               </a:ext>
             </a:extLst>
           </p:cNvPr>
@@ -716,7 +716,7 @@
           <a:bodyPr/>
           <a:lstStyle/>
           <a:p>
-            <a:fld id="{0A9764AB-229B-4A83-B043-EB433F5F0E3C}" type="slidenum">
+            <a:fld id="{E9424090-0FA0-4F74-87C3-2B9C08679DEB}" type="slidenum">
               <a:rPr lang="de-DE" smtClean="0"/>
               <a:t>‹Nr.›</a:t>
             </a:fld>
@@ -727,7 +727,7 @@
     </p:spTree>
     <p:extLst>
       <p:ext uri="{BB962C8B-B14F-4D97-AF65-F5344CB8AC3E}">
-        <p14:creationId xmlns:p14="http://schemas.microsoft.com/office/powerpoint/2010/main" val="3447082960"/>
+        <p14:creationId xmlns:p14="http://schemas.microsoft.com/office/powerpoint/2010/main" val="3739814985"/>
       </p:ext>
     </p:extLst>
   </p:cSld>
@@ -759,7 +759,7 @@
           <p:cNvPr id="2" name="Titel 1">
             <a:extLst>
               <a:ext uri="{FF2B5EF4-FFF2-40B4-BE49-F238E27FC236}">
-                <a16:creationId xmlns:a16="http://schemas.microsoft.com/office/drawing/2014/main" id="{807A9694-0FCD-7D13-E7EE-3D55A6DDBB45}"/>
+                <a16:creationId xmlns:a16="http://schemas.microsoft.com/office/drawing/2014/main" id="{0214F8F4-675B-3D79-82F1-2D66739D91B2}"/>
               </a:ext>
             </a:extLst>
           </p:cNvPr>
@@ -787,7 +787,7 @@
           <p:cNvPr id="3" name="Textplatzhalter 2">
             <a:extLst>
               <a:ext uri="{FF2B5EF4-FFF2-40B4-BE49-F238E27FC236}">
-                <a16:creationId xmlns:a16="http://schemas.microsoft.com/office/drawing/2014/main" id="{005CA8C6-F070-676D-CD90-B40F28B91291}"/>
+                <a16:creationId xmlns:a16="http://schemas.microsoft.com/office/drawing/2014/main" id="{1B783424-FDFA-E4E7-15CC-FB400B112916}"/>
               </a:ext>
             </a:extLst>
           </p:cNvPr>
@@ -844,7 +844,7 @@
           <p:cNvPr id="4" name="Datumsplatzhalter 3">
             <a:extLst>
               <a:ext uri="{FF2B5EF4-FFF2-40B4-BE49-F238E27FC236}">
-                <a16:creationId xmlns:a16="http://schemas.microsoft.com/office/drawing/2014/main" id="{218BCF12-96CC-6DAD-64A7-E7607FB4F7D3}"/>
+                <a16:creationId xmlns:a16="http://schemas.microsoft.com/office/drawing/2014/main" id="{6E0F387A-8E2E-F06D-B8AD-B5BC269A70A2}"/>
               </a:ext>
             </a:extLst>
           </p:cNvPr>
@@ -860,7 +860,7 @@
           <a:bodyPr/>
           <a:lstStyle/>
           <a:p>
-            <a:fld id="{265970A2-FCDD-49F9-A648-6CBE47DAE7A9}" type="datetimeFigureOut">
+            <a:fld id="{AC902F5A-E3F6-4856-8EE3-15CF50364D0A}" type="datetimeFigureOut">
               <a:rPr lang="de-DE" smtClean="0"/>
               <a:t>08.10.2026</a:t>
             </a:fld>
@@ -873,7 +873,7 @@
           <p:cNvPr id="5" name="Fußzeilenplatzhalter 4">
             <a:extLst>
               <a:ext uri="{FF2B5EF4-FFF2-40B4-BE49-F238E27FC236}">
-                <a16:creationId xmlns:a16="http://schemas.microsoft.com/office/drawing/2014/main" id="{B209A707-D3F6-6A3D-390C-EA3F8F8C4DE5}"/>
+                <a16:creationId xmlns:a16="http://schemas.microsoft.com/office/drawing/2014/main" id="{FEA4E979-EC30-82F6-BEEC-E3A176BAD462}"/>
               </a:ext>
             </a:extLst>
           </p:cNvPr>
@@ -898,7 +898,7 @@
           <p:cNvPr id="6" name="Foliennummernplatzhalter 5">
             <a:extLst>
               <a:ext uri="{FF2B5EF4-FFF2-40B4-BE49-F238E27FC236}">
-                <a16:creationId xmlns:a16="http://schemas.microsoft.com/office/drawing/2014/main" id="{2797E590-71C3-C17E-954A-42B66BA0FA76}"/>
+                <a16:creationId xmlns:a16="http://schemas.microsoft.com/office/drawing/2014/main" id="{813F8947-EF36-D154-9F83-78DACB4C783C}"/>
               </a:ext>
             </a:extLst>
           </p:cNvPr>
@@ -914,7 +914,7 @@
           <a:bodyPr/>
           <a:lstStyle/>
           <a:p>
-            <a:fld id="{0A9764AB-229B-4A83-B043-EB433F5F0E3C}" type="slidenum">
+            <a:fld id="{E9424090-0FA0-4F74-87C3-2B9C08679DEB}" type="slidenum">
               <a:rPr lang="de-DE" smtClean="0"/>
               <a:t>‹Nr.›</a:t>
             </a:fld>
@@ -925,7 +925,7 @@
     </p:spTree>
     <p:extLst>
       <p:ext uri="{BB962C8B-B14F-4D97-AF65-F5344CB8AC3E}">
-        <p14:creationId xmlns:p14="http://schemas.microsoft.com/office/powerpoint/2010/main" val="1714137314"/>
+        <p14:creationId xmlns:p14="http://schemas.microsoft.com/office/powerpoint/2010/main" val="670720945"/>
       </p:ext>
     </p:extLst>
   </p:cSld>
@@ -957,7 +957,7 @@
           <p:cNvPr id="2" name="Titel 1">
             <a:extLst>
               <a:ext uri="{FF2B5EF4-FFF2-40B4-BE49-F238E27FC236}">
-                <a16:creationId xmlns:a16="http://schemas.microsoft.com/office/drawing/2014/main" id="{348AFDCF-EBB7-5990-EAD6-B8E5AED59B42}"/>
+                <a16:creationId xmlns:a16="http://schemas.microsoft.com/office/drawing/2014/main" id="{AE042CA1-064D-C55B-F66B-7FD485596DD8}"/>
               </a:ext>
             </a:extLst>
           </p:cNvPr>
@@ -985,7 +985,7 @@
           <p:cNvPr id="3" name="Inhaltsplatzhalter 2">
             <a:extLst>
               <a:ext uri="{FF2B5EF4-FFF2-40B4-BE49-F238E27FC236}">
-                <a16:creationId xmlns:a16="http://schemas.microsoft.com/office/drawing/2014/main" id="{A7300206-1667-8CD8-D480-6B9C3B2C08B5}"/>
+                <a16:creationId xmlns:a16="http://schemas.microsoft.com/office/drawing/2014/main" id="{D7318E6C-B16F-3CAC-C4B4-DD67BF1B1527}"/>
               </a:ext>
             </a:extLst>
           </p:cNvPr>
@@ -1042,7 +1042,7 @@
           <p:cNvPr id="4" name="Datumsplatzhalter 3">
             <a:extLst>
               <a:ext uri="{FF2B5EF4-FFF2-40B4-BE49-F238E27FC236}">
-                <a16:creationId xmlns:a16="http://schemas.microsoft.com/office/drawing/2014/main" id="{B33ED248-C0E3-A2C1-A6B1-ADD0E9E49451}"/>
+                <a16:creationId xmlns:a16="http://schemas.microsoft.com/office/drawing/2014/main" id="{F9B7AF40-4AF0-3C39-C2A4-703B35029B92}"/>
               </a:ext>
             </a:extLst>
           </p:cNvPr>
@@ -1058,7 +1058,7 @@
           <a:bodyPr/>
           <a:lstStyle/>
           <a:p>
-            <a:fld id="{265970A2-FCDD-49F9-A648-6CBE47DAE7A9}" type="datetimeFigureOut">
+            <a:fld id="{AC902F5A-E3F6-4856-8EE3-15CF50364D0A}" type="datetimeFigureOut">
               <a:rPr lang="de-DE" smtClean="0"/>
               <a:t>08.10.2026</a:t>
             </a:fld>
@@ -1071,7 +1071,7 @@
           <p:cNvPr id="5" name="Fußzeilenplatzhalter 4">
             <a:extLst>
               <a:ext uri="{FF2B5EF4-FFF2-40B4-BE49-F238E27FC236}">
-                <a16:creationId xmlns:a16="http://schemas.microsoft.com/office/drawing/2014/main" id="{5C5C4297-33AC-81B3-144F-1CFAE005823F}"/>
+                <a16:creationId xmlns:a16="http://schemas.microsoft.com/office/drawing/2014/main" id="{F122BC84-D380-F288-4C95-0E1D978C1038}"/>
               </a:ext>
             </a:extLst>
           </p:cNvPr>
@@ -1096,7 +1096,7 @@
           <p:cNvPr id="6" name="Foliennummernplatzhalter 5">
             <a:extLst>
               <a:ext uri="{FF2B5EF4-FFF2-40B4-BE49-F238E27FC236}">
-                <a16:creationId xmlns:a16="http://schemas.microsoft.com/office/drawing/2014/main" id="{B2612737-6A10-B1EE-C8DA-391E8C2085B7}"/>
+                <a16:creationId xmlns:a16="http://schemas.microsoft.com/office/drawing/2014/main" id="{86D64CC8-9A6E-3503-4B53-FF312907E311}"/>
               </a:ext>
             </a:extLst>
           </p:cNvPr>
@@ -1112,7 +1112,7 @@
           <a:bodyPr/>
           <a:lstStyle/>
           <a:p>
-            <a:fld id="{0A9764AB-229B-4A83-B043-EB433F5F0E3C}" type="slidenum">
+            <a:fld id="{E9424090-0FA0-4F74-87C3-2B9C08679DEB}" type="slidenum">
               <a:rPr lang="de-DE" smtClean="0"/>
               <a:t>‹Nr.›</a:t>
             </a:fld>
@@ -1123,7 +1123,7 @@
     </p:spTree>
     <p:extLst>
       <p:ext uri="{BB962C8B-B14F-4D97-AF65-F5344CB8AC3E}">
-        <p14:creationId xmlns:p14="http://schemas.microsoft.com/office/powerpoint/2010/main" val="1474689126"/>
+        <p14:creationId xmlns:p14="http://schemas.microsoft.com/office/powerpoint/2010/main" val="1516536692"/>
       </p:ext>
     </p:extLst>
   </p:cSld>
@@ -1155,7 +1155,7 @@
           <p:cNvPr id="2" name="Titel 1">
             <a:extLst>
               <a:ext uri="{FF2B5EF4-FFF2-40B4-BE49-F238E27FC236}">
-                <a16:creationId xmlns:a16="http://schemas.microsoft.com/office/drawing/2014/main" id="{1F3A9B82-8612-DA5E-2BB9-7F8AE4EB484D}"/>
+                <a16:creationId xmlns:a16="http://schemas.microsoft.com/office/drawing/2014/main" id="{9DB77246-9F1A-948B-BA14-8442E40700B9}"/>
               </a:ext>
             </a:extLst>
           </p:cNvPr>
@@ -1192,7 +1192,7 @@
           <p:cNvPr id="3" name="Textplatzhalter 2">
             <a:extLst>
               <a:ext uri="{FF2B5EF4-FFF2-40B4-BE49-F238E27FC236}">
-                <a16:creationId xmlns:a16="http://schemas.microsoft.com/office/drawing/2014/main" id="{100096F0-EE37-FDA3-5785-81A8F6A67D4B}"/>
+                <a16:creationId xmlns:a16="http://schemas.microsoft.com/office/drawing/2014/main" id="{DED74D96-A691-0E01-FF2A-92C6C4019CAF}"/>
               </a:ext>
             </a:extLst>
           </p:cNvPr>
@@ -1317,7 +1317,7 @@
           <p:cNvPr id="4" name="Datumsplatzhalter 3">
             <a:extLst>
               <a:ext uri="{FF2B5EF4-FFF2-40B4-BE49-F238E27FC236}">
-                <a16:creationId xmlns:a16="http://schemas.microsoft.com/office/drawing/2014/main" id="{A3CDCFCD-9362-BD9A-6E60-E4E21E764A86}"/>
+                <a16:creationId xmlns:a16="http://schemas.microsoft.com/office/drawing/2014/main" id="{0D86DE30-9889-8BC3-6E6F-2D0762F6A97B}"/>
               </a:ext>
             </a:extLst>
           </p:cNvPr>
@@ -1333,7 +1333,7 @@
           <a:bodyPr/>
           <a:lstStyle/>
           <a:p>
-            <a:fld id="{265970A2-FCDD-49F9-A648-6CBE47DAE7A9}" type="datetimeFigureOut">
+            <a:fld id="{AC902F5A-E3F6-4856-8EE3-15CF50364D0A}" type="datetimeFigureOut">
               <a:rPr lang="de-DE" smtClean="0"/>
               <a:t>08.10.2026</a:t>
             </a:fld>
@@ -1346,7 +1346,7 @@
           <p:cNvPr id="5" name="Fußzeilenplatzhalter 4">
             <a:extLst>
               <a:ext uri="{FF2B5EF4-FFF2-40B4-BE49-F238E27FC236}">
-                <a16:creationId xmlns:a16="http://schemas.microsoft.com/office/drawing/2014/main" id="{02576C5C-3A45-7EDF-DF76-2863F3C1CD1E}"/>
+                <a16:creationId xmlns:a16="http://schemas.microsoft.com/office/drawing/2014/main" id="{FDBB3A07-8702-6636-EB58-B4B7A799DEF1}"/>
               </a:ext>
             </a:extLst>
           </p:cNvPr>
@@ -1371,7 +1371,7 @@
           <p:cNvPr id="6" name="Foliennummernplatzhalter 5">
             <a:extLst>
               <a:ext uri="{FF2B5EF4-FFF2-40B4-BE49-F238E27FC236}">
-                <a16:creationId xmlns:a16="http://schemas.microsoft.com/office/drawing/2014/main" id="{6DF86402-86CB-20E9-6304-8FE13B7CC639}"/>
+                <a16:creationId xmlns:a16="http://schemas.microsoft.com/office/drawing/2014/main" id="{12623C4B-28FA-9951-E61C-0BE1853B970E}"/>
               </a:ext>
             </a:extLst>
           </p:cNvPr>
@@ -1387,7 +1387,7 @@
           <a:bodyPr/>
           <a:lstStyle/>
           <a:p>
-            <a:fld id="{0A9764AB-229B-4A83-B043-EB433F5F0E3C}" type="slidenum">
+            <a:fld id="{E9424090-0FA0-4F74-87C3-2B9C08679DEB}" type="slidenum">
               <a:rPr lang="de-DE" smtClean="0"/>
               <a:t>‹Nr.›</a:t>
             </a:fld>
@@ -1398,7 +1398,7 @@
     </p:spTree>
     <p:extLst>
       <p:ext uri="{BB962C8B-B14F-4D97-AF65-F5344CB8AC3E}">
-        <p14:creationId xmlns:p14="http://schemas.microsoft.com/office/powerpoint/2010/main" val="1730134133"/>
+        <p14:creationId xmlns:p14="http://schemas.microsoft.com/office/powerpoint/2010/main" val="2293494136"/>
       </p:ext>
     </p:extLst>
   </p:cSld>
@@ -1430,7 +1430,7 @@
           <p:cNvPr id="2" name="Titel 1">
             <a:extLst>
               <a:ext uri="{FF2B5EF4-FFF2-40B4-BE49-F238E27FC236}">
-                <a16:creationId xmlns:a16="http://schemas.microsoft.com/office/drawing/2014/main" id="{A1B86E9E-8CF0-6BC5-0FC0-9640C94C5914}"/>
+                <a16:creationId xmlns:a16="http://schemas.microsoft.com/office/drawing/2014/main" id="{694BB810-4CAD-F322-1873-E64E388ED04C}"/>
               </a:ext>
             </a:extLst>
           </p:cNvPr>
@@ -1458,7 +1458,7 @@
           <p:cNvPr id="3" name="Inhaltsplatzhalter 2">
             <a:extLst>
               <a:ext uri="{FF2B5EF4-FFF2-40B4-BE49-F238E27FC236}">
-                <a16:creationId xmlns:a16="http://schemas.microsoft.com/office/drawing/2014/main" id="{F0BD69BA-6672-F157-6A16-44A76FD53696}"/>
+                <a16:creationId xmlns:a16="http://schemas.microsoft.com/office/drawing/2014/main" id="{310BA504-A3CD-211B-ED4D-D2BFE1DA2864}"/>
               </a:ext>
             </a:extLst>
           </p:cNvPr>
@@ -1520,7 +1520,7 @@
           <p:cNvPr id="4" name="Inhaltsplatzhalter 3">
             <a:extLst>
               <a:ext uri="{FF2B5EF4-FFF2-40B4-BE49-F238E27FC236}">
-                <a16:creationId xmlns:a16="http://schemas.microsoft.com/office/drawing/2014/main" id="{41D8C172-8BDB-FD31-71C0-C8DBC1025025}"/>
+                <a16:creationId xmlns:a16="http://schemas.microsoft.com/office/drawing/2014/main" id="{8C5971F5-0A80-52AE-7454-B3A6E9D6DCDF}"/>
               </a:ext>
             </a:extLst>
           </p:cNvPr>
@@ -1582,7 +1582,7 @@
           <p:cNvPr id="5" name="Datumsplatzhalter 4">
             <a:extLst>
               <a:ext uri="{FF2B5EF4-FFF2-40B4-BE49-F238E27FC236}">
-                <a16:creationId xmlns:a16="http://schemas.microsoft.com/office/drawing/2014/main" id="{20E0271F-0FF5-FE09-EEA2-685AAB838BEA}"/>
+                <a16:creationId xmlns:a16="http://schemas.microsoft.com/office/drawing/2014/main" id="{154A2872-F13F-A587-2EE7-4FC380E7B56A}"/>
               </a:ext>
             </a:extLst>
           </p:cNvPr>
@@ -1598,7 +1598,7 @@
           <a:bodyPr/>
           <a:lstStyle/>
           <a:p>
-            <a:fld id="{265970A2-FCDD-49F9-A648-6CBE47DAE7A9}" type="datetimeFigureOut">
+            <a:fld id="{AC902F5A-E3F6-4856-8EE3-15CF50364D0A}" type="datetimeFigureOut">
               <a:rPr lang="de-DE" smtClean="0"/>
               <a:t>08.10.2026</a:t>
             </a:fld>
@@ -1611,7 +1611,7 @@
           <p:cNvPr id="6" name="Fußzeilenplatzhalter 5">
             <a:extLst>
               <a:ext uri="{FF2B5EF4-FFF2-40B4-BE49-F238E27FC236}">
-                <a16:creationId xmlns:a16="http://schemas.microsoft.com/office/drawing/2014/main" id="{BE847B6F-3FC3-7A34-F304-7EC670EDD972}"/>
+                <a16:creationId xmlns:a16="http://schemas.microsoft.com/office/drawing/2014/main" id="{FBC56DC0-82C3-9961-D9A1-1A965593CC3A}"/>
               </a:ext>
             </a:extLst>
           </p:cNvPr>
@@ -1636,7 +1636,7 @@
           <p:cNvPr id="7" name="Foliennummernplatzhalter 6">
             <a:extLst>
               <a:ext uri="{FF2B5EF4-FFF2-40B4-BE49-F238E27FC236}">
-                <a16:creationId xmlns:a16="http://schemas.microsoft.com/office/drawing/2014/main" id="{A9E4F2C4-4FB7-6E62-F1C2-0A07D299B6BB}"/>
+                <a16:creationId xmlns:a16="http://schemas.microsoft.com/office/drawing/2014/main" id="{7A0DB5E6-E4A7-F5B3-F937-ADF94AE16D37}"/>
               </a:ext>
             </a:extLst>
           </p:cNvPr>
@@ -1652,7 +1652,7 @@
           <a:bodyPr/>
           <a:lstStyle/>
           <a:p>
-            <a:fld id="{0A9764AB-229B-4A83-B043-EB433F5F0E3C}" type="slidenum">
+            <a:fld id="{E9424090-0FA0-4F74-87C3-2B9C08679DEB}" type="slidenum">
               <a:rPr lang="de-DE" smtClean="0"/>
               <a:t>‹Nr.›</a:t>
             </a:fld>
@@ -1663,7 +1663,7 @@
     </p:spTree>
     <p:extLst>
       <p:ext uri="{BB962C8B-B14F-4D97-AF65-F5344CB8AC3E}">
-        <p14:creationId xmlns:p14="http://schemas.microsoft.com/office/powerpoint/2010/main" val="834182277"/>
+        <p14:creationId xmlns:p14="http://schemas.microsoft.com/office/powerpoint/2010/main" val="2284184622"/>
       </p:ext>
     </p:extLst>
   </p:cSld>
@@ -1695,7 +1695,7 @@
           <p:cNvPr id="2" name="Titel 1">
             <a:extLst>
               <a:ext uri="{FF2B5EF4-FFF2-40B4-BE49-F238E27FC236}">
-                <a16:creationId xmlns:a16="http://schemas.microsoft.com/office/drawing/2014/main" id="{8F9E3F8C-432A-BB05-8E6F-6D78DF372C88}"/>
+                <a16:creationId xmlns:a16="http://schemas.microsoft.com/office/drawing/2014/main" id="{F71A6B0D-0FBF-4D55-5D62-1497A3CC8043}"/>
               </a:ext>
             </a:extLst>
           </p:cNvPr>
@@ -1728,7 +1728,7 @@
           <p:cNvPr id="3" name="Textplatzhalter 2">
             <a:extLst>
               <a:ext uri="{FF2B5EF4-FFF2-40B4-BE49-F238E27FC236}">
-                <a16:creationId xmlns:a16="http://schemas.microsoft.com/office/drawing/2014/main" id="{950DC452-3EFA-C65A-68DA-5F0FE438EC40}"/>
+                <a16:creationId xmlns:a16="http://schemas.microsoft.com/office/drawing/2014/main" id="{0B8E308B-BD93-C97C-55C9-E22BE352EC8F}"/>
               </a:ext>
             </a:extLst>
           </p:cNvPr>
@@ -1799,7 +1799,7 @@
           <p:cNvPr id="4" name="Inhaltsplatzhalter 3">
             <a:extLst>
               <a:ext uri="{FF2B5EF4-FFF2-40B4-BE49-F238E27FC236}">
-                <a16:creationId xmlns:a16="http://schemas.microsoft.com/office/drawing/2014/main" id="{A0E4AD35-6EA0-156D-29E8-1641D5DFE783}"/>
+                <a16:creationId xmlns:a16="http://schemas.microsoft.com/office/drawing/2014/main" id="{7473CC35-49E1-82CA-E890-D9604BA4F87A}"/>
               </a:ext>
             </a:extLst>
           </p:cNvPr>
@@ -1861,7 +1861,7 @@
           <p:cNvPr id="5" name="Textplatzhalter 4">
             <a:extLst>
               <a:ext uri="{FF2B5EF4-FFF2-40B4-BE49-F238E27FC236}">
-                <a16:creationId xmlns:a16="http://schemas.microsoft.com/office/drawing/2014/main" id="{0ABFF98F-7167-1DE2-BC3F-28A460919BA1}"/>
+                <a16:creationId xmlns:a16="http://schemas.microsoft.com/office/drawing/2014/main" id="{7BD099A3-7190-48A6-FBAD-A423E4B15C00}"/>
               </a:ext>
             </a:extLst>
           </p:cNvPr>
@@ -1932,7 +1932,7 @@
           <p:cNvPr id="6" name="Inhaltsplatzhalter 5">
             <a:extLst>
               <a:ext uri="{FF2B5EF4-FFF2-40B4-BE49-F238E27FC236}">
-                <a16:creationId xmlns:a16="http://schemas.microsoft.com/office/drawing/2014/main" id="{8F965F8B-E4FE-D008-24EA-3A4F931F561A}"/>
+                <a16:creationId xmlns:a16="http://schemas.microsoft.com/office/drawing/2014/main" id="{3E0A2D54-2821-5951-17BF-7674BF9BF3AE}"/>
               </a:ext>
             </a:extLst>
           </p:cNvPr>
@@ -1994,7 +1994,7 @@
           <p:cNvPr id="7" name="Datumsplatzhalter 6">
             <a:extLst>
               <a:ext uri="{FF2B5EF4-FFF2-40B4-BE49-F238E27FC236}">
-                <a16:creationId xmlns:a16="http://schemas.microsoft.com/office/drawing/2014/main" id="{F2848F71-5579-EFA6-7B51-B231A943C875}"/>
+                <a16:creationId xmlns:a16="http://schemas.microsoft.com/office/drawing/2014/main" id="{C5397363-CEC3-26FB-F6AD-0889CE261153}"/>
               </a:ext>
             </a:extLst>
           </p:cNvPr>
@@ -2010,7 +2010,7 @@
           <a:bodyPr/>
           <a:lstStyle/>
           <a:p>
-            <a:fld id="{265970A2-FCDD-49F9-A648-6CBE47DAE7A9}" type="datetimeFigureOut">
+            <a:fld id="{AC902F5A-E3F6-4856-8EE3-15CF50364D0A}" type="datetimeFigureOut">
               <a:rPr lang="de-DE" smtClean="0"/>
               <a:t>08.10.2026</a:t>
             </a:fld>
@@ -2023,7 +2023,7 @@
           <p:cNvPr id="8" name="Fußzeilenplatzhalter 7">
             <a:extLst>
               <a:ext uri="{FF2B5EF4-FFF2-40B4-BE49-F238E27FC236}">
-                <a16:creationId xmlns:a16="http://schemas.microsoft.com/office/drawing/2014/main" id="{DBB09FB7-C1A9-D161-39FC-D738B9791E8C}"/>
+                <a16:creationId xmlns:a16="http://schemas.microsoft.com/office/drawing/2014/main" id="{78E544D5-D93F-67A6-6EBA-A19F798CCFCE}"/>
               </a:ext>
             </a:extLst>
           </p:cNvPr>
@@ -2048,7 +2048,7 @@
           <p:cNvPr id="9" name="Foliennummernplatzhalter 8">
             <a:extLst>
               <a:ext uri="{FF2B5EF4-FFF2-40B4-BE49-F238E27FC236}">
-                <a16:creationId xmlns:a16="http://schemas.microsoft.com/office/drawing/2014/main" id="{A36E0725-0D35-8C35-BA43-83756DBFADD0}"/>
+                <a16:creationId xmlns:a16="http://schemas.microsoft.com/office/drawing/2014/main" id="{DDC3EC8F-346C-1A7C-7809-A928AC3E15DD}"/>
               </a:ext>
             </a:extLst>
           </p:cNvPr>
@@ -2064,7 +2064,7 @@
           <a:bodyPr/>
           <a:lstStyle/>
           <a:p>
-            <a:fld id="{0A9764AB-229B-4A83-B043-EB433F5F0E3C}" type="slidenum">
+            <a:fld id="{E9424090-0FA0-4F74-87C3-2B9C08679DEB}" type="slidenum">
               <a:rPr lang="de-DE" smtClean="0"/>
               <a:t>‹Nr.›</a:t>
             </a:fld>
@@ -2075,7 +2075,7 @@
     </p:spTree>
     <p:extLst>
       <p:ext uri="{BB962C8B-B14F-4D97-AF65-F5344CB8AC3E}">
-        <p14:creationId xmlns:p14="http://schemas.microsoft.com/office/powerpoint/2010/main" val="2633819881"/>
+        <p14:creationId xmlns:p14="http://schemas.microsoft.com/office/powerpoint/2010/main" val="4071105927"/>
       </p:ext>
     </p:extLst>
   </p:cSld>
@@ -2107,7 +2107,7 @@
           <p:cNvPr id="2" name="Titel 1">
             <a:extLst>
               <a:ext uri="{FF2B5EF4-FFF2-40B4-BE49-F238E27FC236}">
-                <a16:creationId xmlns:a16="http://schemas.microsoft.com/office/drawing/2014/main" id="{29242105-D0D7-28F3-E722-4A352CC26C83}"/>
+                <a16:creationId xmlns:a16="http://schemas.microsoft.com/office/drawing/2014/main" id="{866359EB-4CDF-F119-437E-71E1F946BC33}"/>
               </a:ext>
             </a:extLst>
           </p:cNvPr>
@@ -2135,7 +2135,7 @@
           <p:cNvPr id="3" name="Datumsplatzhalter 2">
             <a:extLst>
               <a:ext uri="{FF2B5EF4-FFF2-40B4-BE49-F238E27FC236}">
-                <a16:creationId xmlns:a16="http://schemas.microsoft.com/office/drawing/2014/main" id="{FC22E6EA-0454-FA3A-85D0-A7C3D47309D1}"/>
+                <a16:creationId xmlns:a16="http://schemas.microsoft.com/office/drawing/2014/main" id="{E51A89AD-E9E2-7595-E4F6-4E4E5AC7E9A4}"/>
               </a:ext>
             </a:extLst>
           </p:cNvPr>
@@ -2151,7 +2151,7 @@
           <a:bodyPr/>
           <a:lstStyle/>
           <a:p>
-            <a:fld id="{265970A2-FCDD-49F9-A648-6CBE47DAE7A9}" type="datetimeFigureOut">
+            <a:fld id="{AC902F5A-E3F6-4856-8EE3-15CF50364D0A}" type="datetimeFigureOut">
               <a:rPr lang="de-DE" smtClean="0"/>
               <a:t>08.10.2026</a:t>
             </a:fld>
@@ -2164,7 +2164,7 @@
           <p:cNvPr id="4" name="Fußzeilenplatzhalter 3">
             <a:extLst>
               <a:ext uri="{FF2B5EF4-FFF2-40B4-BE49-F238E27FC236}">
-                <a16:creationId xmlns:a16="http://schemas.microsoft.com/office/drawing/2014/main" id="{B8663C67-AEE4-4B9B-3513-A042CE45E493}"/>
+                <a16:creationId xmlns:a16="http://schemas.microsoft.com/office/drawing/2014/main" id="{799C15EB-E3F7-A451-8D7A-DE5E6530F852}"/>
               </a:ext>
             </a:extLst>
           </p:cNvPr>
@@ -2189,7 +2189,7 @@
           <p:cNvPr id="5" name="Foliennummernplatzhalter 4">
             <a:extLst>
               <a:ext uri="{FF2B5EF4-FFF2-40B4-BE49-F238E27FC236}">
-                <a16:creationId xmlns:a16="http://schemas.microsoft.com/office/drawing/2014/main" id="{E283ABA0-4EFB-9745-6DBA-42DA44DB8764}"/>
+                <a16:creationId xmlns:a16="http://schemas.microsoft.com/office/drawing/2014/main" id="{7A434CCF-E9F0-C2E6-5B42-50539ED50BBC}"/>
               </a:ext>
             </a:extLst>
           </p:cNvPr>
@@ -2205,7 +2205,7 @@
           <a:bodyPr/>
           <a:lstStyle/>
           <a:p>
-            <a:fld id="{0A9764AB-229B-4A83-B043-EB433F5F0E3C}" type="slidenum">
+            <a:fld id="{E9424090-0FA0-4F74-87C3-2B9C08679DEB}" type="slidenum">
               <a:rPr lang="de-DE" smtClean="0"/>
               <a:t>‹Nr.›</a:t>
             </a:fld>
@@ -2216,7 +2216,7 @@
     </p:spTree>
     <p:extLst>
       <p:ext uri="{BB962C8B-B14F-4D97-AF65-F5344CB8AC3E}">
-        <p14:creationId xmlns:p14="http://schemas.microsoft.com/office/powerpoint/2010/main" val="3098178113"/>
+        <p14:creationId xmlns:p14="http://schemas.microsoft.com/office/powerpoint/2010/main" val="1402145651"/>
       </p:ext>
     </p:extLst>
   </p:cSld>
@@ -2248,7 +2248,7 @@
           <p:cNvPr id="2" name="Datumsplatzhalter 1">
             <a:extLst>
               <a:ext uri="{FF2B5EF4-FFF2-40B4-BE49-F238E27FC236}">
-                <a16:creationId xmlns:a16="http://schemas.microsoft.com/office/drawing/2014/main" id="{C377E7B6-76B1-E4E2-E69B-F8CB8275F507}"/>
+                <a16:creationId xmlns:a16="http://schemas.microsoft.com/office/drawing/2014/main" id="{4D007836-C715-A589-649D-C18203349232}"/>
               </a:ext>
             </a:extLst>
           </p:cNvPr>
@@ -2264,7 +2264,7 @@
           <a:bodyPr/>
           <a:lstStyle/>
           <a:p>
-            <a:fld id="{265970A2-FCDD-49F9-A648-6CBE47DAE7A9}" type="datetimeFigureOut">
+            <a:fld id="{AC902F5A-E3F6-4856-8EE3-15CF50364D0A}" type="datetimeFigureOut">
               <a:rPr lang="de-DE" smtClean="0"/>
               <a:t>08.10.2026</a:t>
             </a:fld>
@@ -2277,7 +2277,7 @@
           <p:cNvPr id="3" name="Fußzeilenplatzhalter 2">
             <a:extLst>
               <a:ext uri="{FF2B5EF4-FFF2-40B4-BE49-F238E27FC236}">
-                <a16:creationId xmlns:a16="http://schemas.microsoft.com/office/drawing/2014/main" id="{DAE4852B-9652-28B4-CBF9-E44625A919B4}"/>
+                <a16:creationId xmlns:a16="http://schemas.microsoft.com/office/drawing/2014/main" id="{A87058E0-C9DD-389B-A973-8881D53F6771}"/>
               </a:ext>
             </a:extLst>
           </p:cNvPr>
@@ -2302,7 +2302,7 @@
           <p:cNvPr id="4" name="Foliennummernplatzhalter 3">
             <a:extLst>
               <a:ext uri="{FF2B5EF4-FFF2-40B4-BE49-F238E27FC236}">
-                <a16:creationId xmlns:a16="http://schemas.microsoft.com/office/drawing/2014/main" id="{D0E2EAFB-B197-48FE-31B2-797F91186DC8}"/>
+                <a16:creationId xmlns:a16="http://schemas.microsoft.com/office/drawing/2014/main" id="{375A0DA2-27A5-032D-CB8E-18DA49734F99}"/>
               </a:ext>
             </a:extLst>
           </p:cNvPr>
@@ -2318,7 +2318,7 @@
           <a:bodyPr/>
           <a:lstStyle/>
           <a:p>
-            <a:fld id="{0A9764AB-229B-4A83-B043-EB433F5F0E3C}" type="slidenum">
+            <a:fld id="{E9424090-0FA0-4F74-87C3-2B9C08679DEB}" type="slidenum">
               <a:rPr lang="de-DE" smtClean="0"/>
               <a:t>‹Nr.›</a:t>
             </a:fld>
@@ -2329,7 +2329,7 @@
     </p:spTree>
     <p:extLst>
       <p:ext uri="{BB962C8B-B14F-4D97-AF65-F5344CB8AC3E}">
-        <p14:creationId xmlns:p14="http://schemas.microsoft.com/office/powerpoint/2010/main" val="607531606"/>
+        <p14:creationId xmlns:p14="http://schemas.microsoft.com/office/powerpoint/2010/main" val="1622061599"/>
       </p:ext>
     </p:extLst>
   </p:cSld>
@@ -2361,7 +2361,7 @@
           <p:cNvPr id="2" name="Titel 1">
             <a:extLst>
               <a:ext uri="{FF2B5EF4-FFF2-40B4-BE49-F238E27FC236}">
-                <a16:creationId xmlns:a16="http://schemas.microsoft.com/office/drawing/2014/main" id="{42BDB180-BE1F-DE14-AFCE-11CDA544C508}"/>
+                <a16:creationId xmlns:a16="http://schemas.microsoft.com/office/drawing/2014/main" id="{3C585C1E-46C6-60C2-F634-8DE3671A4FC2}"/>
               </a:ext>
             </a:extLst>
           </p:cNvPr>
@@ -2398,7 +2398,7 @@
           <p:cNvPr id="3" name="Inhaltsplatzhalter 2">
             <a:extLst>
               <a:ext uri="{FF2B5EF4-FFF2-40B4-BE49-F238E27FC236}">
-                <a16:creationId xmlns:a16="http://schemas.microsoft.com/office/drawing/2014/main" id="{D6BBA073-829A-0C41-98F3-DA310614A581}"/>
+                <a16:creationId xmlns:a16="http://schemas.microsoft.com/office/drawing/2014/main" id="{6DE003DD-572C-3368-BDA4-F9FAB2A70061}"/>
               </a:ext>
             </a:extLst>
           </p:cNvPr>
@@ -2488,7 +2488,7 @@
           <p:cNvPr id="4" name="Textplatzhalter 3">
             <a:extLst>
               <a:ext uri="{FF2B5EF4-FFF2-40B4-BE49-F238E27FC236}">
-                <a16:creationId xmlns:a16="http://schemas.microsoft.com/office/drawing/2014/main" id="{3B603670-EB1A-2DDA-4208-7395745C76B9}"/>
+                <a16:creationId xmlns:a16="http://schemas.microsoft.com/office/drawing/2014/main" id="{067F6692-5411-539B-FAE2-74958E20E937}"/>
               </a:ext>
             </a:extLst>
           </p:cNvPr>
@@ -2559,7 +2559,7 @@
           <p:cNvPr id="5" name="Datumsplatzhalter 4">
             <a:extLst>
               <a:ext uri="{FF2B5EF4-FFF2-40B4-BE49-F238E27FC236}">
-                <a16:creationId xmlns:a16="http://schemas.microsoft.com/office/drawing/2014/main" id="{F6087A58-AF10-539F-8DE3-1D1D6EA1018F}"/>
+                <a16:creationId xmlns:a16="http://schemas.microsoft.com/office/drawing/2014/main" id="{F0833F2E-6139-82A2-955C-55D7E71FEEB5}"/>
               </a:ext>
             </a:extLst>
           </p:cNvPr>
@@ -2575,7 +2575,7 @@
           <a:bodyPr/>
           <a:lstStyle/>
           <a:p>
-            <a:fld id="{265970A2-FCDD-49F9-A648-6CBE47DAE7A9}" type="datetimeFigureOut">
+            <a:fld id="{AC902F5A-E3F6-4856-8EE3-15CF50364D0A}" type="datetimeFigureOut">
               <a:rPr lang="de-DE" smtClean="0"/>
               <a:t>08.10.2026</a:t>
             </a:fld>
@@ -2588,7 +2588,7 @@
           <p:cNvPr id="6" name="Fußzeilenplatzhalter 5">
             <a:extLst>
               <a:ext uri="{FF2B5EF4-FFF2-40B4-BE49-F238E27FC236}">
-                <a16:creationId xmlns:a16="http://schemas.microsoft.com/office/drawing/2014/main" id="{1C4DA6FC-70DA-6905-1067-6E62D8500469}"/>
+                <a16:creationId xmlns:a16="http://schemas.microsoft.com/office/drawing/2014/main" id="{23AD1D31-4637-4B6C-9C86-396F6872730C}"/>
               </a:ext>
             </a:extLst>
           </p:cNvPr>
@@ -2613,7 +2613,7 @@
           <p:cNvPr id="7" name="Foliennummernplatzhalter 6">
             <a:extLst>
               <a:ext uri="{FF2B5EF4-FFF2-40B4-BE49-F238E27FC236}">
-                <a16:creationId xmlns:a16="http://schemas.microsoft.com/office/drawing/2014/main" id="{F0048405-5A0D-4093-BE2C-6D712D2F1486}"/>
+                <a16:creationId xmlns:a16="http://schemas.microsoft.com/office/drawing/2014/main" id="{9B3B3959-E81A-7E30-18DC-5990429C46F1}"/>
               </a:ext>
             </a:extLst>
           </p:cNvPr>
@@ -2629,7 +2629,7 @@
           <a:bodyPr/>
           <a:lstStyle/>
           <a:p>
-            <a:fld id="{0A9764AB-229B-4A83-B043-EB433F5F0E3C}" type="slidenum">
+            <a:fld id="{E9424090-0FA0-4F74-87C3-2B9C08679DEB}" type="slidenum">
               <a:rPr lang="de-DE" smtClean="0"/>
               <a:t>‹Nr.›</a:t>
             </a:fld>
@@ -2640,7 +2640,7 @@
     </p:spTree>
     <p:extLst>
       <p:ext uri="{BB962C8B-B14F-4D97-AF65-F5344CB8AC3E}">
-        <p14:creationId xmlns:p14="http://schemas.microsoft.com/office/powerpoint/2010/main" val="1719171801"/>
+        <p14:creationId xmlns:p14="http://schemas.microsoft.com/office/powerpoint/2010/main" val="2535757583"/>
       </p:ext>
     </p:extLst>
   </p:cSld>
@@ -2672,7 +2672,7 @@
           <p:cNvPr id="2" name="Titel 1">
             <a:extLst>
               <a:ext uri="{FF2B5EF4-FFF2-40B4-BE49-F238E27FC236}">
-                <a16:creationId xmlns:a16="http://schemas.microsoft.com/office/drawing/2014/main" id="{DA3A65D5-A5BB-7089-34EE-38F5766C7AA2}"/>
+                <a16:creationId xmlns:a16="http://schemas.microsoft.com/office/drawing/2014/main" id="{E926BFB5-2B12-EC52-0E96-FCC909BDE2B1}"/>
               </a:ext>
             </a:extLst>
           </p:cNvPr>
@@ -2709,7 +2709,7 @@
           <p:cNvPr id="3" name="Bildplatzhalter 2">
             <a:extLst>
               <a:ext uri="{FF2B5EF4-FFF2-40B4-BE49-F238E27FC236}">
-                <a16:creationId xmlns:a16="http://schemas.microsoft.com/office/drawing/2014/main" id="{57046263-F25A-63F5-5684-68061B94C83D}"/>
+                <a16:creationId xmlns:a16="http://schemas.microsoft.com/office/drawing/2014/main" id="{E774A176-76B8-F68D-5D50-474CAAE14E1A}"/>
               </a:ext>
             </a:extLst>
           </p:cNvPr>
@@ -2776,7 +2776,7 @@
           <p:cNvPr id="4" name="Textplatzhalter 3">
             <a:extLst>
               <a:ext uri="{FF2B5EF4-FFF2-40B4-BE49-F238E27FC236}">
-                <a16:creationId xmlns:a16="http://schemas.microsoft.com/office/drawing/2014/main" id="{BFF17351-974F-5E97-9377-E69AAB09EF78}"/>
+                <a16:creationId xmlns:a16="http://schemas.microsoft.com/office/drawing/2014/main" id="{C8014EF6-7502-2419-95C7-CAD651476ABA}"/>
               </a:ext>
             </a:extLst>
           </p:cNvPr>
@@ -2847,7 +2847,7 @@
           <p:cNvPr id="5" name="Datumsplatzhalter 4">
             <a:extLst>
               <a:ext uri="{FF2B5EF4-FFF2-40B4-BE49-F238E27FC236}">
-                <a16:creationId xmlns:a16="http://schemas.microsoft.com/office/drawing/2014/main" id="{0E12C530-DD3E-F3F5-265D-6A5B9EFBAAE1}"/>
+                <a16:creationId xmlns:a16="http://schemas.microsoft.com/office/drawing/2014/main" id="{5701E4B8-4D55-1B23-4FC4-51F59856E1AB}"/>
               </a:ext>
             </a:extLst>
           </p:cNvPr>
@@ -2863,7 +2863,7 @@
           <a:bodyPr/>
           <a:lstStyle/>
           <a:p>
-            <a:fld id="{265970A2-FCDD-49F9-A648-6CBE47DAE7A9}" type="datetimeFigureOut">
+            <a:fld id="{AC902F5A-E3F6-4856-8EE3-15CF50364D0A}" type="datetimeFigureOut">
               <a:rPr lang="de-DE" smtClean="0"/>
               <a:t>08.10.2026</a:t>
             </a:fld>
@@ -2876,7 +2876,7 @@
           <p:cNvPr id="6" name="Fußzeilenplatzhalter 5">
             <a:extLst>
               <a:ext uri="{FF2B5EF4-FFF2-40B4-BE49-F238E27FC236}">
-                <a16:creationId xmlns:a16="http://schemas.microsoft.com/office/drawing/2014/main" id="{90A5C65B-2D2B-D1EC-17B9-ABA29C0CFEBE}"/>
+                <a16:creationId xmlns:a16="http://schemas.microsoft.com/office/drawing/2014/main" id="{BEE58C6A-50B6-D794-6959-C8F4099E5C07}"/>
               </a:ext>
             </a:extLst>
           </p:cNvPr>
@@ -2901,7 +2901,7 @@
           <p:cNvPr id="7" name="Foliennummernplatzhalter 6">
             <a:extLst>
               <a:ext uri="{FF2B5EF4-FFF2-40B4-BE49-F238E27FC236}">
-                <a16:creationId xmlns:a16="http://schemas.microsoft.com/office/drawing/2014/main" id="{FDBF733B-BF89-FD2F-DCF1-DF3A720C20C4}"/>
+                <a16:creationId xmlns:a16="http://schemas.microsoft.com/office/drawing/2014/main" id="{846EDB47-3736-E852-370E-36A60574AF8A}"/>
               </a:ext>
             </a:extLst>
           </p:cNvPr>
@@ -2917,7 +2917,7 @@
           <a:bodyPr/>
           <a:lstStyle/>
           <a:p>
-            <a:fld id="{0A9764AB-229B-4A83-B043-EB433F5F0E3C}" type="slidenum">
+            <a:fld id="{E9424090-0FA0-4F74-87C3-2B9C08679DEB}" type="slidenum">
               <a:rPr lang="de-DE" smtClean="0"/>
               <a:t>‹Nr.›</a:t>
             </a:fld>
@@ -2928,7 +2928,7 @@
     </p:spTree>
     <p:extLst>
       <p:ext uri="{BB962C8B-B14F-4D97-AF65-F5344CB8AC3E}">
-        <p14:creationId xmlns:p14="http://schemas.microsoft.com/office/powerpoint/2010/main" val="2768223296"/>
+        <p14:creationId xmlns:p14="http://schemas.microsoft.com/office/powerpoint/2010/main" val="3704182908"/>
       </p:ext>
     </p:extLst>
   </p:cSld>
@@ -2965,7 +2965,7 @@
           <p:cNvPr id="2" name="Titelplatzhalter 1">
             <a:extLst>
               <a:ext uri="{FF2B5EF4-FFF2-40B4-BE49-F238E27FC236}">
-                <a16:creationId xmlns:a16="http://schemas.microsoft.com/office/drawing/2014/main" id="{F694C1D8-2F53-919F-B3A5-C3BB863AEA4A}"/>
+                <a16:creationId xmlns:a16="http://schemas.microsoft.com/office/drawing/2014/main" id="{ACCB893F-3B0C-779D-2A83-306ECC3966EA}"/>
               </a:ext>
             </a:extLst>
           </p:cNvPr>
@@ -3003,7 +3003,7 @@
           <p:cNvPr id="3" name="Textplatzhalter 2">
             <a:extLst>
               <a:ext uri="{FF2B5EF4-FFF2-40B4-BE49-F238E27FC236}">
-                <a16:creationId xmlns:a16="http://schemas.microsoft.com/office/drawing/2014/main" id="{5569A403-528A-8057-0B87-1C1470CB5E5C}"/>
+                <a16:creationId xmlns:a16="http://schemas.microsoft.com/office/drawing/2014/main" id="{6A6885D4-BAE4-A37D-81BD-2EB33842FB72}"/>
               </a:ext>
             </a:extLst>
           </p:cNvPr>
@@ -3070,7 +3070,7 @@
           <p:cNvPr id="4" name="Datumsplatzhalter 3">
             <a:extLst>
               <a:ext uri="{FF2B5EF4-FFF2-40B4-BE49-F238E27FC236}">
-                <a16:creationId xmlns:a16="http://schemas.microsoft.com/office/drawing/2014/main" id="{A8741C6B-888C-B28E-C33E-22D0CF9F1361}"/>
+                <a16:creationId xmlns:a16="http://schemas.microsoft.com/office/drawing/2014/main" id="{43F00714-CD70-3F14-8990-B636E7B9EFD2}"/>
               </a:ext>
             </a:extLst>
           </p:cNvPr>
@@ -3104,7 +3104,7 @@
             </a:lvl1pPr>
           </a:lstStyle>
           <a:p>
-            <a:fld id="{265970A2-FCDD-49F9-A648-6CBE47DAE7A9}" type="datetimeFigureOut">
+            <a:fld id="{AC902F5A-E3F6-4856-8EE3-15CF50364D0A}" type="datetimeFigureOut">
               <a:rPr lang="de-DE" smtClean="0"/>
               <a:t>08.10.2026</a:t>
             </a:fld>
@@ -3117,7 +3117,7 @@
           <p:cNvPr id="5" name="Fußzeilenplatzhalter 4">
             <a:extLst>
               <a:ext uri="{FF2B5EF4-FFF2-40B4-BE49-F238E27FC236}">
-                <a16:creationId xmlns:a16="http://schemas.microsoft.com/office/drawing/2014/main" id="{E2814ABC-B4BF-BD98-CF42-8BE9B250694C}"/>
+                <a16:creationId xmlns:a16="http://schemas.microsoft.com/office/drawing/2014/main" id="{DD9BB4F1-0C1B-C66D-6B87-C26870DF3034}"/>
               </a:ext>
             </a:extLst>
           </p:cNvPr>
@@ -3160,7 +3160,7 @@
           <p:cNvPr id="6" name="Foliennummernplatzhalter 5">
             <a:extLst>
               <a:ext uri="{FF2B5EF4-FFF2-40B4-BE49-F238E27FC236}">
-                <a16:creationId xmlns:a16="http://schemas.microsoft.com/office/drawing/2014/main" id="{3E5A88C7-ADF7-B68A-E59C-5D04D859938E}"/>
+                <a16:creationId xmlns:a16="http://schemas.microsoft.com/office/drawing/2014/main" id="{F9B0E133-5272-2423-B8D9-3888072051CB}"/>
               </a:ext>
             </a:extLst>
           </p:cNvPr>
@@ -3194,7 +3194,7 @@
             </a:lvl1pPr>
           </a:lstStyle>
           <a:p>
-            <a:fld id="{0A9764AB-229B-4A83-B043-EB433F5F0E3C}" type="slidenum">
+            <a:fld id="{E9424090-0FA0-4F74-87C3-2B9C08679DEB}" type="slidenum">
               <a:rPr lang="de-DE" smtClean="0"/>
               <a:t>‹Nr.›</a:t>
             </a:fld>
@@ -3205,7 +3205,7 @@
     </p:spTree>
     <p:extLst>
       <p:ext uri="{BB962C8B-B14F-4D97-AF65-F5344CB8AC3E}">
-        <p14:creationId xmlns:p14="http://schemas.microsoft.com/office/powerpoint/2010/main" val="2148511138"/>
+        <p14:creationId xmlns:p14="http://schemas.microsoft.com/office/powerpoint/2010/main" val="1192843583"/>
       </p:ext>
     </p:extLst>
   </p:cSld>
@@ -3529,7 +3529,7 @@
           <p:cNvPr id="2" name="Titel 1">
             <a:extLst>
               <a:ext uri="{FF2B5EF4-FFF2-40B4-BE49-F238E27FC236}">
-                <a16:creationId xmlns:a16="http://schemas.microsoft.com/office/drawing/2014/main" id="{35350126-7310-5495-7853-82A2290CAFA0}"/>
+                <a16:creationId xmlns:a16="http://schemas.microsoft.com/office/drawing/2014/main" id="{81B9BEE0-533A-B42A-0B49-2DF583255492}"/>
               </a:ext>
             </a:extLst>
           </p:cNvPr>
@@ -3557,7 +3557,7 @@
           <p:cNvPr id="3" name="Untertitel 2">
             <a:extLst>
               <a:ext uri="{FF2B5EF4-FFF2-40B4-BE49-F238E27FC236}">
-                <a16:creationId xmlns:a16="http://schemas.microsoft.com/office/drawing/2014/main" id="{02EFD5FC-F74D-0008-8DDA-A38D1ACEF2EF}"/>
+                <a16:creationId xmlns:a16="http://schemas.microsoft.com/office/drawing/2014/main" id="{D82228E3-0929-EF84-7854-40114D0AFEE5}"/>
               </a:ext>
             </a:extLst>
           </p:cNvPr>
@@ -3584,7 +3584,7 @@
     </p:spTree>
     <p:extLst>
       <p:ext uri="{BB962C8B-B14F-4D97-AF65-F5344CB8AC3E}">
-        <p14:creationId xmlns:p14="http://schemas.microsoft.com/office/powerpoint/2010/main" val="3237233203"/>
+        <p14:creationId xmlns:p14="http://schemas.microsoft.com/office/powerpoint/2010/main" val="2914099924"/>
       </p:ext>
     </p:extLst>
   </p:cSld>
@@ -3616,7 +3616,7 @@
           <p:cNvPr id="2" name="Titel 1">
             <a:extLst>
               <a:ext uri="{FF2B5EF4-FFF2-40B4-BE49-F238E27FC236}">
-                <a16:creationId xmlns:a16="http://schemas.microsoft.com/office/drawing/2014/main" id="{4D1D4348-C583-9958-DADC-DB5C2CF9D720}"/>
+                <a16:creationId xmlns:a16="http://schemas.microsoft.com/office/drawing/2014/main" id="{B34B03E4-AE65-8820-2300-53E0F13E9E6E}"/>
               </a:ext>
             </a:extLst>
           </p:cNvPr>
@@ -3644,7 +3644,7 @@
           <p:cNvPr id="3" name="Textplatzhalter 2">
             <a:extLst>
               <a:ext uri="{FF2B5EF4-FFF2-40B4-BE49-F238E27FC236}">
-                <a16:creationId xmlns:a16="http://schemas.microsoft.com/office/drawing/2014/main" id="{9BBCF804-E7DA-DE4D-1ABE-4C43EC3A2FA5}"/>
+                <a16:creationId xmlns:a16="http://schemas.microsoft.com/office/drawing/2014/main" id="{A7BCB149-DA62-A809-7F97-5298CDA6EFA3}"/>
               </a:ext>
             </a:extLst>
           </p:cNvPr>
@@ -3704,7 +3704,7 @@
     </p:spTree>
     <p:extLst>
       <p:ext uri="{BB962C8B-B14F-4D97-AF65-F5344CB8AC3E}">
-        <p14:creationId xmlns:p14="http://schemas.microsoft.com/office/powerpoint/2010/main" val="3739178692"/>
+        <p14:creationId xmlns:p14="http://schemas.microsoft.com/office/powerpoint/2010/main" val="1127057422"/>
       </p:ext>
     </p:extLst>
   </p:cSld>
@@ -3736,7 +3736,7 @@
           <p:cNvPr id="2" name="Titel 1">
             <a:extLst>
               <a:ext uri="{FF2B5EF4-FFF2-40B4-BE49-F238E27FC236}">
-                <a16:creationId xmlns:a16="http://schemas.microsoft.com/office/drawing/2014/main" id="{59D733C3-8D65-71FF-3FEA-142C00F5DD82}"/>
+                <a16:creationId xmlns:a16="http://schemas.microsoft.com/office/drawing/2014/main" id="{7D79EB6B-0110-0C33-3FFA-7FE71BE8548B}"/>
               </a:ext>
             </a:extLst>
           </p:cNvPr>
@@ -3764,7 +3764,7 @@
           <p:cNvPr id="3" name="Textfeld 2">
             <a:extLst>
               <a:ext uri="{FF2B5EF4-FFF2-40B4-BE49-F238E27FC236}">
-                <a16:creationId xmlns:a16="http://schemas.microsoft.com/office/drawing/2014/main" id="{34EDC239-D9BD-A33C-767F-3C6FC89C414D}"/>
+                <a16:creationId xmlns:a16="http://schemas.microsoft.com/office/drawing/2014/main" id="{4907F40E-416A-C28D-6BB3-F36A372FD6B3}"/>
               </a:ext>
             </a:extLst>
           </p:cNvPr>
@@ -3810,7 +3810,7 @@
           <p:cNvPr id="4" name="Textfeld 3">
             <a:extLst>
               <a:ext uri="{FF2B5EF4-FFF2-40B4-BE49-F238E27FC236}">
-                <a16:creationId xmlns:a16="http://schemas.microsoft.com/office/drawing/2014/main" id="{BA0249AD-116E-842D-0CA4-C74276D7FE32}"/>
+                <a16:creationId xmlns:a16="http://schemas.microsoft.com/office/drawing/2014/main" id="{7225BC3A-A1FE-0FC4-4186-C581B7045FC7}"/>
               </a:ext>
             </a:extLst>
           </p:cNvPr>
@@ -3856,7 +3856,7 @@
           <p:cNvPr id="5" name="Textfeld 4">
             <a:extLst>
               <a:ext uri="{FF2B5EF4-FFF2-40B4-BE49-F238E27FC236}">
-                <a16:creationId xmlns:a16="http://schemas.microsoft.com/office/drawing/2014/main" id="{999E8447-E472-9B8D-035A-4670AD42B1D3}"/>
+                <a16:creationId xmlns:a16="http://schemas.microsoft.com/office/drawing/2014/main" id="{D0929972-0FD1-36A9-9BF3-AF296B0B425E}"/>
               </a:ext>
             </a:extLst>
           </p:cNvPr>
@@ -3902,7 +3902,7 @@
           <p:cNvPr id="6" name="Textfeld 5">
             <a:extLst>
               <a:ext uri="{FF2B5EF4-FFF2-40B4-BE49-F238E27FC236}">
-                <a16:creationId xmlns:a16="http://schemas.microsoft.com/office/drawing/2014/main" id="{E737C768-BDD0-DB1D-FADB-E8DD14DCA56D}"/>
+                <a16:creationId xmlns:a16="http://schemas.microsoft.com/office/drawing/2014/main" id="{EFE14F7B-7137-ED87-FD37-CAD02AE46DAB}"/>
               </a:ext>
             </a:extLst>
           </p:cNvPr>
@@ -3948,7 +3948,7 @@
           <p:cNvPr id="7" name="Textfeld 6">
             <a:extLst>
               <a:ext uri="{FF2B5EF4-FFF2-40B4-BE49-F238E27FC236}">
-                <a16:creationId xmlns:a16="http://schemas.microsoft.com/office/drawing/2014/main" id="{DE1D5A71-D678-520C-A011-332B1857D7BC}"/>
+                <a16:creationId xmlns:a16="http://schemas.microsoft.com/office/drawing/2014/main" id="{2FE3B668-F4F5-6F3C-D525-5015952597C9}"/>
               </a:ext>
             </a:extLst>
           </p:cNvPr>
@@ -3994,7 +3994,7 @@
           <p:cNvPr id="8" name="Textfeld 7">
             <a:extLst>
               <a:ext uri="{FF2B5EF4-FFF2-40B4-BE49-F238E27FC236}">
-                <a16:creationId xmlns:a16="http://schemas.microsoft.com/office/drawing/2014/main" id="{DA5C0ED5-5E31-0A8B-5EE3-D2DA52C44B26}"/>
+                <a16:creationId xmlns:a16="http://schemas.microsoft.com/office/drawing/2014/main" id="{E315AB66-7E2C-E892-A9A7-081F6333880F}"/>
               </a:ext>
             </a:extLst>
           </p:cNvPr>
@@ -4038,7 +4038,7 @@
     </p:spTree>
     <p:extLst>
       <p:ext uri="{BB962C8B-B14F-4D97-AF65-F5344CB8AC3E}">
-        <p14:creationId xmlns:p14="http://schemas.microsoft.com/office/powerpoint/2010/main" val="4263128735"/>
+        <p14:creationId xmlns:p14="http://schemas.microsoft.com/office/powerpoint/2010/main" val="2257965875"/>
       </p:ext>
     </p:extLst>
   </p:cSld>
@@ -4070,7 +4070,7 @@
           <p:cNvPr id="2" name="Titel 1">
             <a:extLst>
               <a:ext uri="{FF2B5EF4-FFF2-40B4-BE49-F238E27FC236}">
-                <a16:creationId xmlns:a16="http://schemas.microsoft.com/office/drawing/2014/main" id="{DB84721E-54E7-D156-D559-D6F9F1AED2FC}"/>
+                <a16:creationId xmlns:a16="http://schemas.microsoft.com/office/drawing/2014/main" id="{CC2B08D3-6D88-FCF6-82F1-F7056D06878A}"/>
               </a:ext>
             </a:extLst>
           </p:cNvPr>
@@ -4098,7 +4098,7 @@
           <p:cNvPr id="3" name="Rechteck 2">
             <a:extLst>
               <a:ext uri="{FF2B5EF4-FFF2-40B4-BE49-F238E27FC236}">
-                <a16:creationId xmlns:a16="http://schemas.microsoft.com/office/drawing/2014/main" id="{2D07F4F7-A589-991C-9CFE-CB3065985796}"/>
+                <a16:creationId xmlns:a16="http://schemas.microsoft.com/office/drawing/2014/main" id="{C7EB5D88-BA79-A203-BEE8-3906A04D1238}"/>
               </a:ext>
             </a:extLst>
           </p:cNvPr>
@@ -4147,7 +4147,7 @@
           <p:cNvPr id="4" name="Rechteck 3">
             <a:extLst>
               <a:ext uri="{FF2B5EF4-FFF2-40B4-BE49-F238E27FC236}">
-                <a16:creationId xmlns:a16="http://schemas.microsoft.com/office/drawing/2014/main" id="{2A3207DB-379B-258C-10B0-3E9C956F7831}"/>
+                <a16:creationId xmlns:a16="http://schemas.microsoft.com/office/drawing/2014/main" id="{E27BC5A1-086E-76DD-DD3D-6009C699F330}"/>
               </a:ext>
             </a:extLst>
           </p:cNvPr>
@@ -4196,7 +4196,7 @@
           <p:cNvPr id="5" name="Rechteck 4">
             <a:extLst>
               <a:ext uri="{FF2B5EF4-FFF2-40B4-BE49-F238E27FC236}">
-                <a16:creationId xmlns:a16="http://schemas.microsoft.com/office/drawing/2014/main" id="{AF9FDB77-4503-F0F3-A3C8-DD8ACBB9168D}"/>
+                <a16:creationId xmlns:a16="http://schemas.microsoft.com/office/drawing/2014/main" id="{6608C861-327D-825C-791B-895C9867466A}"/>
               </a:ext>
             </a:extLst>
           </p:cNvPr>
@@ -4245,7 +4245,7 @@
           <p:cNvPr id="6" name="Rechteck 5">
             <a:extLst>
               <a:ext uri="{FF2B5EF4-FFF2-40B4-BE49-F238E27FC236}">
-                <a16:creationId xmlns:a16="http://schemas.microsoft.com/office/drawing/2014/main" id="{5CAF43C8-3935-063B-668E-148AB3200822}"/>
+                <a16:creationId xmlns:a16="http://schemas.microsoft.com/office/drawing/2014/main" id="{DFAC83CB-9AF4-EDF6-FBF7-C4493DE04B17}"/>
               </a:ext>
             </a:extLst>
           </p:cNvPr>
@@ -4295,7 +4295,7 @@
           <p:cNvPr id="7" name="Rechteck 6">
             <a:extLst>
               <a:ext uri="{FF2B5EF4-FFF2-40B4-BE49-F238E27FC236}">
-                <a16:creationId xmlns:a16="http://schemas.microsoft.com/office/drawing/2014/main" id="{17B5322A-C2AF-A8AE-5440-8F43B3F76DE3}"/>
+                <a16:creationId xmlns:a16="http://schemas.microsoft.com/office/drawing/2014/main" id="{78FDBA72-5846-BFAE-DE53-516038D6A285}"/>
               </a:ext>
             </a:extLst>
           </p:cNvPr>
@@ -4345,7 +4345,7 @@
           <p:cNvPr id="8" name="Rechteck 7">
             <a:extLst>
               <a:ext uri="{FF2B5EF4-FFF2-40B4-BE49-F238E27FC236}">
-                <a16:creationId xmlns:a16="http://schemas.microsoft.com/office/drawing/2014/main" id="{0AAFC211-4B79-59B0-DFFE-699341144D47}"/>
+                <a16:creationId xmlns:a16="http://schemas.microsoft.com/office/drawing/2014/main" id="{B61EF923-33CF-30B1-46C4-912A9EFE3735}"/>
               </a:ext>
             </a:extLst>
           </p:cNvPr>
@@ -4395,7 +4395,7 @@
           <p:cNvPr id="9" name="Rechteck 8">
             <a:extLst>
               <a:ext uri="{FF2B5EF4-FFF2-40B4-BE49-F238E27FC236}">
-                <a16:creationId xmlns:a16="http://schemas.microsoft.com/office/drawing/2014/main" id="{5B684AA8-2B81-514E-CC9C-14CCA0586EFB}"/>
+                <a16:creationId xmlns:a16="http://schemas.microsoft.com/office/drawing/2014/main" id="{9D186F48-7C1F-584C-8FFB-69E491CA2C47}"/>
               </a:ext>
             </a:extLst>
           </p:cNvPr>
@@ -4445,7 +4445,7 @@
           <p:cNvPr id="10" name="Rechteck 9">
             <a:extLst>
               <a:ext uri="{FF2B5EF4-FFF2-40B4-BE49-F238E27FC236}">
-                <a16:creationId xmlns:a16="http://schemas.microsoft.com/office/drawing/2014/main" id="{7A5D6EF0-EC50-51D1-E63F-26802E60EFDF}"/>
+                <a16:creationId xmlns:a16="http://schemas.microsoft.com/office/drawing/2014/main" id="{CA50D2C1-8766-730C-E905-96E1BEF70738}"/>
               </a:ext>
             </a:extLst>
           </p:cNvPr>
@@ -4495,7 +4495,7 @@
           <p:cNvPr id="11" name="Rechteck 10">
             <a:extLst>
               <a:ext uri="{FF2B5EF4-FFF2-40B4-BE49-F238E27FC236}">
-                <a16:creationId xmlns:a16="http://schemas.microsoft.com/office/drawing/2014/main" id="{1FE2B62E-BB98-56D0-F954-588CBD3B40F4}"/>
+                <a16:creationId xmlns:a16="http://schemas.microsoft.com/office/drawing/2014/main" id="{E2231BA6-66F4-442D-5450-EAB6C3F7D146}"/>
               </a:ext>
             </a:extLst>
           </p:cNvPr>
@@ -4545,7 +4545,7 @@
           <p:cNvPr id="12" name="Rechteck 11">
             <a:extLst>
               <a:ext uri="{FF2B5EF4-FFF2-40B4-BE49-F238E27FC236}">
-                <a16:creationId xmlns:a16="http://schemas.microsoft.com/office/drawing/2014/main" id="{B8A0215C-05FA-D06B-A4D2-2CCC513E8299}"/>
+                <a16:creationId xmlns:a16="http://schemas.microsoft.com/office/drawing/2014/main" id="{6F191379-1137-B6DF-8AD6-69D892BF0EA6}"/>
               </a:ext>
             </a:extLst>
           </p:cNvPr>
@@ -4595,7 +4595,7 @@
           <p:cNvPr id="13" name="Rechteck 12">
             <a:extLst>
               <a:ext uri="{FF2B5EF4-FFF2-40B4-BE49-F238E27FC236}">
-                <a16:creationId xmlns:a16="http://schemas.microsoft.com/office/drawing/2014/main" id="{6FD62921-0762-D261-613F-9E84AC9CF969}"/>
+                <a16:creationId xmlns:a16="http://schemas.microsoft.com/office/drawing/2014/main" id="{B825DDA7-D24C-5507-3F2A-8425CBBA11C0}"/>
               </a:ext>
             </a:extLst>
           </p:cNvPr>
@@ -4645,7 +4645,7 @@
           <p:cNvPr id="14" name="Rechteck 13">
             <a:extLst>
               <a:ext uri="{FF2B5EF4-FFF2-40B4-BE49-F238E27FC236}">
-                <a16:creationId xmlns:a16="http://schemas.microsoft.com/office/drawing/2014/main" id="{76F947DD-72EF-E979-2ABC-4AFA457DA0F2}"/>
+                <a16:creationId xmlns:a16="http://schemas.microsoft.com/office/drawing/2014/main" id="{D2142268-E0D5-7C46-DB6D-77E3BD05FD84}"/>
               </a:ext>
             </a:extLst>
           </p:cNvPr>
@@ -4693,7 +4693,7 @@
     </p:spTree>
     <p:extLst>
       <p:ext uri="{BB962C8B-B14F-4D97-AF65-F5344CB8AC3E}">
-        <p14:creationId xmlns:p14="http://schemas.microsoft.com/office/powerpoint/2010/main" val="1698043456"/>
+        <p14:creationId xmlns:p14="http://schemas.microsoft.com/office/powerpoint/2010/main" val="4135807300"/>
       </p:ext>
     </p:extLst>
   </p:cSld>
@@ -4725,7 +4725,7 @@
           <p:cNvPr id="2" name="Titel 1">
             <a:extLst>
               <a:ext uri="{FF2B5EF4-FFF2-40B4-BE49-F238E27FC236}">
-                <a16:creationId xmlns:a16="http://schemas.microsoft.com/office/drawing/2014/main" id="{B939BDA7-B387-0506-B2F5-3AB0B6851C5E}"/>
+                <a16:creationId xmlns:a16="http://schemas.microsoft.com/office/drawing/2014/main" id="{5D48B194-8C76-3282-6D40-8368FCC4ADA0}"/>
               </a:ext>
             </a:extLst>
           </p:cNvPr>
@@ -4754,7 +4754,7 @@
           <p:cNvPr id="3" name="Textplatzhalter 2">
             <a:extLst>
               <a:ext uri="{FF2B5EF4-FFF2-40B4-BE49-F238E27FC236}">
-                <a16:creationId xmlns:a16="http://schemas.microsoft.com/office/drawing/2014/main" id="{B863A2C8-A29C-D452-BD2D-50F775EB1F41}"/>
+                <a16:creationId xmlns:a16="http://schemas.microsoft.com/office/drawing/2014/main" id="{C5560466-0CA4-22C9-F3D1-B0D5BE7B44DE}"/>
               </a:ext>
             </a:extLst>
           </p:cNvPr>
@@ -4859,7 +4859,7 @@
     </p:spTree>
     <p:extLst>
       <p:ext uri="{BB962C8B-B14F-4D97-AF65-F5344CB8AC3E}">
-        <p14:creationId xmlns:p14="http://schemas.microsoft.com/office/powerpoint/2010/main" val="2537150872"/>
+        <p14:creationId xmlns:p14="http://schemas.microsoft.com/office/powerpoint/2010/main" val="2621228572"/>
       </p:ext>
     </p:extLst>
   </p:cSld>

--- a/tests/corpus/pptx/generated/text-basic.pptx
+++ b/tests/corpus/pptx/generated/text-basic.pptx
@@ -133,7 +133,7 @@
           <p:cNvPr id="2" name="Titel 1">
             <a:extLst>
               <a:ext uri="{FF2B5EF4-FFF2-40B4-BE49-F238E27FC236}">
-                <a16:creationId xmlns:a16="http://schemas.microsoft.com/office/drawing/2014/main" id="{BED882FF-B7B5-54A0-CDE2-D4F510B2CA90}"/>
+                <a16:creationId xmlns:a16="http://schemas.microsoft.com/office/drawing/2014/main" id="{AB8E1931-826F-3EBC-8D04-EF14CB83C5CE}"/>
               </a:ext>
             </a:extLst>
           </p:cNvPr>
@@ -170,7 +170,7 @@
           <p:cNvPr id="3" name="Untertitel 2">
             <a:extLst>
               <a:ext uri="{FF2B5EF4-FFF2-40B4-BE49-F238E27FC236}">
-                <a16:creationId xmlns:a16="http://schemas.microsoft.com/office/drawing/2014/main" id="{C344E853-A1F0-252D-63C0-CFDD23266ABD}"/>
+                <a16:creationId xmlns:a16="http://schemas.microsoft.com/office/drawing/2014/main" id="{7A60E821-8A78-F304-7D2D-8B60BF02B55B}"/>
               </a:ext>
             </a:extLst>
           </p:cNvPr>
@@ -240,7 +240,7 @@
           <p:cNvPr id="4" name="Datumsplatzhalter 3">
             <a:extLst>
               <a:ext uri="{FF2B5EF4-FFF2-40B4-BE49-F238E27FC236}">
-                <a16:creationId xmlns:a16="http://schemas.microsoft.com/office/drawing/2014/main" id="{8AECBD03-8C65-F2D4-6CD5-4CC85B749FA2}"/>
+                <a16:creationId xmlns:a16="http://schemas.microsoft.com/office/drawing/2014/main" id="{B6ACEE76-4F7B-5F36-85CB-E52378C02D69}"/>
               </a:ext>
             </a:extLst>
           </p:cNvPr>
@@ -256,7 +256,7 @@
           <a:bodyPr/>
           <a:lstStyle/>
           <a:p>
-            <a:fld id="{AC902F5A-E3F6-4856-8EE3-15CF50364D0A}" type="datetimeFigureOut">
+            <a:fld id="{F0F1DE7D-D95E-4F7E-ACE0-C2CB09C0038C}" type="datetimeFigureOut">
               <a:rPr lang="de-DE" smtClean="0"/>
               <a:t>08.10.2026</a:t>
             </a:fld>
@@ -269,7 +269,7 @@
           <p:cNvPr id="5" name="Fußzeilenplatzhalter 4">
             <a:extLst>
               <a:ext uri="{FF2B5EF4-FFF2-40B4-BE49-F238E27FC236}">
-                <a16:creationId xmlns:a16="http://schemas.microsoft.com/office/drawing/2014/main" id="{EE4AAEF9-4186-85E2-9855-0CE84174249D}"/>
+                <a16:creationId xmlns:a16="http://schemas.microsoft.com/office/drawing/2014/main" id="{7079DB06-CEC2-D3E0-B51F-89E25E9105F5}"/>
               </a:ext>
             </a:extLst>
           </p:cNvPr>
@@ -294,7 +294,7 @@
           <p:cNvPr id="6" name="Foliennummernplatzhalter 5">
             <a:extLst>
               <a:ext uri="{FF2B5EF4-FFF2-40B4-BE49-F238E27FC236}">
-                <a16:creationId xmlns:a16="http://schemas.microsoft.com/office/drawing/2014/main" id="{56AD4F57-9089-4BEC-7FD1-9FDB18567ADB}"/>
+                <a16:creationId xmlns:a16="http://schemas.microsoft.com/office/drawing/2014/main" id="{FD86F3FE-6A1E-C7B7-8F65-3413669472A7}"/>
               </a:ext>
             </a:extLst>
           </p:cNvPr>
@@ -310,7 +310,7 @@
           <a:bodyPr/>
           <a:lstStyle/>
           <a:p>
-            <a:fld id="{E9424090-0FA0-4F74-87C3-2B9C08679DEB}" type="slidenum">
+            <a:fld id="{C36885A8-8839-4915-B7F5-BD5B8285522A}" type="slidenum">
               <a:rPr lang="de-DE" smtClean="0"/>
               <a:t>‹Nr.›</a:t>
             </a:fld>
@@ -321,7 +321,7 @@
     </p:spTree>
     <p:extLst>
       <p:ext uri="{BB962C8B-B14F-4D97-AF65-F5344CB8AC3E}">
-        <p14:creationId xmlns:p14="http://schemas.microsoft.com/office/powerpoint/2010/main" val="716649679"/>
+        <p14:creationId xmlns:p14="http://schemas.microsoft.com/office/powerpoint/2010/main" val="857465050"/>
       </p:ext>
     </p:extLst>
   </p:cSld>
@@ -353,7 +353,7 @@
           <p:cNvPr id="2" name="Titel 1">
             <a:extLst>
               <a:ext uri="{FF2B5EF4-FFF2-40B4-BE49-F238E27FC236}">
-                <a16:creationId xmlns:a16="http://schemas.microsoft.com/office/drawing/2014/main" id="{FE719E72-6A81-8895-4668-0F0C38D44CF3}"/>
+                <a16:creationId xmlns:a16="http://schemas.microsoft.com/office/drawing/2014/main" id="{A11E2E6B-4751-B1EF-1C1D-75B1ED628B4B}"/>
               </a:ext>
             </a:extLst>
           </p:cNvPr>
@@ -381,7 +381,7 @@
           <p:cNvPr id="3" name="Vertikaler Textplatzhalter 2">
             <a:extLst>
               <a:ext uri="{FF2B5EF4-FFF2-40B4-BE49-F238E27FC236}">
-                <a16:creationId xmlns:a16="http://schemas.microsoft.com/office/drawing/2014/main" id="{581C8FBE-D82D-8A7D-0227-DF8AED2AD94F}"/>
+                <a16:creationId xmlns:a16="http://schemas.microsoft.com/office/drawing/2014/main" id="{32A6E91D-4268-6C9A-26D4-AA91DAFB70E0}"/>
               </a:ext>
             </a:extLst>
           </p:cNvPr>
@@ -438,7 +438,7 @@
           <p:cNvPr id="4" name="Datumsplatzhalter 3">
             <a:extLst>
               <a:ext uri="{FF2B5EF4-FFF2-40B4-BE49-F238E27FC236}">
-                <a16:creationId xmlns:a16="http://schemas.microsoft.com/office/drawing/2014/main" id="{2ED6E830-FD08-52BA-4A33-853967F4CCE8}"/>
+                <a16:creationId xmlns:a16="http://schemas.microsoft.com/office/drawing/2014/main" id="{0D1929A6-7C97-C00A-A507-CD43BF82EABF}"/>
               </a:ext>
             </a:extLst>
           </p:cNvPr>
@@ -454,7 +454,7 @@
           <a:bodyPr/>
           <a:lstStyle/>
           <a:p>
-            <a:fld id="{AC902F5A-E3F6-4856-8EE3-15CF50364D0A}" type="datetimeFigureOut">
+            <a:fld id="{F0F1DE7D-D95E-4F7E-ACE0-C2CB09C0038C}" type="datetimeFigureOut">
               <a:rPr lang="de-DE" smtClean="0"/>
               <a:t>08.10.2026</a:t>
             </a:fld>
@@ -467,7 +467,7 @@
           <p:cNvPr id="5" name="Fußzeilenplatzhalter 4">
             <a:extLst>
               <a:ext uri="{FF2B5EF4-FFF2-40B4-BE49-F238E27FC236}">
-                <a16:creationId xmlns:a16="http://schemas.microsoft.com/office/drawing/2014/main" id="{8C77060B-EF1C-74B6-800B-6DAFB64AE953}"/>
+                <a16:creationId xmlns:a16="http://schemas.microsoft.com/office/drawing/2014/main" id="{29E47FB3-4D5B-48AD-DD7D-84296234A52F}"/>
               </a:ext>
             </a:extLst>
           </p:cNvPr>
@@ -492,7 +492,7 @@
           <p:cNvPr id="6" name="Foliennummernplatzhalter 5">
             <a:extLst>
               <a:ext uri="{FF2B5EF4-FFF2-40B4-BE49-F238E27FC236}">
-                <a16:creationId xmlns:a16="http://schemas.microsoft.com/office/drawing/2014/main" id="{F0B2C4EF-D778-5CAE-37BD-D828D21FDE03}"/>
+                <a16:creationId xmlns:a16="http://schemas.microsoft.com/office/drawing/2014/main" id="{24B1B47F-084B-2016-BDF6-3D60538748D3}"/>
               </a:ext>
             </a:extLst>
           </p:cNvPr>
@@ -508,7 +508,7 @@
           <a:bodyPr/>
           <a:lstStyle/>
           <a:p>
-            <a:fld id="{E9424090-0FA0-4F74-87C3-2B9C08679DEB}" type="slidenum">
+            <a:fld id="{C36885A8-8839-4915-B7F5-BD5B8285522A}" type="slidenum">
               <a:rPr lang="de-DE" smtClean="0"/>
               <a:t>‹Nr.›</a:t>
             </a:fld>
@@ -519,7 +519,7 @@
     </p:spTree>
     <p:extLst>
       <p:ext uri="{BB962C8B-B14F-4D97-AF65-F5344CB8AC3E}">
-        <p14:creationId xmlns:p14="http://schemas.microsoft.com/office/powerpoint/2010/main" val="2249460223"/>
+        <p14:creationId xmlns:p14="http://schemas.microsoft.com/office/powerpoint/2010/main" val="224341007"/>
       </p:ext>
     </p:extLst>
   </p:cSld>
@@ -551,7 +551,7 @@
           <p:cNvPr id="2" name="Vertikaler Titel 1">
             <a:extLst>
               <a:ext uri="{FF2B5EF4-FFF2-40B4-BE49-F238E27FC236}">
-                <a16:creationId xmlns:a16="http://schemas.microsoft.com/office/drawing/2014/main" id="{370D7060-149C-C151-FFF3-C0CB32C54426}"/>
+                <a16:creationId xmlns:a16="http://schemas.microsoft.com/office/drawing/2014/main" id="{E91CD1E2-A17B-898B-BABE-F49853083F44}"/>
               </a:ext>
             </a:extLst>
           </p:cNvPr>
@@ -584,7 +584,7 @@
           <p:cNvPr id="3" name="Vertikaler Textplatzhalter 2">
             <a:extLst>
               <a:ext uri="{FF2B5EF4-FFF2-40B4-BE49-F238E27FC236}">
-                <a16:creationId xmlns:a16="http://schemas.microsoft.com/office/drawing/2014/main" id="{F3975B96-A136-9D70-BC04-2DC174675B35}"/>
+                <a16:creationId xmlns:a16="http://schemas.microsoft.com/office/drawing/2014/main" id="{4244E0BB-E68E-8266-6924-A3C3F8F8932E}"/>
               </a:ext>
             </a:extLst>
           </p:cNvPr>
@@ -646,7 +646,7 @@
           <p:cNvPr id="4" name="Datumsplatzhalter 3">
             <a:extLst>
               <a:ext uri="{FF2B5EF4-FFF2-40B4-BE49-F238E27FC236}">
-                <a16:creationId xmlns:a16="http://schemas.microsoft.com/office/drawing/2014/main" id="{282E553A-E4EE-5A32-CA3E-E5685AF5122A}"/>
+                <a16:creationId xmlns:a16="http://schemas.microsoft.com/office/drawing/2014/main" id="{60C3F1A5-9BFC-9BAE-DDCF-8F13CBC9EB4F}"/>
               </a:ext>
             </a:extLst>
           </p:cNvPr>
@@ -662,7 +662,7 @@
           <a:bodyPr/>
           <a:lstStyle/>
           <a:p>
-            <a:fld id="{AC902F5A-E3F6-4856-8EE3-15CF50364D0A}" type="datetimeFigureOut">
+            <a:fld id="{F0F1DE7D-D95E-4F7E-ACE0-C2CB09C0038C}" type="datetimeFigureOut">
               <a:rPr lang="de-DE" smtClean="0"/>
               <a:t>08.10.2026</a:t>
             </a:fld>
@@ -675,7 +675,7 @@
           <p:cNvPr id="5" name="Fußzeilenplatzhalter 4">
             <a:extLst>
               <a:ext uri="{FF2B5EF4-FFF2-40B4-BE49-F238E27FC236}">
-                <a16:creationId xmlns:a16="http://schemas.microsoft.com/office/drawing/2014/main" id="{4995F88B-D6BF-CDFF-1AAF-BD5674A35981}"/>
+                <a16:creationId xmlns:a16="http://schemas.microsoft.com/office/drawing/2014/main" id="{D9BF742E-E1B2-19F6-90C4-66F6E59CD31B}"/>
               </a:ext>
             </a:extLst>
           </p:cNvPr>
@@ -700,7 +700,7 @@
           <p:cNvPr id="6" name="Foliennummernplatzhalter 5">
             <a:extLst>
               <a:ext uri="{FF2B5EF4-FFF2-40B4-BE49-F238E27FC236}">
-                <a16:creationId xmlns:a16="http://schemas.microsoft.com/office/drawing/2014/main" id="{CBF81619-A9D0-4E96-4F7D-D73640049E91}"/>
+                <a16:creationId xmlns:a16="http://schemas.microsoft.com/office/drawing/2014/main" id="{FF0AD6D0-36EF-C003-262A-0BE1C1918FCA}"/>
               </a:ext>
             </a:extLst>
           </p:cNvPr>
@@ -716,7 +716,7 @@
           <a:bodyPr/>
           <a:lstStyle/>
           <a:p>
-            <a:fld id="{E9424090-0FA0-4F74-87C3-2B9C08679DEB}" type="slidenum">
+            <a:fld id="{C36885A8-8839-4915-B7F5-BD5B8285522A}" type="slidenum">
               <a:rPr lang="de-DE" smtClean="0"/>
               <a:t>‹Nr.›</a:t>
             </a:fld>
@@ -727,7 +727,7 @@
     </p:spTree>
     <p:extLst>
       <p:ext uri="{BB962C8B-B14F-4D97-AF65-F5344CB8AC3E}">
-        <p14:creationId xmlns:p14="http://schemas.microsoft.com/office/powerpoint/2010/main" val="3739814985"/>
+        <p14:creationId xmlns:p14="http://schemas.microsoft.com/office/powerpoint/2010/main" val="2737939655"/>
       </p:ext>
     </p:extLst>
   </p:cSld>
@@ -759,7 +759,7 @@
           <p:cNvPr id="2" name="Titel 1">
             <a:extLst>
               <a:ext uri="{FF2B5EF4-FFF2-40B4-BE49-F238E27FC236}">
-                <a16:creationId xmlns:a16="http://schemas.microsoft.com/office/drawing/2014/main" id="{0214F8F4-675B-3D79-82F1-2D66739D91B2}"/>
+                <a16:creationId xmlns:a16="http://schemas.microsoft.com/office/drawing/2014/main" id="{F624FDB6-235D-86E0-778D-2B8935EACCFA}"/>
               </a:ext>
             </a:extLst>
           </p:cNvPr>
@@ -787,7 +787,7 @@
           <p:cNvPr id="3" name="Textplatzhalter 2">
             <a:extLst>
               <a:ext uri="{FF2B5EF4-FFF2-40B4-BE49-F238E27FC236}">
-                <a16:creationId xmlns:a16="http://schemas.microsoft.com/office/drawing/2014/main" id="{1B783424-FDFA-E4E7-15CC-FB400B112916}"/>
+                <a16:creationId xmlns:a16="http://schemas.microsoft.com/office/drawing/2014/main" id="{2298381E-7441-88EF-FA88-C354BEC0C9F6}"/>
               </a:ext>
             </a:extLst>
           </p:cNvPr>
@@ -844,7 +844,7 @@
           <p:cNvPr id="4" name="Datumsplatzhalter 3">
             <a:extLst>
               <a:ext uri="{FF2B5EF4-FFF2-40B4-BE49-F238E27FC236}">
-                <a16:creationId xmlns:a16="http://schemas.microsoft.com/office/drawing/2014/main" id="{6E0F387A-8E2E-F06D-B8AD-B5BC269A70A2}"/>
+                <a16:creationId xmlns:a16="http://schemas.microsoft.com/office/drawing/2014/main" id="{DFF8DBFF-0644-EB0D-05DE-351DD114AB12}"/>
               </a:ext>
             </a:extLst>
           </p:cNvPr>
@@ -860,7 +860,7 @@
           <a:bodyPr/>
           <a:lstStyle/>
           <a:p>
-            <a:fld id="{AC902F5A-E3F6-4856-8EE3-15CF50364D0A}" type="datetimeFigureOut">
+            <a:fld id="{F0F1DE7D-D95E-4F7E-ACE0-C2CB09C0038C}" type="datetimeFigureOut">
               <a:rPr lang="de-DE" smtClean="0"/>
               <a:t>08.10.2026</a:t>
             </a:fld>
@@ -873,7 +873,7 @@
           <p:cNvPr id="5" name="Fußzeilenplatzhalter 4">
             <a:extLst>
               <a:ext uri="{FF2B5EF4-FFF2-40B4-BE49-F238E27FC236}">
-                <a16:creationId xmlns:a16="http://schemas.microsoft.com/office/drawing/2014/main" id="{FEA4E979-EC30-82F6-BEEC-E3A176BAD462}"/>
+                <a16:creationId xmlns:a16="http://schemas.microsoft.com/office/drawing/2014/main" id="{5A965408-77D3-4E52-CB89-FB759B2C5F91}"/>
               </a:ext>
             </a:extLst>
           </p:cNvPr>
@@ -898,7 +898,7 @@
           <p:cNvPr id="6" name="Foliennummernplatzhalter 5">
             <a:extLst>
               <a:ext uri="{FF2B5EF4-FFF2-40B4-BE49-F238E27FC236}">
-                <a16:creationId xmlns:a16="http://schemas.microsoft.com/office/drawing/2014/main" id="{813F8947-EF36-D154-9F83-78DACB4C783C}"/>
+                <a16:creationId xmlns:a16="http://schemas.microsoft.com/office/drawing/2014/main" id="{F5C4A71B-514A-5B4E-28F4-47819C511998}"/>
               </a:ext>
             </a:extLst>
           </p:cNvPr>
@@ -914,7 +914,7 @@
           <a:bodyPr/>
           <a:lstStyle/>
           <a:p>
-            <a:fld id="{E9424090-0FA0-4F74-87C3-2B9C08679DEB}" type="slidenum">
+            <a:fld id="{C36885A8-8839-4915-B7F5-BD5B8285522A}" type="slidenum">
               <a:rPr lang="de-DE" smtClean="0"/>
               <a:t>‹Nr.›</a:t>
             </a:fld>
@@ -925,7 +925,7 @@
     </p:spTree>
     <p:extLst>
       <p:ext uri="{BB962C8B-B14F-4D97-AF65-F5344CB8AC3E}">
-        <p14:creationId xmlns:p14="http://schemas.microsoft.com/office/powerpoint/2010/main" val="670720945"/>
+        <p14:creationId xmlns:p14="http://schemas.microsoft.com/office/powerpoint/2010/main" val="75466911"/>
       </p:ext>
     </p:extLst>
   </p:cSld>
@@ -957,7 +957,7 @@
           <p:cNvPr id="2" name="Titel 1">
             <a:extLst>
               <a:ext uri="{FF2B5EF4-FFF2-40B4-BE49-F238E27FC236}">
-                <a16:creationId xmlns:a16="http://schemas.microsoft.com/office/drawing/2014/main" id="{AE042CA1-064D-C55B-F66B-7FD485596DD8}"/>
+                <a16:creationId xmlns:a16="http://schemas.microsoft.com/office/drawing/2014/main" id="{D5179183-A790-789E-481F-C03D6C00F0FA}"/>
               </a:ext>
             </a:extLst>
           </p:cNvPr>
@@ -985,7 +985,7 @@
           <p:cNvPr id="3" name="Inhaltsplatzhalter 2">
             <a:extLst>
               <a:ext uri="{FF2B5EF4-FFF2-40B4-BE49-F238E27FC236}">
-                <a16:creationId xmlns:a16="http://schemas.microsoft.com/office/drawing/2014/main" id="{D7318E6C-B16F-3CAC-C4B4-DD67BF1B1527}"/>
+                <a16:creationId xmlns:a16="http://schemas.microsoft.com/office/drawing/2014/main" id="{548AD27D-8D1D-225B-09C4-7E5727996481}"/>
               </a:ext>
             </a:extLst>
           </p:cNvPr>
@@ -1042,7 +1042,7 @@
           <p:cNvPr id="4" name="Datumsplatzhalter 3">
             <a:extLst>
               <a:ext uri="{FF2B5EF4-FFF2-40B4-BE49-F238E27FC236}">
-                <a16:creationId xmlns:a16="http://schemas.microsoft.com/office/drawing/2014/main" id="{F9B7AF40-4AF0-3C39-C2A4-703B35029B92}"/>
+                <a16:creationId xmlns:a16="http://schemas.microsoft.com/office/drawing/2014/main" id="{5F1B226D-4B7D-1BCE-4C1D-C1AC0551FE96}"/>
               </a:ext>
             </a:extLst>
           </p:cNvPr>
@@ -1058,7 +1058,7 @@
           <a:bodyPr/>
           <a:lstStyle/>
           <a:p>
-            <a:fld id="{AC902F5A-E3F6-4856-8EE3-15CF50364D0A}" type="datetimeFigureOut">
+            <a:fld id="{F0F1DE7D-D95E-4F7E-ACE0-C2CB09C0038C}" type="datetimeFigureOut">
               <a:rPr lang="de-DE" smtClean="0"/>
               <a:t>08.10.2026</a:t>
             </a:fld>
@@ -1071,7 +1071,7 @@
           <p:cNvPr id="5" name="Fußzeilenplatzhalter 4">
             <a:extLst>
               <a:ext uri="{FF2B5EF4-FFF2-40B4-BE49-F238E27FC236}">
-                <a16:creationId xmlns:a16="http://schemas.microsoft.com/office/drawing/2014/main" id="{F122BC84-D380-F288-4C95-0E1D978C1038}"/>
+                <a16:creationId xmlns:a16="http://schemas.microsoft.com/office/drawing/2014/main" id="{CBF9A338-AC33-9016-6423-25DA90682BA1}"/>
               </a:ext>
             </a:extLst>
           </p:cNvPr>
@@ -1096,7 +1096,7 @@
           <p:cNvPr id="6" name="Foliennummernplatzhalter 5">
             <a:extLst>
               <a:ext uri="{FF2B5EF4-FFF2-40B4-BE49-F238E27FC236}">
-                <a16:creationId xmlns:a16="http://schemas.microsoft.com/office/drawing/2014/main" id="{86D64CC8-9A6E-3503-4B53-FF312907E311}"/>
+                <a16:creationId xmlns:a16="http://schemas.microsoft.com/office/drawing/2014/main" id="{50CDCD68-8C34-0876-2F30-DDD2485D4041}"/>
               </a:ext>
             </a:extLst>
           </p:cNvPr>
@@ -1112,7 +1112,7 @@
           <a:bodyPr/>
           <a:lstStyle/>
           <a:p>
-            <a:fld id="{E9424090-0FA0-4F74-87C3-2B9C08679DEB}" type="slidenum">
+            <a:fld id="{C36885A8-8839-4915-B7F5-BD5B8285522A}" type="slidenum">
               <a:rPr lang="de-DE" smtClean="0"/>
               <a:t>‹Nr.›</a:t>
             </a:fld>
@@ -1123,7 +1123,7 @@
     </p:spTree>
     <p:extLst>
       <p:ext uri="{BB962C8B-B14F-4D97-AF65-F5344CB8AC3E}">
-        <p14:creationId xmlns:p14="http://schemas.microsoft.com/office/powerpoint/2010/main" val="1516536692"/>
+        <p14:creationId xmlns:p14="http://schemas.microsoft.com/office/powerpoint/2010/main" val="3803672267"/>
       </p:ext>
     </p:extLst>
   </p:cSld>
@@ -1155,7 +1155,7 @@
           <p:cNvPr id="2" name="Titel 1">
             <a:extLst>
               <a:ext uri="{FF2B5EF4-FFF2-40B4-BE49-F238E27FC236}">
-                <a16:creationId xmlns:a16="http://schemas.microsoft.com/office/drawing/2014/main" id="{9DB77246-9F1A-948B-BA14-8442E40700B9}"/>
+                <a16:creationId xmlns:a16="http://schemas.microsoft.com/office/drawing/2014/main" id="{F1D2FD8F-E1F8-9662-E20F-A4DD3BE78BBD}"/>
               </a:ext>
             </a:extLst>
           </p:cNvPr>
@@ -1192,7 +1192,7 @@
           <p:cNvPr id="3" name="Textplatzhalter 2">
             <a:extLst>
               <a:ext uri="{FF2B5EF4-FFF2-40B4-BE49-F238E27FC236}">
-                <a16:creationId xmlns:a16="http://schemas.microsoft.com/office/drawing/2014/main" id="{DED74D96-A691-0E01-FF2A-92C6C4019CAF}"/>
+                <a16:creationId xmlns:a16="http://schemas.microsoft.com/office/drawing/2014/main" id="{1EE7B3B2-BA6D-DBEC-3BCC-E6DC3A798B04}"/>
               </a:ext>
             </a:extLst>
           </p:cNvPr>
@@ -1317,7 +1317,7 @@
           <p:cNvPr id="4" name="Datumsplatzhalter 3">
             <a:extLst>
               <a:ext uri="{FF2B5EF4-FFF2-40B4-BE49-F238E27FC236}">
-                <a16:creationId xmlns:a16="http://schemas.microsoft.com/office/drawing/2014/main" id="{0D86DE30-9889-8BC3-6E6F-2D0762F6A97B}"/>
+                <a16:creationId xmlns:a16="http://schemas.microsoft.com/office/drawing/2014/main" id="{ED808A19-0A26-6CDE-910F-97EB19502033}"/>
               </a:ext>
             </a:extLst>
           </p:cNvPr>
@@ -1333,7 +1333,7 @@
           <a:bodyPr/>
           <a:lstStyle/>
           <a:p>
-            <a:fld id="{AC902F5A-E3F6-4856-8EE3-15CF50364D0A}" type="datetimeFigureOut">
+            <a:fld id="{F0F1DE7D-D95E-4F7E-ACE0-C2CB09C0038C}" type="datetimeFigureOut">
               <a:rPr lang="de-DE" smtClean="0"/>
               <a:t>08.10.2026</a:t>
             </a:fld>
@@ -1346,7 +1346,7 @@
           <p:cNvPr id="5" name="Fußzeilenplatzhalter 4">
             <a:extLst>
               <a:ext uri="{FF2B5EF4-FFF2-40B4-BE49-F238E27FC236}">
-                <a16:creationId xmlns:a16="http://schemas.microsoft.com/office/drawing/2014/main" id="{FDBB3A07-8702-6636-EB58-B4B7A799DEF1}"/>
+                <a16:creationId xmlns:a16="http://schemas.microsoft.com/office/drawing/2014/main" id="{84710A30-1BF8-A4DE-C168-F3187D3F03B8}"/>
               </a:ext>
             </a:extLst>
           </p:cNvPr>
@@ -1371,7 +1371,7 @@
           <p:cNvPr id="6" name="Foliennummernplatzhalter 5">
             <a:extLst>
               <a:ext uri="{FF2B5EF4-FFF2-40B4-BE49-F238E27FC236}">
-                <a16:creationId xmlns:a16="http://schemas.microsoft.com/office/drawing/2014/main" id="{12623C4B-28FA-9951-E61C-0BE1853B970E}"/>
+                <a16:creationId xmlns:a16="http://schemas.microsoft.com/office/drawing/2014/main" id="{22CDA0D2-84D8-419C-DC89-B7B3670DE1BC}"/>
               </a:ext>
             </a:extLst>
           </p:cNvPr>
@@ -1387,7 +1387,7 @@
           <a:bodyPr/>
           <a:lstStyle/>
           <a:p>
-            <a:fld id="{E9424090-0FA0-4F74-87C3-2B9C08679DEB}" type="slidenum">
+            <a:fld id="{C36885A8-8839-4915-B7F5-BD5B8285522A}" type="slidenum">
               <a:rPr lang="de-DE" smtClean="0"/>
               <a:t>‹Nr.›</a:t>
             </a:fld>
@@ -1398,7 +1398,7 @@
     </p:spTree>
     <p:extLst>
       <p:ext uri="{BB962C8B-B14F-4D97-AF65-F5344CB8AC3E}">
-        <p14:creationId xmlns:p14="http://schemas.microsoft.com/office/powerpoint/2010/main" val="2293494136"/>
+        <p14:creationId xmlns:p14="http://schemas.microsoft.com/office/powerpoint/2010/main" val="1400339475"/>
       </p:ext>
     </p:extLst>
   </p:cSld>
@@ -1430,7 +1430,7 @@
           <p:cNvPr id="2" name="Titel 1">
             <a:extLst>
               <a:ext uri="{FF2B5EF4-FFF2-40B4-BE49-F238E27FC236}">
-                <a16:creationId xmlns:a16="http://schemas.microsoft.com/office/drawing/2014/main" id="{694BB810-4CAD-F322-1873-E64E388ED04C}"/>
+                <a16:creationId xmlns:a16="http://schemas.microsoft.com/office/drawing/2014/main" id="{47A9F657-828C-8DAF-FC82-736C167B2B32}"/>
               </a:ext>
             </a:extLst>
           </p:cNvPr>
@@ -1458,7 +1458,7 @@
           <p:cNvPr id="3" name="Inhaltsplatzhalter 2">
             <a:extLst>
               <a:ext uri="{FF2B5EF4-FFF2-40B4-BE49-F238E27FC236}">
-                <a16:creationId xmlns:a16="http://schemas.microsoft.com/office/drawing/2014/main" id="{310BA504-A3CD-211B-ED4D-D2BFE1DA2864}"/>
+                <a16:creationId xmlns:a16="http://schemas.microsoft.com/office/drawing/2014/main" id="{544DBD54-EF4C-0A34-6A2C-165D27065A67}"/>
               </a:ext>
             </a:extLst>
           </p:cNvPr>
@@ -1520,7 +1520,7 @@
           <p:cNvPr id="4" name="Inhaltsplatzhalter 3">
             <a:extLst>
               <a:ext uri="{FF2B5EF4-FFF2-40B4-BE49-F238E27FC236}">
-                <a16:creationId xmlns:a16="http://schemas.microsoft.com/office/drawing/2014/main" id="{8C5971F5-0A80-52AE-7454-B3A6E9D6DCDF}"/>
+                <a16:creationId xmlns:a16="http://schemas.microsoft.com/office/drawing/2014/main" id="{A39A2205-D9E4-5BCB-8117-C16419E098B9}"/>
               </a:ext>
             </a:extLst>
           </p:cNvPr>
@@ -1582,7 +1582,7 @@
           <p:cNvPr id="5" name="Datumsplatzhalter 4">
             <a:extLst>
               <a:ext uri="{FF2B5EF4-FFF2-40B4-BE49-F238E27FC236}">
-                <a16:creationId xmlns:a16="http://schemas.microsoft.com/office/drawing/2014/main" id="{154A2872-F13F-A587-2EE7-4FC380E7B56A}"/>
+                <a16:creationId xmlns:a16="http://schemas.microsoft.com/office/drawing/2014/main" id="{6085FD6C-B0C9-2327-96E0-946DD146C805}"/>
               </a:ext>
             </a:extLst>
           </p:cNvPr>
@@ -1598,7 +1598,7 @@
           <a:bodyPr/>
           <a:lstStyle/>
           <a:p>
-            <a:fld id="{AC902F5A-E3F6-4856-8EE3-15CF50364D0A}" type="datetimeFigureOut">
+            <a:fld id="{F0F1DE7D-D95E-4F7E-ACE0-C2CB09C0038C}" type="datetimeFigureOut">
               <a:rPr lang="de-DE" smtClean="0"/>
               <a:t>08.10.2026</a:t>
             </a:fld>
@@ -1611,7 +1611,7 @@
           <p:cNvPr id="6" name="Fußzeilenplatzhalter 5">
             <a:extLst>
               <a:ext uri="{FF2B5EF4-FFF2-40B4-BE49-F238E27FC236}">
-                <a16:creationId xmlns:a16="http://schemas.microsoft.com/office/drawing/2014/main" id="{FBC56DC0-82C3-9961-D9A1-1A965593CC3A}"/>
+                <a16:creationId xmlns:a16="http://schemas.microsoft.com/office/drawing/2014/main" id="{C84A82EF-F71F-ADA9-9034-1C192E295490}"/>
               </a:ext>
             </a:extLst>
           </p:cNvPr>
@@ -1636,7 +1636,7 @@
           <p:cNvPr id="7" name="Foliennummernplatzhalter 6">
             <a:extLst>
               <a:ext uri="{FF2B5EF4-FFF2-40B4-BE49-F238E27FC236}">
-                <a16:creationId xmlns:a16="http://schemas.microsoft.com/office/drawing/2014/main" id="{7A0DB5E6-E4A7-F5B3-F937-ADF94AE16D37}"/>
+                <a16:creationId xmlns:a16="http://schemas.microsoft.com/office/drawing/2014/main" id="{931AC9DE-A92F-9CCE-87E1-3DFA9EEF3791}"/>
               </a:ext>
             </a:extLst>
           </p:cNvPr>
@@ -1652,7 +1652,7 @@
           <a:bodyPr/>
           <a:lstStyle/>
           <a:p>
-            <a:fld id="{E9424090-0FA0-4F74-87C3-2B9C08679DEB}" type="slidenum">
+            <a:fld id="{C36885A8-8839-4915-B7F5-BD5B8285522A}" type="slidenum">
               <a:rPr lang="de-DE" smtClean="0"/>
               <a:t>‹Nr.›</a:t>
             </a:fld>
@@ -1663,7 +1663,7 @@
     </p:spTree>
     <p:extLst>
       <p:ext uri="{BB962C8B-B14F-4D97-AF65-F5344CB8AC3E}">
-        <p14:creationId xmlns:p14="http://schemas.microsoft.com/office/powerpoint/2010/main" val="2284184622"/>
+        <p14:creationId xmlns:p14="http://schemas.microsoft.com/office/powerpoint/2010/main" val="1798963448"/>
       </p:ext>
     </p:extLst>
   </p:cSld>
@@ -1695,7 +1695,7 @@
           <p:cNvPr id="2" name="Titel 1">
             <a:extLst>
               <a:ext uri="{FF2B5EF4-FFF2-40B4-BE49-F238E27FC236}">
-                <a16:creationId xmlns:a16="http://schemas.microsoft.com/office/drawing/2014/main" id="{F71A6B0D-0FBF-4D55-5D62-1497A3CC8043}"/>
+                <a16:creationId xmlns:a16="http://schemas.microsoft.com/office/drawing/2014/main" id="{E72BDE0E-125F-DAAC-A676-13026D12DDFE}"/>
               </a:ext>
             </a:extLst>
           </p:cNvPr>
@@ -1728,7 +1728,7 @@
           <p:cNvPr id="3" name="Textplatzhalter 2">
             <a:extLst>
               <a:ext uri="{FF2B5EF4-FFF2-40B4-BE49-F238E27FC236}">
-                <a16:creationId xmlns:a16="http://schemas.microsoft.com/office/drawing/2014/main" id="{0B8E308B-BD93-C97C-55C9-E22BE352EC8F}"/>
+                <a16:creationId xmlns:a16="http://schemas.microsoft.com/office/drawing/2014/main" id="{31A6CD19-B739-1EE9-E6C5-983EFBD5C3D7}"/>
               </a:ext>
             </a:extLst>
           </p:cNvPr>
@@ -1799,7 +1799,7 @@
           <p:cNvPr id="4" name="Inhaltsplatzhalter 3">
             <a:extLst>
               <a:ext uri="{FF2B5EF4-FFF2-40B4-BE49-F238E27FC236}">
-                <a16:creationId xmlns:a16="http://schemas.microsoft.com/office/drawing/2014/main" id="{7473CC35-49E1-82CA-E890-D9604BA4F87A}"/>
+                <a16:creationId xmlns:a16="http://schemas.microsoft.com/office/drawing/2014/main" id="{0E6649AF-17B0-C47B-DCD8-2ABB4758F900}"/>
               </a:ext>
             </a:extLst>
           </p:cNvPr>
@@ -1861,7 +1861,7 @@
           <p:cNvPr id="5" name="Textplatzhalter 4">
             <a:extLst>
               <a:ext uri="{FF2B5EF4-FFF2-40B4-BE49-F238E27FC236}">
-                <a16:creationId xmlns:a16="http://schemas.microsoft.com/office/drawing/2014/main" id="{7BD099A3-7190-48A6-FBAD-A423E4B15C00}"/>
+                <a16:creationId xmlns:a16="http://schemas.microsoft.com/office/drawing/2014/main" id="{0D738F1D-A88C-3083-027D-D2A488F04EBD}"/>
               </a:ext>
             </a:extLst>
           </p:cNvPr>
@@ -1932,7 +1932,7 @@
           <p:cNvPr id="6" name="Inhaltsplatzhalter 5">
             <a:extLst>
               <a:ext uri="{FF2B5EF4-FFF2-40B4-BE49-F238E27FC236}">
-                <a16:creationId xmlns:a16="http://schemas.microsoft.com/office/drawing/2014/main" id="{3E0A2D54-2821-5951-17BF-7674BF9BF3AE}"/>
+                <a16:creationId xmlns:a16="http://schemas.microsoft.com/office/drawing/2014/main" id="{BA8880AE-1B49-5419-7CFF-83C68C6CB367}"/>
               </a:ext>
             </a:extLst>
           </p:cNvPr>
@@ -1994,7 +1994,7 @@
           <p:cNvPr id="7" name="Datumsplatzhalter 6">
             <a:extLst>
               <a:ext uri="{FF2B5EF4-FFF2-40B4-BE49-F238E27FC236}">
-                <a16:creationId xmlns:a16="http://schemas.microsoft.com/office/drawing/2014/main" id="{C5397363-CEC3-26FB-F6AD-0889CE261153}"/>
+                <a16:creationId xmlns:a16="http://schemas.microsoft.com/office/drawing/2014/main" id="{1BB76072-452E-837B-659E-33378E3286B8}"/>
               </a:ext>
             </a:extLst>
           </p:cNvPr>
@@ -2010,7 +2010,7 @@
           <a:bodyPr/>
           <a:lstStyle/>
           <a:p>
-            <a:fld id="{AC902F5A-E3F6-4856-8EE3-15CF50364D0A}" type="datetimeFigureOut">
+            <a:fld id="{F0F1DE7D-D95E-4F7E-ACE0-C2CB09C0038C}" type="datetimeFigureOut">
               <a:rPr lang="de-DE" smtClean="0"/>
               <a:t>08.10.2026</a:t>
             </a:fld>
@@ -2023,7 +2023,7 @@
           <p:cNvPr id="8" name="Fußzeilenplatzhalter 7">
             <a:extLst>
               <a:ext uri="{FF2B5EF4-FFF2-40B4-BE49-F238E27FC236}">
-                <a16:creationId xmlns:a16="http://schemas.microsoft.com/office/drawing/2014/main" id="{78E544D5-D93F-67A6-6EBA-A19F798CCFCE}"/>
+                <a16:creationId xmlns:a16="http://schemas.microsoft.com/office/drawing/2014/main" id="{7EA62B5E-6D12-FBA0-B392-45042ABF556E}"/>
               </a:ext>
             </a:extLst>
           </p:cNvPr>
@@ -2048,7 +2048,7 @@
           <p:cNvPr id="9" name="Foliennummernplatzhalter 8">
             <a:extLst>
               <a:ext uri="{FF2B5EF4-FFF2-40B4-BE49-F238E27FC236}">
-                <a16:creationId xmlns:a16="http://schemas.microsoft.com/office/drawing/2014/main" id="{DDC3EC8F-346C-1A7C-7809-A928AC3E15DD}"/>
+                <a16:creationId xmlns:a16="http://schemas.microsoft.com/office/drawing/2014/main" id="{4D533422-D95D-0B31-0157-B489A58216BC}"/>
               </a:ext>
             </a:extLst>
           </p:cNvPr>
@@ -2064,7 +2064,7 @@
           <a:bodyPr/>
           <a:lstStyle/>
           <a:p>
-            <a:fld id="{E9424090-0FA0-4F74-87C3-2B9C08679DEB}" type="slidenum">
+            <a:fld id="{C36885A8-8839-4915-B7F5-BD5B8285522A}" type="slidenum">
               <a:rPr lang="de-DE" smtClean="0"/>
               <a:t>‹Nr.›</a:t>
             </a:fld>
@@ -2075,7 +2075,7 @@
     </p:spTree>
     <p:extLst>
       <p:ext uri="{BB962C8B-B14F-4D97-AF65-F5344CB8AC3E}">
-        <p14:creationId xmlns:p14="http://schemas.microsoft.com/office/powerpoint/2010/main" val="4071105927"/>
+        <p14:creationId xmlns:p14="http://schemas.microsoft.com/office/powerpoint/2010/main" val="690836749"/>
       </p:ext>
     </p:extLst>
   </p:cSld>
@@ -2107,7 +2107,7 @@
           <p:cNvPr id="2" name="Titel 1">
             <a:extLst>
               <a:ext uri="{FF2B5EF4-FFF2-40B4-BE49-F238E27FC236}">
-                <a16:creationId xmlns:a16="http://schemas.microsoft.com/office/drawing/2014/main" id="{866359EB-4CDF-F119-437E-71E1F946BC33}"/>
+                <a16:creationId xmlns:a16="http://schemas.microsoft.com/office/drawing/2014/main" id="{F20D7C72-F8AD-8023-91A2-71B2E0D0A749}"/>
               </a:ext>
             </a:extLst>
           </p:cNvPr>
@@ -2135,7 +2135,7 @@
           <p:cNvPr id="3" name="Datumsplatzhalter 2">
             <a:extLst>
               <a:ext uri="{FF2B5EF4-FFF2-40B4-BE49-F238E27FC236}">
-                <a16:creationId xmlns:a16="http://schemas.microsoft.com/office/drawing/2014/main" id="{E51A89AD-E9E2-7595-E4F6-4E4E5AC7E9A4}"/>
+                <a16:creationId xmlns:a16="http://schemas.microsoft.com/office/drawing/2014/main" id="{9AE67795-86DF-77CC-A264-DF7EFE685EB1}"/>
               </a:ext>
             </a:extLst>
           </p:cNvPr>
@@ -2151,7 +2151,7 @@
           <a:bodyPr/>
           <a:lstStyle/>
           <a:p>
-            <a:fld id="{AC902F5A-E3F6-4856-8EE3-15CF50364D0A}" type="datetimeFigureOut">
+            <a:fld id="{F0F1DE7D-D95E-4F7E-ACE0-C2CB09C0038C}" type="datetimeFigureOut">
               <a:rPr lang="de-DE" smtClean="0"/>
               <a:t>08.10.2026</a:t>
             </a:fld>
@@ -2164,7 +2164,7 @@
           <p:cNvPr id="4" name="Fußzeilenplatzhalter 3">
             <a:extLst>
               <a:ext uri="{FF2B5EF4-FFF2-40B4-BE49-F238E27FC236}">
-                <a16:creationId xmlns:a16="http://schemas.microsoft.com/office/drawing/2014/main" id="{799C15EB-E3F7-A451-8D7A-DE5E6530F852}"/>
+                <a16:creationId xmlns:a16="http://schemas.microsoft.com/office/drawing/2014/main" id="{0517AA53-690C-B0E3-18C7-C8BA2347084F}"/>
               </a:ext>
             </a:extLst>
           </p:cNvPr>
@@ -2189,7 +2189,7 @@
           <p:cNvPr id="5" name="Foliennummernplatzhalter 4">
             <a:extLst>
               <a:ext uri="{FF2B5EF4-FFF2-40B4-BE49-F238E27FC236}">
-                <a16:creationId xmlns:a16="http://schemas.microsoft.com/office/drawing/2014/main" id="{7A434CCF-E9F0-C2E6-5B42-50539ED50BBC}"/>
+                <a16:creationId xmlns:a16="http://schemas.microsoft.com/office/drawing/2014/main" id="{A61E1D11-3624-F87C-ADC0-56B549F63CC2}"/>
               </a:ext>
             </a:extLst>
           </p:cNvPr>
@@ -2205,7 +2205,7 @@
           <a:bodyPr/>
           <a:lstStyle/>
           <a:p>
-            <a:fld id="{E9424090-0FA0-4F74-87C3-2B9C08679DEB}" type="slidenum">
+            <a:fld id="{C36885A8-8839-4915-B7F5-BD5B8285522A}" type="slidenum">
               <a:rPr lang="de-DE" smtClean="0"/>
               <a:t>‹Nr.›</a:t>
             </a:fld>
@@ -2216,7 +2216,7 @@
     </p:spTree>
     <p:extLst>
       <p:ext uri="{BB962C8B-B14F-4D97-AF65-F5344CB8AC3E}">
-        <p14:creationId xmlns:p14="http://schemas.microsoft.com/office/powerpoint/2010/main" val="1402145651"/>
+        <p14:creationId xmlns:p14="http://schemas.microsoft.com/office/powerpoint/2010/main" val="1633281488"/>
       </p:ext>
     </p:extLst>
   </p:cSld>
@@ -2248,7 +2248,7 @@
           <p:cNvPr id="2" name="Datumsplatzhalter 1">
             <a:extLst>
               <a:ext uri="{FF2B5EF4-FFF2-40B4-BE49-F238E27FC236}">
-                <a16:creationId xmlns:a16="http://schemas.microsoft.com/office/drawing/2014/main" id="{4D007836-C715-A589-649D-C18203349232}"/>
+                <a16:creationId xmlns:a16="http://schemas.microsoft.com/office/drawing/2014/main" id="{4EBC2CC6-118F-C365-C53D-130286356F0E}"/>
               </a:ext>
             </a:extLst>
           </p:cNvPr>
@@ -2264,7 +2264,7 @@
           <a:bodyPr/>
           <a:lstStyle/>
           <a:p>
-            <a:fld id="{AC902F5A-E3F6-4856-8EE3-15CF50364D0A}" type="datetimeFigureOut">
+            <a:fld id="{F0F1DE7D-D95E-4F7E-ACE0-C2CB09C0038C}" type="datetimeFigureOut">
               <a:rPr lang="de-DE" smtClean="0"/>
               <a:t>08.10.2026</a:t>
             </a:fld>
@@ -2277,7 +2277,7 @@
           <p:cNvPr id="3" name="Fußzeilenplatzhalter 2">
             <a:extLst>
               <a:ext uri="{FF2B5EF4-FFF2-40B4-BE49-F238E27FC236}">
-                <a16:creationId xmlns:a16="http://schemas.microsoft.com/office/drawing/2014/main" id="{A87058E0-C9DD-389B-A973-8881D53F6771}"/>
+                <a16:creationId xmlns:a16="http://schemas.microsoft.com/office/drawing/2014/main" id="{F5B5477F-6F31-C0E0-EBCA-605265ADA77E}"/>
               </a:ext>
             </a:extLst>
           </p:cNvPr>
@@ -2302,7 +2302,7 @@
           <p:cNvPr id="4" name="Foliennummernplatzhalter 3">
             <a:extLst>
               <a:ext uri="{FF2B5EF4-FFF2-40B4-BE49-F238E27FC236}">
-                <a16:creationId xmlns:a16="http://schemas.microsoft.com/office/drawing/2014/main" id="{375A0DA2-27A5-032D-CB8E-18DA49734F99}"/>
+                <a16:creationId xmlns:a16="http://schemas.microsoft.com/office/drawing/2014/main" id="{1767291F-6D82-7AD1-A71D-07C3100D5FC5}"/>
               </a:ext>
             </a:extLst>
           </p:cNvPr>
@@ -2318,7 +2318,7 @@
           <a:bodyPr/>
           <a:lstStyle/>
           <a:p>
-            <a:fld id="{E9424090-0FA0-4F74-87C3-2B9C08679DEB}" type="slidenum">
+            <a:fld id="{C36885A8-8839-4915-B7F5-BD5B8285522A}" type="slidenum">
               <a:rPr lang="de-DE" smtClean="0"/>
               <a:t>‹Nr.›</a:t>
             </a:fld>
@@ -2329,7 +2329,7 @@
     </p:spTree>
     <p:extLst>
       <p:ext uri="{BB962C8B-B14F-4D97-AF65-F5344CB8AC3E}">
-        <p14:creationId xmlns:p14="http://schemas.microsoft.com/office/powerpoint/2010/main" val="1622061599"/>
+        <p14:creationId xmlns:p14="http://schemas.microsoft.com/office/powerpoint/2010/main" val="4107711410"/>
       </p:ext>
     </p:extLst>
   </p:cSld>
@@ -2361,7 +2361,7 @@
           <p:cNvPr id="2" name="Titel 1">
             <a:extLst>
               <a:ext uri="{FF2B5EF4-FFF2-40B4-BE49-F238E27FC236}">
-                <a16:creationId xmlns:a16="http://schemas.microsoft.com/office/drawing/2014/main" id="{3C585C1E-46C6-60C2-F634-8DE3671A4FC2}"/>
+                <a16:creationId xmlns:a16="http://schemas.microsoft.com/office/drawing/2014/main" id="{B17651CE-D8A3-AA8F-1EE8-B65CA5987260}"/>
               </a:ext>
             </a:extLst>
           </p:cNvPr>
@@ -2398,7 +2398,7 @@
           <p:cNvPr id="3" name="Inhaltsplatzhalter 2">
             <a:extLst>
               <a:ext uri="{FF2B5EF4-FFF2-40B4-BE49-F238E27FC236}">
-                <a16:creationId xmlns:a16="http://schemas.microsoft.com/office/drawing/2014/main" id="{6DE003DD-572C-3368-BDA4-F9FAB2A70061}"/>
+                <a16:creationId xmlns:a16="http://schemas.microsoft.com/office/drawing/2014/main" id="{169973BF-90FD-0D24-1476-33239E3E7967}"/>
               </a:ext>
             </a:extLst>
           </p:cNvPr>
@@ -2488,7 +2488,7 @@
           <p:cNvPr id="4" name="Textplatzhalter 3">
             <a:extLst>
               <a:ext uri="{FF2B5EF4-FFF2-40B4-BE49-F238E27FC236}">
-                <a16:creationId xmlns:a16="http://schemas.microsoft.com/office/drawing/2014/main" id="{067F6692-5411-539B-FAE2-74958E20E937}"/>
+                <a16:creationId xmlns:a16="http://schemas.microsoft.com/office/drawing/2014/main" id="{526334F7-9D7B-33F2-ECD0-4B8FA5A2E21C}"/>
               </a:ext>
             </a:extLst>
           </p:cNvPr>
@@ -2559,7 +2559,7 @@
           <p:cNvPr id="5" name="Datumsplatzhalter 4">
             <a:extLst>
               <a:ext uri="{FF2B5EF4-FFF2-40B4-BE49-F238E27FC236}">
-                <a16:creationId xmlns:a16="http://schemas.microsoft.com/office/drawing/2014/main" id="{F0833F2E-6139-82A2-955C-55D7E71FEEB5}"/>
+                <a16:creationId xmlns:a16="http://schemas.microsoft.com/office/drawing/2014/main" id="{97B4E932-5540-2BF5-7556-19D427E6AED1}"/>
               </a:ext>
             </a:extLst>
           </p:cNvPr>
@@ -2575,7 +2575,7 @@
           <a:bodyPr/>
           <a:lstStyle/>
           <a:p>
-            <a:fld id="{AC902F5A-E3F6-4856-8EE3-15CF50364D0A}" type="datetimeFigureOut">
+            <a:fld id="{F0F1DE7D-D95E-4F7E-ACE0-C2CB09C0038C}" type="datetimeFigureOut">
               <a:rPr lang="de-DE" smtClean="0"/>
               <a:t>08.10.2026</a:t>
             </a:fld>
@@ -2588,7 +2588,7 @@
           <p:cNvPr id="6" name="Fußzeilenplatzhalter 5">
             <a:extLst>
               <a:ext uri="{FF2B5EF4-FFF2-40B4-BE49-F238E27FC236}">
-                <a16:creationId xmlns:a16="http://schemas.microsoft.com/office/drawing/2014/main" id="{23AD1D31-4637-4B6C-9C86-396F6872730C}"/>
+                <a16:creationId xmlns:a16="http://schemas.microsoft.com/office/drawing/2014/main" id="{480CBD2D-7180-765F-DCE5-AAA1ACF3F4CE}"/>
               </a:ext>
             </a:extLst>
           </p:cNvPr>
@@ -2613,7 +2613,7 @@
           <p:cNvPr id="7" name="Foliennummernplatzhalter 6">
             <a:extLst>
               <a:ext uri="{FF2B5EF4-FFF2-40B4-BE49-F238E27FC236}">
-                <a16:creationId xmlns:a16="http://schemas.microsoft.com/office/drawing/2014/main" id="{9B3B3959-E81A-7E30-18DC-5990429C46F1}"/>
+                <a16:creationId xmlns:a16="http://schemas.microsoft.com/office/drawing/2014/main" id="{202864A4-DA7D-2426-4E4B-A54EF5B44605}"/>
               </a:ext>
             </a:extLst>
           </p:cNvPr>
@@ -2629,7 +2629,7 @@
           <a:bodyPr/>
           <a:lstStyle/>
           <a:p>
-            <a:fld id="{E9424090-0FA0-4F74-87C3-2B9C08679DEB}" type="slidenum">
+            <a:fld id="{C36885A8-8839-4915-B7F5-BD5B8285522A}" type="slidenum">
               <a:rPr lang="de-DE" smtClean="0"/>
               <a:t>‹Nr.›</a:t>
             </a:fld>
@@ -2640,7 +2640,7 @@
     </p:spTree>
     <p:extLst>
       <p:ext uri="{BB962C8B-B14F-4D97-AF65-F5344CB8AC3E}">
-        <p14:creationId xmlns:p14="http://schemas.microsoft.com/office/powerpoint/2010/main" val="2535757583"/>
+        <p14:creationId xmlns:p14="http://schemas.microsoft.com/office/powerpoint/2010/main" val="3913126035"/>
       </p:ext>
     </p:extLst>
   </p:cSld>
@@ -2672,7 +2672,7 @@
           <p:cNvPr id="2" name="Titel 1">
             <a:extLst>
               <a:ext uri="{FF2B5EF4-FFF2-40B4-BE49-F238E27FC236}">
-                <a16:creationId xmlns:a16="http://schemas.microsoft.com/office/drawing/2014/main" id="{E926BFB5-2B12-EC52-0E96-FCC909BDE2B1}"/>
+                <a16:creationId xmlns:a16="http://schemas.microsoft.com/office/drawing/2014/main" id="{F7485506-4A41-FA3A-94C0-70E950F1261D}"/>
               </a:ext>
             </a:extLst>
           </p:cNvPr>
@@ -2709,7 +2709,7 @@
           <p:cNvPr id="3" name="Bildplatzhalter 2">
             <a:extLst>
               <a:ext uri="{FF2B5EF4-FFF2-40B4-BE49-F238E27FC236}">
-                <a16:creationId xmlns:a16="http://schemas.microsoft.com/office/drawing/2014/main" id="{E774A176-76B8-F68D-5D50-474CAAE14E1A}"/>
+                <a16:creationId xmlns:a16="http://schemas.microsoft.com/office/drawing/2014/main" id="{64328359-2A8B-C023-DF99-AD76E09F0274}"/>
               </a:ext>
             </a:extLst>
           </p:cNvPr>
@@ -2776,7 +2776,7 @@
           <p:cNvPr id="4" name="Textplatzhalter 3">
             <a:extLst>
               <a:ext uri="{FF2B5EF4-FFF2-40B4-BE49-F238E27FC236}">
-                <a16:creationId xmlns:a16="http://schemas.microsoft.com/office/drawing/2014/main" id="{C8014EF6-7502-2419-95C7-CAD651476ABA}"/>
+                <a16:creationId xmlns:a16="http://schemas.microsoft.com/office/drawing/2014/main" id="{9B7C3657-026F-1AF1-34A6-EC0C364A6FAF}"/>
               </a:ext>
             </a:extLst>
           </p:cNvPr>
@@ -2847,7 +2847,7 @@
           <p:cNvPr id="5" name="Datumsplatzhalter 4">
             <a:extLst>
               <a:ext uri="{FF2B5EF4-FFF2-40B4-BE49-F238E27FC236}">
-                <a16:creationId xmlns:a16="http://schemas.microsoft.com/office/drawing/2014/main" id="{5701E4B8-4D55-1B23-4FC4-51F59856E1AB}"/>
+                <a16:creationId xmlns:a16="http://schemas.microsoft.com/office/drawing/2014/main" id="{6F247D45-63E1-6266-01FD-36B70FFC824B}"/>
               </a:ext>
             </a:extLst>
           </p:cNvPr>
@@ -2863,7 +2863,7 @@
           <a:bodyPr/>
           <a:lstStyle/>
           <a:p>
-            <a:fld id="{AC902F5A-E3F6-4856-8EE3-15CF50364D0A}" type="datetimeFigureOut">
+            <a:fld id="{F0F1DE7D-D95E-4F7E-ACE0-C2CB09C0038C}" type="datetimeFigureOut">
               <a:rPr lang="de-DE" smtClean="0"/>
               <a:t>08.10.2026</a:t>
             </a:fld>
@@ -2876,7 +2876,7 @@
           <p:cNvPr id="6" name="Fußzeilenplatzhalter 5">
             <a:extLst>
               <a:ext uri="{FF2B5EF4-FFF2-40B4-BE49-F238E27FC236}">
-                <a16:creationId xmlns:a16="http://schemas.microsoft.com/office/drawing/2014/main" id="{BEE58C6A-50B6-D794-6959-C8F4099E5C07}"/>
+                <a16:creationId xmlns:a16="http://schemas.microsoft.com/office/drawing/2014/main" id="{E25B8DB7-B67D-6923-E97D-2CB7D9A01CA7}"/>
               </a:ext>
             </a:extLst>
           </p:cNvPr>
@@ -2901,7 +2901,7 @@
           <p:cNvPr id="7" name="Foliennummernplatzhalter 6">
             <a:extLst>
               <a:ext uri="{FF2B5EF4-FFF2-40B4-BE49-F238E27FC236}">
-                <a16:creationId xmlns:a16="http://schemas.microsoft.com/office/drawing/2014/main" id="{846EDB47-3736-E852-370E-36A60574AF8A}"/>
+                <a16:creationId xmlns:a16="http://schemas.microsoft.com/office/drawing/2014/main" id="{24775CE2-DADC-1749-1725-32984EA6D335}"/>
               </a:ext>
             </a:extLst>
           </p:cNvPr>
@@ -2917,7 +2917,7 @@
           <a:bodyPr/>
           <a:lstStyle/>
           <a:p>
-            <a:fld id="{E9424090-0FA0-4F74-87C3-2B9C08679DEB}" type="slidenum">
+            <a:fld id="{C36885A8-8839-4915-B7F5-BD5B8285522A}" type="slidenum">
               <a:rPr lang="de-DE" smtClean="0"/>
               <a:t>‹Nr.›</a:t>
             </a:fld>
@@ -2928,7 +2928,7 @@
     </p:spTree>
     <p:extLst>
       <p:ext uri="{BB962C8B-B14F-4D97-AF65-F5344CB8AC3E}">
-        <p14:creationId xmlns:p14="http://schemas.microsoft.com/office/powerpoint/2010/main" val="3704182908"/>
+        <p14:creationId xmlns:p14="http://schemas.microsoft.com/office/powerpoint/2010/main" val="303160657"/>
       </p:ext>
     </p:extLst>
   </p:cSld>
@@ -2965,7 +2965,7 @@
           <p:cNvPr id="2" name="Titelplatzhalter 1">
             <a:extLst>
               <a:ext uri="{FF2B5EF4-FFF2-40B4-BE49-F238E27FC236}">
-                <a16:creationId xmlns:a16="http://schemas.microsoft.com/office/drawing/2014/main" id="{ACCB893F-3B0C-779D-2A83-306ECC3966EA}"/>
+                <a16:creationId xmlns:a16="http://schemas.microsoft.com/office/drawing/2014/main" id="{5D291F26-678A-E621-B8EA-32678CB2D736}"/>
               </a:ext>
             </a:extLst>
           </p:cNvPr>
@@ -3003,7 +3003,7 @@
           <p:cNvPr id="3" name="Textplatzhalter 2">
             <a:extLst>
               <a:ext uri="{FF2B5EF4-FFF2-40B4-BE49-F238E27FC236}">
-                <a16:creationId xmlns:a16="http://schemas.microsoft.com/office/drawing/2014/main" id="{6A6885D4-BAE4-A37D-81BD-2EB33842FB72}"/>
+                <a16:creationId xmlns:a16="http://schemas.microsoft.com/office/drawing/2014/main" id="{6C47F5EB-81B9-216E-222B-4AFA581320F3}"/>
               </a:ext>
             </a:extLst>
           </p:cNvPr>
@@ -3070,7 +3070,7 @@
           <p:cNvPr id="4" name="Datumsplatzhalter 3">
             <a:extLst>
               <a:ext uri="{FF2B5EF4-FFF2-40B4-BE49-F238E27FC236}">
-                <a16:creationId xmlns:a16="http://schemas.microsoft.com/office/drawing/2014/main" id="{43F00714-CD70-3F14-8990-B636E7B9EFD2}"/>
+                <a16:creationId xmlns:a16="http://schemas.microsoft.com/office/drawing/2014/main" id="{BEDD2D25-0B58-98E7-31DD-F304BBD9D2B5}"/>
               </a:ext>
             </a:extLst>
           </p:cNvPr>
@@ -3104,7 +3104,7 @@
             </a:lvl1pPr>
           </a:lstStyle>
           <a:p>
-            <a:fld id="{AC902F5A-E3F6-4856-8EE3-15CF50364D0A}" type="datetimeFigureOut">
+            <a:fld id="{F0F1DE7D-D95E-4F7E-ACE0-C2CB09C0038C}" type="datetimeFigureOut">
               <a:rPr lang="de-DE" smtClean="0"/>
               <a:t>08.10.2026</a:t>
             </a:fld>
@@ -3117,7 +3117,7 @@
           <p:cNvPr id="5" name="Fußzeilenplatzhalter 4">
             <a:extLst>
               <a:ext uri="{FF2B5EF4-FFF2-40B4-BE49-F238E27FC236}">
-                <a16:creationId xmlns:a16="http://schemas.microsoft.com/office/drawing/2014/main" id="{DD9BB4F1-0C1B-C66D-6B87-C26870DF3034}"/>
+                <a16:creationId xmlns:a16="http://schemas.microsoft.com/office/drawing/2014/main" id="{C4EEA028-EC22-E822-3BA1-F421A0CE063F}"/>
               </a:ext>
             </a:extLst>
           </p:cNvPr>
@@ -3160,7 +3160,7 @@
           <p:cNvPr id="6" name="Foliennummernplatzhalter 5">
             <a:extLst>
               <a:ext uri="{FF2B5EF4-FFF2-40B4-BE49-F238E27FC236}">
-                <a16:creationId xmlns:a16="http://schemas.microsoft.com/office/drawing/2014/main" id="{F9B0E133-5272-2423-B8D9-3888072051CB}"/>
+                <a16:creationId xmlns:a16="http://schemas.microsoft.com/office/drawing/2014/main" id="{0A74E967-6F37-1AEF-BFE7-84CF2EB948C8}"/>
               </a:ext>
             </a:extLst>
           </p:cNvPr>
@@ -3194,7 +3194,7 @@
             </a:lvl1pPr>
           </a:lstStyle>
           <a:p>
-            <a:fld id="{E9424090-0FA0-4F74-87C3-2B9C08679DEB}" type="slidenum">
+            <a:fld id="{C36885A8-8839-4915-B7F5-BD5B8285522A}" type="slidenum">
               <a:rPr lang="de-DE" smtClean="0"/>
               <a:t>‹Nr.›</a:t>
             </a:fld>
@@ -3205,7 +3205,7 @@
     </p:spTree>
     <p:extLst>
       <p:ext uri="{BB962C8B-B14F-4D97-AF65-F5344CB8AC3E}">
-        <p14:creationId xmlns:p14="http://schemas.microsoft.com/office/powerpoint/2010/main" val="1192843583"/>
+        <p14:creationId xmlns:p14="http://schemas.microsoft.com/office/powerpoint/2010/main" val="2172578487"/>
       </p:ext>
     </p:extLst>
   </p:cSld>
@@ -3529,7 +3529,7 @@
           <p:cNvPr id="2" name="Titel 1">
             <a:extLst>
               <a:ext uri="{FF2B5EF4-FFF2-40B4-BE49-F238E27FC236}">
-                <a16:creationId xmlns:a16="http://schemas.microsoft.com/office/drawing/2014/main" id="{81B9BEE0-533A-B42A-0B49-2DF583255492}"/>
+                <a16:creationId xmlns:a16="http://schemas.microsoft.com/office/drawing/2014/main" id="{768D5927-0C37-0DDC-247D-4F005976B5DE}"/>
               </a:ext>
             </a:extLst>
           </p:cNvPr>
@@ -3557,7 +3557,7 @@
           <p:cNvPr id="3" name="Untertitel 2">
             <a:extLst>
               <a:ext uri="{FF2B5EF4-FFF2-40B4-BE49-F238E27FC236}">
-                <a16:creationId xmlns:a16="http://schemas.microsoft.com/office/drawing/2014/main" id="{D82228E3-0929-EF84-7854-40114D0AFEE5}"/>
+                <a16:creationId xmlns:a16="http://schemas.microsoft.com/office/drawing/2014/main" id="{2D84E670-3D0A-F920-7DA7-030C88143E45}"/>
               </a:ext>
             </a:extLst>
           </p:cNvPr>
@@ -3584,7 +3584,7 @@
     </p:spTree>
     <p:extLst>
       <p:ext uri="{BB962C8B-B14F-4D97-AF65-F5344CB8AC3E}">
-        <p14:creationId xmlns:p14="http://schemas.microsoft.com/office/powerpoint/2010/main" val="2914099924"/>
+        <p14:creationId xmlns:p14="http://schemas.microsoft.com/office/powerpoint/2010/main" val="344224745"/>
       </p:ext>
     </p:extLst>
   </p:cSld>
@@ -3616,7 +3616,7 @@
           <p:cNvPr id="2" name="Titel 1">
             <a:extLst>
               <a:ext uri="{FF2B5EF4-FFF2-40B4-BE49-F238E27FC236}">
-                <a16:creationId xmlns:a16="http://schemas.microsoft.com/office/drawing/2014/main" id="{B34B03E4-AE65-8820-2300-53E0F13E9E6E}"/>
+                <a16:creationId xmlns:a16="http://schemas.microsoft.com/office/drawing/2014/main" id="{99D3A4A9-FE21-936B-CA7F-D59FE3E9F58D}"/>
               </a:ext>
             </a:extLst>
           </p:cNvPr>
@@ -3644,7 +3644,7 @@
           <p:cNvPr id="3" name="Textplatzhalter 2">
             <a:extLst>
               <a:ext uri="{FF2B5EF4-FFF2-40B4-BE49-F238E27FC236}">
-                <a16:creationId xmlns:a16="http://schemas.microsoft.com/office/drawing/2014/main" id="{A7BCB149-DA62-A809-7F97-5298CDA6EFA3}"/>
+                <a16:creationId xmlns:a16="http://schemas.microsoft.com/office/drawing/2014/main" id="{01527D48-FACE-C341-8982-3B62F984F878}"/>
               </a:ext>
             </a:extLst>
           </p:cNvPr>
@@ -3704,7 +3704,7 @@
     </p:spTree>
     <p:extLst>
       <p:ext uri="{BB962C8B-B14F-4D97-AF65-F5344CB8AC3E}">
-        <p14:creationId xmlns:p14="http://schemas.microsoft.com/office/powerpoint/2010/main" val="1127057422"/>
+        <p14:creationId xmlns:p14="http://schemas.microsoft.com/office/powerpoint/2010/main" val="1944170990"/>
       </p:ext>
     </p:extLst>
   </p:cSld>
@@ -3736,7 +3736,7 @@
           <p:cNvPr id="2" name="Titel 1">
             <a:extLst>
               <a:ext uri="{FF2B5EF4-FFF2-40B4-BE49-F238E27FC236}">
-                <a16:creationId xmlns:a16="http://schemas.microsoft.com/office/drawing/2014/main" id="{7D79EB6B-0110-0C33-3FFA-7FE71BE8548B}"/>
+                <a16:creationId xmlns:a16="http://schemas.microsoft.com/office/drawing/2014/main" id="{77289B82-21D8-D030-E274-CB46E30B2B87}"/>
               </a:ext>
             </a:extLst>
           </p:cNvPr>
@@ -3764,7 +3764,7 @@
           <p:cNvPr id="3" name="Textfeld 2">
             <a:extLst>
               <a:ext uri="{FF2B5EF4-FFF2-40B4-BE49-F238E27FC236}">
-                <a16:creationId xmlns:a16="http://schemas.microsoft.com/office/drawing/2014/main" id="{4907F40E-416A-C28D-6BB3-F36A372FD6B3}"/>
+                <a16:creationId xmlns:a16="http://schemas.microsoft.com/office/drawing/2014/main" id="{78306841-93B6-E799-4D85-32FE2BA1A36A}"/>
               </a:ext>
             </a:extLst>
           </p:cNvPr>
@@ -3810,7 +3810,7 @@
           <p:cNvPr id="4" name="Textfeld 3">
             <a:extLst>
               <a:ext uri="{FF2B5EF4-FFF2-40B4-BE49-F238E27FC236}">
-                <a16:creationId xmlns:a16="http://schemas.microsoft.com/office/drawing/2014/main" id="{7225BC3A-A1FE-0FC4-4186-C581B7045FC7}"/>
+                <a16:creationId xmlns:a16="http://schemas.microsoft.com/office/drawing/2014/main" id="{B14FD1F8-E0CF-EDC9-58A7-307028FF2FB5}"/>
               </a:ext>
             </a:extLst>
           </p:cNvPr>
@@ -3856,7 +3856,7 @@
           <p:cNvPr id="5" name="Textfeld 4">
             <a:extLst>
               <a:ext uri="{FF2B5EF4-FFF2-40B4-BE49-F238E27FC236}">
-                <a16:creationId xmlns:a16="http://schemas.microsoft.com/office/drawing/2014/main" id="{D0929972-0FD1-36A9-9BF3-AF296B0B425E}"/>
+                <a16:creationId xmlns:a16="http://schemas.microsoft.com/office/drawing/2014/main" id="{58D6BCDE-5995-A75D-4111-311C1D8941C8}"/>
               </a:ext>
             </a:extLst>
           </p:cNvPr>
@@ -3902,7 +3902,7 @@
           <p:cNvPr id="6" name="Textfeld 5">
             <a:extLst>
               <a:ext uri="{FF2B5EF4-FFF2-40B4-BE49-F238E27FC236}">
-                <a16:creationId xmlns:a16="http://schemas.microsoft.com/office/drawing/2014/main" id="{EFE14F7B-7137-ED87-FD37-CAD02AE46DAB}"/>
+                <a16:creationId xmlns:a16="http://schemas.microsoft.com/office/drawing/2014/main" id="{4F4D8E3B-7A3F-7BDA-C9A8-718D3C076B64}"/>
               </a:ext>
             </a:extLst>
           </p:cNvPr>
@@ -3948,7 +3948,7 @@
           <p:cNvPr id="7" name="Textfeld 6">
             <a:extLst>
               <a:ext uri="{FF2B5EF4-FFF2-40B4-BE49-F238E27FC236}">
-                <a16:creationId xmlns:a16="http://schemas.microsoft.com/office/drawing/2014/main" id="{2FE3B668-F4F5-6F3C-D525-5015952597C9}"/>
+                <a16:creationId xmlns:a16="http://schemas.microsoft.com/office/drawing/2014/main" id="{358FFF73-C6E8-1129-F098-8B64F9272150}"/>
               </a:ext>
             </a:extLst>
           </p:cNvPr>
@@ -3994,7 +3994,7 @@
           <p:cNvPr id="8" name="Textfeld 7">
             <a:extLst>
               <a:ext uri="{FF2B5EF4-FFF2-40B4-BE49-F238E27FC236}">
-                <a16:creationId xmlns:a16="http://schemas.microsoft.com/office/drawing/2014/main" id="{E315AB66-7E2C-E892-A9A7-081F6333880F}"/>
+                <a16:creationId xmlns:a16="http://schemas.microsoft.com/office/drawing/2014/main" id="{2CEFCE16-7EBD-70E2-6C85-220D18758EF3}"/>
               </a:ext>
             </a:extLst>
           </p:cNvPr>
@@ -4038,7 +4038,7 @@
     </p:spTree>
     <p:extLst>
       <p:ext uri="{BB962C8B-B14F-4D97-AF65-F5344CB8AC3E}">
-        <p14:creationId xmlns:p14="http://schemas.microsoft.com/office/powerpoint/2010/main" val="2257965875"/>
+        <p14:creationId xmlns:p14="http://schemas.microsoft.com/office/powerpoint/2010/main" val="1079172150"/>
       </p:ext>
     </p:extLst>
   </p:cSld>
@@ -4070,7 +4070,7 @@
           <p:cNvPr id="2" name="Titel 1">
             <a:extLst>
               <a:ext uri="{FF2B5EF4-FFF2-40B4-BE49-F238E27FC236}">
-                <a16:creationId xmlns:a16="http://schemas.microsoft.com/office/drawing/2014/main" id="{CC2B08D3-6D88-FCF6-82F1-F7056D06878A}"/>
+                <a16:creationId xmlns:a16="http://schemas.microsoft.com/office/drawing/2014/main" id="{2010E31E-796D-0D26-4E74-7534BCADC386}"/>
               </a:ext>
             </a:extLst>
           </p:cNvPr>
@@ -4098,7 +4098,7 @@
           <p:cNvPr id="3" name="Rechteck 2">
             <a:extLst>
               <a:ext uri="{FF2B5EF4-FFF2-40B4-BE49-F238E27FC236}">
-                <a16:creationId xmlns:a16="http://schemas.microsoft.com/office/drawing/2014/main" id="{C7EB5D88-BA79-A203-BEE8-3906A04D1238}"/>
+                <a16:creationId xmlns:a16="http://schemas.microsoft.com/office/drawing/2014/main" id="{6524043D-FFF6-742E-032E-032F5CF0C168}"/>
               </a:ext>
             </a:extLst>
           </p:cNvPr>
@@ -4147,7 +4147,7 @@
           <p:cNvPr id="4" name="Rechteck 3">
             <a:extLst>
               <a:ext uri="{FF2B5EF4-FFF2-40B4-BE49-F238E27FC236}">
-                <a16:creationId xmlns:a16="http://schemas.microsoft.com/office/drawing/2014/main" id="{E27BC5A1-086E-76DD-DD3D-6009C699F330}"/>
+                <a16:creationId xmlns:a16="http://schemas.microsoft.com/office/drawing/2014/main" id="{828404CD-76CB-5AF9-BB78-C51BA5395347}"/>
               </a:ext>
             </a:extLst>
           </p:cNvPr>
@@ -4196,7 +4196,7 @@
           <p:cNvPr id="5" name="Rechteck 4">
             <a:extLst>
               <a:ext uri="{FF2B5EF4-FFF2-40B4-BE49-F238E27FC236}">
-                <a16:creationId xmlns:a16="http://schemas.microsoft.com/office/drawing/2014/main" id="{6608C861-327D-825C-791B-895C9867466A}"/>
+                <a16:creationId xmlns:a16="http://schemas.microsoft.com/office/drawing/2014/main" id="{02A41131-08E7-91E5-2409-EC77935315DC}"/>
               </a:ext>
             </a:extLst>
           </p:cNvPr>
@@ -4245,7 +4245,7 @@
           <p:cNvPr id="6" name="Rechteck 5">
             <a:extLst>
               <a:ext uri="{FF2B5EF4-FFF2-40B4-BE49-F238E27FC236}">
-                <a16:creationId xmlns:a16="http://schemas.microsoft.com/office/drawing/2014/main" id="{DFAC83CB-9AF4-EDF6-FBF7-C4493DE04B17}"/>
+                <a16:creationId xmlns:a16="http://schemas.microsoft.com/office/drawing/2014/main" id="{F777D43B-2576-125A-8D24-F36707991688}"/>
               </a:ext>
             </a:extLst>
           </p:cNvPr>
@@ -4295,7 +4295,7 @@
           <p:cNvPr id="7" name="Rechteck 6">
             <a:extLst>
               <a:ext uri="{FF2B5EF4-FFF2-40B4-BE49-F238E27FC236}">
-                <a16:creationId xmlns:a16="http://schemas.microsoft.com/office/drawing/2014/main" id="{78FDBA72-5846-BFAE-DE53-516038D6A285}"/>
+                <a16:creationId xmlns:a16="http://schemas.microsoft.com/office/drawing/2014/main" id="{64F0042D-2285-967A-5375-2EF04EFAF66F}"/>
               </a:ext>
             </a:extLst>
           </p:cNvPr>
@@ -4345,7 +4345,7 @@
           <p:cNvPr id="8" name="Rechteck 7">
             <a:extLst>
               <a:ext uri="{FF2B5EF4-FFF2-40B4-BE49-F238E27FC236}">
-                <a16:creationId xmlns:a16="http://schemas.microsoft.com/office/drawing/2014/main" id="{B61EF923-33CF-30B1-46C4-912A9EFE3735}"/>
+                <a16:creationId xmlns:a16="http://schemas.microsoft.com/office/drawing/2014/main" id="{9D7CB3A7-7795-920A-9011-60C8B71C317E}"/>
               </a:ext>
             </a:extLst>
           </p:cNvPr>
@@ -4395,7 +4395,7 @@
           <p:cNvPr id="9" name="Rechteck 8">
             <a:extLst>
               <a:ext uri="{FF2B5EF4-FFF2-40B4-BE49-F238E27FC236}">
-                <a16:creationId xmlns:a16="http://schemas.microsoft.com/office/drawing/2014/main" id="{9D186F48-7C1F-584C-8FFB-69E491CA2C47}"/>
+                <a16:creationId xmlns:a16="http://schemas.microsoft.com/office/drawing/2014/main" id="{E8406BB8-F8B8-02E6-664A-54B3DEED69B4}"/>
               </a:ext>
             </a:extLst>
           </p:cNvPr>
@@ -4445,7 +4445,7 @@
           <p:cNvPr id="10" name="Rechteck 9">
             <a:extLst>
               <a:ext uri="{FF2B5EF4-FFF2-40B4-BE49-F238E27FC236}">
-                <a16:creationId xmlns:a16="http://schemas.microsoft.com/office/drawing/2014/main" id="{CA50D2C1-8766-730C-E905-96E1BEF70738}"/>
+                <a16:creationId xmlns:a16="http://schemas.microsoft.com/office/drawing/2014/main" id="{85055F90-48CE-71F0-BA52-3AD390A71353}"/>
               </a:ext>
             </a:extLst>
           </p:cNvPr>
@@ -4495,7 +4495,7 @@
           <p:cNvPr id="11" name="Rechteck 10">
             <a:extLst>
               <a:ext uri="{FF2B5EF4-FFF2-40B4-BE49-F238E27FC236}">
-                <a16:creationId xmlns:a16="http://schemas.microsoft.com/office/drawing/2014/main" id="{E2231BA6-66F4-442D-5450-EAB6C3F7D146}"/>
+                <a16:creationId xmlns:a16="http://schemas.microsoft.com/office/drawing/2014/main" id="{669F91F1-2986-2398-6B47-1C9B79428DA9}"/>
               </a:ext>
             </a:extLst>
           </p:cNvPr>
@@ -4545,7 +4545,7 @@
           <p:cNvPr id="12" name="Rechteck 11">
             <a:extLst>
               <a:ext uri="{FF2B5EF4-FFF2-40B4-BE49-F238E27FC236}">
-                <a16:creationId xmlns:a16="http://schemas.microsoft.com/office/drawing/2014/main" id="{6F191379-1137-B6DF-8AD6-69D892BF0EA6}"/>
+                <a16:creationId xmlns:a16="http://schemas.microsoft.com/office/drawing/2014/main" id="{5259193E-C6C9-0E1A-3904-EDDD4C0CF43A}"/>
               </a:ext>
             </a:extLst>
           </p:cNvPr>
@@ -4595,7 +4595,7 @@
           <p:cNvPr id="13" name="Rechteck 12">
             <a:extLst>
               <a:ext uri="{FF2B5EF4-FFF2-40B4-BE49-F238E27FC236}">
-                <a16:creationId xmlns:a16="http://schemas.microsoft.com/office/drawing/2014/main" id="{B825DDA7-D24C-5507-3F2A-8425CBBA11C0}"/>
+                <a16:creationId xmlns:a16="http://schemas.microsoft.com/office/drawing/2014/main" id="{65B77E81-18CF-E6C7-E98D-EE675B5411AF}"/>
               </a:ext>
             </a:extLst>
           </p:cNvPr>
@@ -4645,7 +4645,7 @@
           <p:cNvPr id="14" name="Rechteck 13">
             <a:extLst>
               <a:ext uri="{FF2B5EF4-FFF2-40B4-BE49-F238E27FC236}">
-                <a16:creationId xmlns:a16="http://schemas.microsoft.com/office/drawing/2014/main" id="{D2142268-E0D5-7C46-DB6D-77E3BD05FD84}"/>
+                <a16:creationId xmlns:a16="http://schemas.microsoft.com/office/drawing/2014/main" id="{4AAE57BC-9DF2-10D5-3A5B-F79BB6D679EA}"/>
               </a:ext>
             </a:extLst>
           </p:cNvPr>
@@ -4693,7 +4693,7 @@
     </p:spTree>
     <p:extLst>
       <p:ext uri="{BB962C8B-B14F-4D97-AF65-F5344CB8AC3E}">
-        <p14:creationId xmlns:p14="http://schemas.microsoft.com/office/powerpoint/2010/main" val="4135807300"/>
+        <p14:creationId xmlns:p14="http://schemas.microsoft.com/office/powerpoint/2010/main" val="4144140358"/>
       </p:ext>
     </p:extLst>
   </p:cSld>
@@ -4725,7 +4725,7 @@
           <p:cNvPr id="2" name="Titel 1">
             <a:extLst>
               <a:ext uri="{FF2B5EF4-FFF2-40B4-BE49-F238E27FC236}">
-                <a16:creationId xmlns:a16="http://schemas.microsoft.com/office/drawing/2014/main" id="{5D48B194-8C76-3282-6D40-8368FCC4ADA0}"/>
+                <a16:creationId xmlns:a16="http://schemas.microsoft.com/office/drawing/2014/main" id="{1F81D4AA-0B35-738C-EF90-4409699B2B6C}"/>
               </a:ext>
             </a:extLst>
           </p:cNvPr>
@@ -4754,7 +4754,7 @@
           <p:cNvPr id="3" name="Textplatzhalter 2">
             <a:extLst>
               <a:ext uri="{FF2B5EF4-FFF2-40B4-BE49-F238E27FC236}">
-                <a16:creationId xmlns:a16="http://schemas.microsoft.com/office/drawing/2014/main" id="{C5560466-0CA4-22C9-F3D1-B0D5BE7B44DE}"/>
+                <a16:creationId xmlns:a16="http://schemas.microsoft.com/office/drawing/2014/main" id="{F4578A5D-1B1D-2630-13E2-1D9268F81CCE}"/>
               </a:ext>
             </a:extLst>
           </p:cNvPr>
@@ -4859,7 +4859,7 @@
     </p:spTree>
     <p:extLst>
       <p:ext uri="{BB962C8B-B14F-4D97-AF65-F5344CB8AC3E}">
-        <p14:creationId xmlns:p14="http://schemas.microsoft.com/office/powerpoint/2010/main" val="2621228572"/>
+        <p14:creationId xmlns:p14="http://schemas.microsoft.com/office/powerpoint/2010/main" val="3010404774"/>
       </p:ext>
     </p:extLst>
   </p:cSld>

--- a/tests/corpus/pptx/generated/text-basic.pptx
+++ b/tests/corpus/pptx/generated/text-basic.pptx
@@ -133,7 +133,7 @@
           <p:cNvPr id="2" name="Titel 1">
             <a:extLst>
               <a:ext uri="{FF2B5EF4-FFF2-40B4-BE49-F238E27FC236}">
-                <a16:creationId xmlns:a16="http://schemas.microsoft.com/office/drawing/2014/main" id="{AB8E1931-826F-3EBC-8D04-EF14CB83C5CE}"/>
+                <a16:creationId xmlns:a16="http://schemas.microsoft.com/office/drawing/2014/main" id="{1BDEE850-CF96-4A5D-0ED0-4F6222F56E19}"/>
               </a:ext>
             </a:extLst>
           </p:cNvPr>
@@ -170,7 +170,7 @@
           <p:cNvPr id="3" name="Untertitel 2">
             <a:extLst>
               <a:ext uri="{FF2B5EF4-FFF2-40B4-BE49-F238E27FC236}">
-                <a16:creationId xmlns:a16="http://schemas.microsoft.com/office/drawing/2014/main" id="{7A60E821-8A78-F304-7D2D-8B60BF02B55B}"/>
+                <a16:creationId xmlns:a16="http://schemas.microsoft.com/office/drawing/2014/main" id="{B827D61C-E2A7-E0FD-885E-1C8E531DB03D}"/>
               </a:ext>
             </a:extLst>
           </p:cNvPr>
@@ -240,7 +240,7 @@
           <p:cNvPr id="4" name="Datumsplatzhalter 3">
             <a:extLst>
               <a:ext uri="{FF2B5EF4-FFF2-40B4-BE49-F238E27FC236}">
-                <a16:creationId xmlns:a16="http://schemas.microsoft.com/office/drawing/2014/main" id="{B6ACEE76-4F7B-5F36-85CB-E52378C02D69}"/>
+                <a16:creationId xmlns:a16="http://schemas.microsoft.com/office/drawing/2014/main" id="{C251646F-1238-F061-5E28-4C118C8EE9A8}"/>
               </a:ext>
             </a:extLst>
           </p:cNvPr>
@@ -256,7 +256,7 @@
           <a:bodyPr/>
           <a:lstStyle/>
           <a:p>
-            <a:fld id="{F0F1DE7D-D95E-4F7E-ACE0-C2CB09C0038C}" type="datetimeFigureOut">
+            <a:fld id="{BE01F26F-9781-4EC0-A938-D1A87336FB24}" type="datetimeFigureOut">
               <a:rPr lang="de-DE" smtClean="0"/>
               <a:t>08.10.2026</a:t>
             </a:fld>
@@ -269,7 +269,7 @@
           <p:cNvPr id="5" name="Fußzeilenplatzhalter 4">
             <a:extLst>
               <a:ext uri="{FF2B5EF4-FFF2-40B4-BE49-F238E27FC236}">
-                <a16:creationId xmlns:a16="http://schemas.microsoft.com/office/drawing/2014/main" id="{7079DB06-CEC2-D3E0-B51F-89E25E9105F5}"/>
+                <a16:creationId xmlns:a16="http://schemas.microsoft.com/office/drawing/2014/main" id="{FE64B46D-3278-E3D6-36BA-36D8836B1DD7}"/>
               </a:ext>
             </a:extLst>
           </p:cNvPr>
@@ -294,7 +294,7 @@
           <p:cNvPr id="6" name="Foliennummernplatzhalter 5">
             <a:extLst>
               <a:ext uri="{FF2B5EF4-FFF2-40B4-BE49-F238E27FC236}">
-                <a16:creationId xmlns:a16="http://schemas.microsoft.com/office/drawing/2014/main" id="{FD86F3FE-6A1E-C7B7-8F65-3413669472A7}"/>
+                <a16:creationId xmlns:a16="http://schemas.microsoft.com/office/drawing/2014/main" id="{5FDCF7A5-ABDD-E2E1-0228-4399AE89608D}"/>
               </a:ext>
             </a:extLst>
           </p:cNvPr>
@@ -310,7 +310,7 @@
           <a:bodyPr/>
           <a:lstStyle/>
           <a:p>
-            <a:fld id="{C36885A8-8839-4915-B7F5-BD5B8285522A}" type="slidenum">
+            <a:fld id="{6B9B57F8-08A7-4B0D-A141-8D0AAF84B932}" type="slidenum">
               <a:rPr lang="de-DE" smtClean="0"/>
               <a:t>‹Nr.›</a:t>
             </a:fld>
@@ -321,7 +321,7 @@
     </p:spTree>
     <p:extLst>
       <p:ext uri="{BB962C8B-B14F-4D97-AF65-F5344CB8AC3E}">
-        <p14:creationId xmlns:p14="http://schemas.microsoft.com/office/powerpoint/2010/main" val="857465050"/>
+        <p14:creationId xmlns:p14="http://schemas.microsoft.com/office/powerpoint/2010/main" val="2936047065"/>
       </p:ext>
     </p:extLst>
   </p:cSld>
@@ -353,7 +353,7 @@
           <p:cNvPr id="2" name="Titel 1">
             <a:extLst>
               <a:ext uri="{FF2B5EF4-FFF2-40B4-BE49-F238E27FC236}">
-                <a16:creationId xmlns:a16="http://schemas.microsoft.com/office/drawing/2014/main" id="{A11E2E6B-4751-B1EF-1C1D-75B1ED628B4B}"/>
+                <a16:creationId xmlns:a16="http://schemas.microsoft.com/office/drawing/2014/main" id="{E40B9DB0-7CDC-1181-4433-91E43B6DB396}"/>
               </a:ext>
             </a:extLst>
           </p:cNvPr>
@@ -381,7 +381,7 @@
           <p:cNvPr id="3" name="Vertikaler Textplatzhalter 2">
             <a:extLst>
               <a:ext uri="{FF2B5EF4-FFF2-40B4-BE49-F238E27FC236}">
-                <a16:creationId xmlns:a16="http://schemas.microsoft.com/office/drawing/2014/main" id="{32A6E91D-4268-6C9A-26D4-AA91DAFB70E0}"/>
+                <a16:creationId xmlns:a16="http://schemas.microsoft.com/office/drawing/2014/main" id="{210F8A3E-2659-EF7D-4870-520641699F2E}"/>
               </a:ext>
             </a:extLst>
           </p:cNvPr>
@@ -438,7 +438,7 @@
           <p:cNvPr id="4" name="Datumsplatzhalter 3">
             <a:extLst>
               <a:ext uri="{FF2B5EF4-FFF2-40B4-BE49-F238E27FC236}">
-                <a16:creationId xmlns:a16="http://schemas.microsoft.com/office/drawing/2014/main" id="{0D1929A6-7C97-C00A-A507-CD43BF82EABF}"/>
+                <a16:creationId xmlns:a16="http://schemas.microsoft.com/office/drawing/2014/main" id="{DCC2355A-284C-1397-CDC1-D6E1293B599C}"/>
               </a:ext>
             </a:extLst>
           </p:cNvPr>
@@ -454,7 +454,7 @@
           <a:bodyPr/>
           <a:lstStyle/>
           <a:p>
-            <a:fld id="{F0F1DE7D-D95E-4F7E-ACE0-C2CB09C0038C}" type="datetimeFigureOut">
+            <a:fld id="{BE01F26F-9781-4EC0-A938-D1A87336FB24}" type="datetimeFigureOut">
               <a:rPr lang="de-DE" smtClean="0"/>
               <a:t>08.10.2026</a:t>
             </a:fld>
@@ -467,7 +467,7 @@
           <p:cNvPr id="5" name="Fußzeilenplatzhalter 4">
             <a:extLst>
               <a:ext uri="{FF2B5EF4-FFF2-40B4-BE49-F238E27FC236}">
-                <a16:creationId xmlns:a16="http://schemas.microsoft.com/office/drawing/2014/main" id="{29E47FB3-4D5B-48AD-DD7D-84296234A52F}"/>
+                <a16:creationId xmlns:a16="http://schemas.microsoft.com/office/drawing/2014/main" id="{68965141-DF57-EF44-16F1-49C13B1B52EA}"/>
               </a:ext>
             </a:extLst>
           </p:cNvPr>
@@ -492,7 +492,7 @@
           <p:cNvPr id="6" name="Foliennummernplatzhalter 5">
             <a:extLst>
               <a:ext uri="{FF2B5EF4-FFF2-40B4-BE49-F238E27FC236}">
-                <a16:creationId xmlns:a16="http://schemas.microsoft.com/office/drawing/2014/main" id="{24B1B47F-084B-2016-BDF6-3D60538748D3}"/>
+                <a16:creationId xmlns:a16="http://schemas.microsoft.com/office/drawing/2014/main" id="{3C1AFE5D-C15F-8908-FA5A-466B6457A514}"/>
               </a:ext>
             </a:extLst>
           </p:cNvPr>
@@ -508,7 +508,7 @@
           <a:bodyPr/>
           <a:lstStyle/>
           <a:p>
-            <a:fld id="{C36885A8-8839-4915-B7F5-BD5B8285522A}" type="slidenum">
+            <a:fld id="{6B9B57F8-08A7-4B0D-A141-8D0AAF84B932}" type="slidenum">
               <a:rPr lang="de-DE" smtClean="0"/>
               <a:t>‹Nr.›</a:t>
             </a:fld>
@@ -519,7 +519,7 @@
     </p:spTree>
     <p:extLst>
       <p:ext uri="{BB962C8B-B14F-4D97-AF65-F5344CB8AC3E}">
-        <p14:creationId xmlns:p14="http://schemas.microsoft.com/office/powerpoint/2010/main" val="224341007"/>
+        <p14:creationId xmlns:p14="http://schemas.microsoft.com/office/powerpoint/2010/main" val="608990767"/>
       </p:ext>
     </p:extLst>
   </p:cSld>
@@ -551,7 +551,7 @@
           <p:cNvPr id="2" name="Vertikaler Titel 1">
             <a:extLst>
               <a:ext uri="{FF2B5EF4-FFF2-40B4-BE49-F238E27FC236}">
-                <a16:creationId xmlns:a16="http://schemas.microsoft.com/office/drawing/2014/main" id="{E91CD1E2-A17B-898B-BABE-F49853083F44}"/>
+                <a16:creationId xmlns:a16="http://schemas.microsoft.com/office/drawing/2014/main" id="{E5169563-9A29-39CE-6300-1B0B1C298A89}"/>
               </a:ext>
             </a:extLst>
           </p:cNvPr>
@@ -584,7 +584,7 @@
           <p:cNvPr id="3" name="Vertikaler Textplatzhalter 2">
             <a:extLst>
               <a:ext uri="{FF2B5EF4-FFF2-40B4-BE49-F238E27FC236}">
-                <a16:creationId xmlns:a16="http://schemas.microsoft.com/office/drawing/2014/main" id="{4244E0BB-E68E-8266-6924-A3C3F8F8932E}"/>
+                <a16:creationId xmlns:a16="http://schemas.microsoft.com/office/drawing/2014/main" id="{F3029A87-9983-F443-6620-09A578E8D072}"/>
               </a:ext>
             </a:extLst>
           </p:cNvPr>
@@ -646,7 +646,7 @@
           <p:cNvPr id="4" name="Datumsplatzhalter 3">
             <a:extLst>
               <a:ext uri="{FF2B5EF4-FFF2-40B4-BE49-F238E27FC236}">
-                <a16:creationId xmlns:a16="http://schemas.microsoft.com/office/drawing/2014/main" id="{60C3F1A5-9BFC-9BAE-DDCF-8F13CBC9EB4F}"/>
+                <a16:creationId xmlns:a16="http://schemas.microsoft.com/office/drawing/2014/main" id="{CAB06677-6176-52F0-A44E-9F70060C0E04}"/>
               </a:ext>
             </a:extLst>
           </p:cNvPr>
@@ -662,7 +662,7 @@
           <a:bodyPr/>
           <a:lstStyle/>
           <a:p>
-            <a:fld id="{F0F1DE7D-D95E-4F7E-ACE0-C2CB09C0038C}" type="datetimeFigureOut">
+            <a:fld id="{BE01F26F-9781-4EC0-A938-D1A87336FB24}" type="datetimeFigureOut">
               <a:rPr lang="de-DE" smtClean="0"/>
               <a:t>08.10.2026</a:t>
             </a:fld>
@@ -675,7 +675,7 @@
           <p:cNvPr id="5" name="Fußzeilenplatzhalter 4">
             <a:extLst>
               <a:ext uri="{FF2B5EF4-FFF2-40B4-BE49-F238E27FC236}">
-                <a16:creationId xmlns:a16="http://schemas.microsoft.com/office/drawing/2014/main" id="{D9BF742E-E1B2-19F6-90C4-66F6E59CD31B}"/>
+                <a16:creationId xmlns:a16="http://schemas.microsoft.com/office/drawing/2014/main" id="{2FB85F09-C685-3B59-5EE9-153092412CAD}"/>
               </a:ext>
             </a:extLst>
           </p:cNvPr>
@@ -700,7 +700,7 @@
           <p:cNvPr id="6" name="Foliennummernplatzhalter 5">
             <a:extLst>
               <a:ext uri="{FF2B5EF4-FFF2-40B4-BE49-F238E27FC236}">
-                <a16:creationId xmlns:a16="http://schemas.microsoft.com/office/drawing/2014/main" id="{FF0AD6D0-36EF-C003-262A-0BE1C1918FCA}"/>
+                <a16:creationId xmlns:a16="http://schemas.microsoft.com/office/drawing/2014/main" id="{71E49CAD-A959-FFFD-D1DA-1AB9F6F4461B}"/>
               </a:ext>
             </a:extLst>
           </p:cNvPr>
@@ -716,7 +716,7 @@
           <a:bodyPr/>
           <a:lstStyle/>
           <a:p>
-            <a:fld id="{C36885A8-8839-4915-B7F5-BD5B8285522A}" type="slidenum">
+            <a:fld id="{6B9B57F8-08A7-4B0D-A141-8D0AAF84B932}" type="slidenum">
               <a:rPr lang="de-DE" smtClean="0"/>
               <a:t>‹Nr.›</a:t>
             </a:fld>
@@ -727,7 +727,7 @@
     </p:spTree>
     <p:extLst>
       <p:ext uri="{BB962C8B-B14F-4D97-AF65-F5344CB8AC3E}">
-        <p14:creationId xmlns:p14="http://schemas.microsoft.com/office/powerpoint/2010/main" val="2737939655"/>
+        <p14:creationId xmlns:p14="http://schemas.microsoft.com/office/powerpoint/2010/main" val="1694715417"/>
       </p:ext>
     </p:extLst>
   </p:cSld>
@@ -759,7 +759,7 @@
           <p:cNvPr id="2" name="Titel 1">
             <a:extLst>
               <a:ext uri="{FF2B5EF4-FFF2-40B4-BE49-F238E27FC236}">
-                <a16:creationId xmlns:a16="http://schemas.microsoft.com/office/drawing/2014/main" id="{F624FDB6-235D-86E0-778D-2B8935EACCFA}"/>
+                <a16:creationId xmlns:a16="http://schemas.microsoft.com/office/drawing/2014/main" id="{DC234B3C-ED97-029B-2036-469E6BA8632B}"/>
               </a:ext>
             </a:extLst>
           </p:cNvPr>
@@ -787,7 +787,7 @@
           <p:cNvPr id="3" name="Textplatzhalter 2">
             <a:extLst>
               <a:ext uri="{FF2B5EF4-FFF2-40B4-BE49-F238E27FC236}">
-                <a16:creationId xmlns:a16="http://schemas.microsoft.com/office/drawing/2014/main" id="{2298381E-7441-88EF-FA88-C354BEC0C9F6}"/>
+                <a16:creationId xmlns:a16="http://schemas.microsoft.com/office/drawing/2014/main" id="{BC69C260-8CEF-0620-3402-E608C9A06F5F}"/>
               </a:ext>
             </a:extLst>
           </p:cNvPr>
@@ -844,7 +844,7 @@
           <p:cNvPr id="4" name="Datumsplatzhalter 3">
             <a:extLst>
               <a:ext uri="{FF2B5EF4-FFF2-40B4-BE49-F238E27FC236}">
-                <a16:creationId xmlns:a16="http://schemas.microsoft.com/office/drawing/2014/main" id="{DFF8DBFF-0644-EB0D-05DE-351DD114AB12}"/>
+                <a16:creationId xmlns:a16="http://schemas.microsoft.com/office/drawing/2014/main" id="{614BEDEA-5C4C-2B84-1FB5-E926251EFEEB}"/>
               </a:ext>
             </a:extLst>
           </p:cNvPr>
@@ -860,7 +860,7 @@
           <a:bodyPr/>
           <a:lstStyle/>
           <a:p>
-            <a:fld id="{F0F1DE7D-D95E-4F7E-ACE0-C2CB09C0038C}" type="datetimeFigureOut">
+            <a:fld id="{BE01F26F-9781-4EC0-A938-D1A87336FB24}" type="datetimeFigureOut">
               <a:rPr lang="de-DE" smtClean="0"/>
               <a:t>08.10.2026</a:t>
             </a:fld>
@@ -873,7 +873,7 @@
           <p:cNvPr id="5" name="Fußzeilenplatzhalter 4">
             <a:extLst>
               <a:ext uri="{FF2B5EF4-FFF2-40B4-BE49-F238E27FC236}">
-                <a16:creationId xmlns:a16="http://schemas.microsoft.com/office/drawing/2014/main" id="{5A965408-77D3-4E52-CB89-FB759B2C5F91}"/>
+                <a16:creationId xmlns:a16="http://schemas.microsoft.com/office/drawing/2014/main" id="{3DC8CFB3-D270-C5A9-1336-35328FDC62C3}"/>
               </a:ext>
             </a:extLst>
           </p:cNvPr>
@@ -898,7 +898,7 @@
           <p:cNvPr id="6" name="Foliennummernplatzhalter 5">
             <a:extLst>
               <a:ext uri="{FF2B5EF4-FFF2-40B4-BE49-F238E27FC236}">
-                <a16:creationId xmlns:a16="http://schemas.microsoft.com/office/drawing/2014/main" id="{F5C4A71B-514A-5B4E-28F4-47819C511998}"/>
+                <a16:creationId xmlns:a16="http://schemas.microsoft.com/office/drawing/2014/main" id="{A2CA5648-9BCF-DBD1-EF24-9F2CCA3B8B7D}"/>
               </a:ext>
             </a:extLst>
           </p:cNvPr>
@@ -914,7 +914,7 @@
           <a:bodyPr/>
           <a:lstStyle/>
           <a:p>
-            <a:fld id="{C36885A8-8839-4915-B7F5-BD5B8285522A}" type="slidenum">
+            <a:fld id="{6B9B57F8-08A7-4B0D-A141-8D0AAF84B932}" type="slidenum">
               <a:rPr lang="de-DE" smtClean="0"/>
               <a:t>‹Nr.›</a:t>
             </a:fld>
@@ -925,7 +925,7 @@
     </p:spTree>
     <p:extLst>
       <p:ext uri="{BB962C8B-B14F-4D97-AF65-F5344CB8AC3E}">
-        <p14:creationId xmlns:p14="http://schemas.microsoft.com/office/powerpoint/2010/main" val="75466911"/>
+        <p14:creationId xmlns:p14="http://schemas.microsoft.com/office/powerpoint/2010/main" val="3961624547"/>
       </p:ext>
     </p:extLst>
   </p:cSld>
@@ -957,7 +957,7 @@
           <p:cNvPr id="2" name="Titel 1">
             <a:extLst>
               <a:ext uri="{FF2B5EF4-FFF2-40B4-BE49-F238E27FC236}">
-                <a16:creationId xmlns:a16="http://schemas.microsoft.com/office/drawing/2014/main" id="{D5179183-A790-789E-481F-C03D6C00F0FA}"/>
+                <a16:creationId xmlns:a16="http://schemas.microsoft.com/office/drawing/2014/main" id="{F827557B-6F0D-4D29-DFFF-22F94DB6684B}"/>
               </a:ext>
             </a:extLst>
           </p:cNvPr>
@@ -985,7 +985,7 @@
           <p:cNvPr id="3" name="Inhaltsplatzhalter 2">
             <a:extLst>
               <a:ext uri="{FF2B5EF4-FFF2-40B4-BE49-F238E27FC236}">
-                <a16:creationId xmlns:a16="http://schemas.microsoft.com/office/drawing/2014/main" id="{548AD27D-8D1D-225B-09C4-7E5727996481}"/>
+                <a16:creationId xmlns:a16="http://schemas.microsoft.com/office/drawing/2014/main" id="{419A9894-9580-E4F7-679C-4FDA4F6E36C5}"/>
               </a:ext>
             </a:extLst>
           </p:cNvPr>
@@ -1042,7 +1042,7 @@
           <p:cNvPr id="4" name="Datumsplatzhalter 3">
             <a:extLst>
               <a:ext uri="{FF2B5EF4-FFF2-40B4-BE49-F238E27FC236}">
-                <a16:creationId xmlns:a16="http://schemas.microsoft.com/office/drawing/2014/main" id="{5F1B226D-4B7D-1BCE-4C1D-C1AC0551FE96}"/>
+                <a16:creationId xmlns:a16="http://schemas.microsoft.com/office/drawing/2014/main" id="{3C921EF7-73FC-0E3F-0E93-B4CF7500C396}"/>
               </a:ext>
             </a:extLst>
           </p:cNvPr>
@@ -1058,7 +1058,7 @@
           <a:bodyPr/>
           <a:lstStyle/>
           <a:p>
-            <a:fld id="{F0F1DE7D-D95E-4F7E-ACE0-C2CB09C0038C}" type="datetimeFigureOut">
+            <a:fld id="{BE01F26F-9781-4EC0-A938-D1A87336FB24}" type="datetimeFigureOut">
               <a:rPr lang="de-DE" smtClean="0"/>
               <a:t>08.10.2026</a:t>
             </a:fld>
@@ -1071,7 +1071,7 @@
           <p:cNvPr id="5" name="Fußzeilenplatzhalter 4">
             <a:extLst>
               <a:ext uri="{FF2B5EF4-FFF2-40B4-BE49-F238E27FC236}">
-                <a16:creationId xmlns:a16="http://schemas.microsoft.com/office/drawing/2014/main" id="{CBF9A338-AC33-9016-6423-25DA90682BA1}"/>
+                <a16:creationId xmlns:a16="http://schemas.microsoft.com/office/drawing/2014/main" id="{B6ED5564-32CD-A085-BC40-4E7FE8C06BF9}"/>
               </a:ext>
             </a:extLst>
           </p:cNvPr>
@@ -1096,7 +1096,7 @@
           <p:cNvPr id="6" name="Foliennummernplatzhalter 5">
             <a:extLst>
               <a:ext uri="{FF2B5EF4-FFF2-40B4-BE49-F238E27FC236}">
-                <a16:creationId xmlns:a16="http://schemas.microsoft.com/office/drawing/2014/main" id="{50CDCD68-8C34-0876-2F30-DDD2485D4041}"/>
+                <a16:creationId xmlns:a16="http://schemas.microsoft.com/office/drawing/2014/main" id="{5B974EF2-760A-857A-F916-2603952F4FF7}"/>
               </a:ext>
             </a:extLst>
           </p:cNvPr>
@@ -1112,7 +1112,7 @@
           <a:bodyPr/>
           <a:lstStyle/>
           <a:p>
-            <a:fld id="{C36885A8-8839-4915-B7F5-BD5B8285522A}" type="slidenum">
+            <a:fld id="{6B9B57F8-08A7-4B0D-A141-8D0AAF84B932}" type="slidenum">
               <a:rPr lang="de-DE" smtClean="0"/>
               <a:t>‹Nr.›</a:t>
             </a:fld>
@@ -1123,7 +1123,7 @@
     </p:spTree>
     <p:extLst>
       <p:ext uri="{BB962C8B-B14F-4D97-AF65-F5344CB8AC3E}">
-        <p14:creationId xmlns:p14="http://schemas.microsoft.com/office/powerpoint/2010/main" val="3803672267"/>
+        <p14:creationId xmlns:p14="http://schemas.microsoft.com/office/powerpoint/2010/main" val="3900241622"/>
       </p:ext>
     </p:extLst>
   </p:cSld>
@@ -1155,7 +1155,7 @@
           <p:cNvPr id="2" name="Titel 1">
             <a:extLst>
               <a:ext uri="{FF2B5EF4-FFF2-40B4-BE49-F238E27FC236}">
-                <a16:creationId xmlns:a16="http://schemas.microsoft.com/office/drawing/2014/main" id="{F1D2FD8F-E1F8-9662-E20F-A4DD3BE78BBD}"/>
+                <a16:creationId xmlns:a16="http://schemas.microsoft.com/office/drawing/2014/main" id="{62F85B71-3D16-F11D-214F-50760A2CF9A8}"/>
               </a:ext>
             </a:extLst>
           </p:cNvPr>
@@ -1192,7 +1192,7 @@
           <p:cNvPr id="3" name="Textplatzhalter 2">
             <a:extLst>
               <a:ext uri="{FF2B5EF4-FFF2-40B4-BE49-F238E27FC236}">
-                <a16:creationId xmlns:a16="http://schemas.microsoft.com/office/drawing/2014/main" id="{1EE7B3B2-BA6D-DBEC-3BCC-E6DC3A798B04}"/>
+                <a16:creationId xmlns:a16="http://schemas.microsoft.com/office/drawing/2014/main" id="{D40A0359-36E2-07F4-1B83-5E2C3FB3993C}"/>
               </a:ext>
             </a:extLst>
           </p:cNvPr>
@@ -1317,7 +1317,7 @@
           <p:cNvPr id="4" name="Datumsplatzhalter 3">
             <a:extLst>
               <a:ext uri="{FF2B5EF4-FFF2-40B4-BE49-F238E27FC236}">
-                <a16:creationId xmlns:a16="http://schemas.microsoft.com/office/drawing/2014/main" id="{ED808A19-0A26-6CDE-910F-97EB19502033}"/>
+                <a16:creationId xmlns:a16="http://schemas.microsoft.com/office/drawing/2014/main" id="{A4DF6F82-C225-30AC-C496-0939453844DC}"/>
               </a:ext>
             </a:extLst>
           </p:cNvPr>
@@ -1333,7 +1333,7 @@
           <a:bodyPr/>
           <a:lstStyle/>
           <a:p>
-            <a:fld id="{F0F1DE7D-D95E-4F7E-ACE0-C2CB09C0038C}" type="datetimeFigureOut">
+            <a:fld id="{BE01F26F-9781-4EC0-A938-D1A87336FB24}" type="datetimeFigureOut">
               <a:rPr lang="de-DE" smtClean="0"/>
               <a:t>08.10.2026</a:t>
             </a:fld>
@@ -1346,7 +1346,7 @@
           <p:cNvPr id="5" name="Fußzeilenplatzhalter 4">
             <a:extLst>
               <a:ext uri="{FF2B5EF4-FFF2-40B4-BE49-F238E27FC236}">
-                <a16:creationId xmlns:a16="http://schemas.microsoft.com/office/drawing/2014/main" id="{84710A30-1BF8-A4DE-C168-F3187D3F03B8}"/>
+                <a16:creationId xmlns:a16="http://schemas.microsoft.com/office/drawing/2014/main" id="{7351D991-EEA0-756E-24EB-4AE9D498AD95}"/>
               </a:ext>
             </a:extLst>
           </p:cNvPr>
@@ -1371,7 +1371,7 @@
           <p:cNvPr id="6" name="Foliennummernplatzhalter 5">
             <a:extLst>
               <a:ext uri="{FF2B5EF4-FFF2-40B4-BE49-F238E27FC236}">
-                <a16:creationId xmlns:a16="http://schemas.microsoft.com/office/drawing/2014/main" id="{22CDA0D2-84D8-419C-DC89-B7B3670DE1BC}"/>
+                <a16:creationId xmlns:a16="http://schemas.microsoft.com/office/drawing/2014/main" id="{C4D7E02D-1993-FF6E-DA42-90FC133E51FA}"/>
               </a:ext>
             </a:extLst>
           </p:cNvPr>
@@ -1387,7 +1387,7 @@
           <a:bodyPr/>
           <a:lstStyle/>
           <a:p>
-            <a:fld id="{C36885A8-8839-4915-B7F5-BD5B8285522A}" type="slidenum">
+            <a:fld id="{6B9B57F8-08A7-4B0D-A141-8D0AAF84B932}" type="slidenum">
               <a:rPr lang="de-DE" smtClean="0"/>
               <a:t>‹Nr.›</a:t>
             </a:fld>
@@ -1398,7 +1398,7 @@
     </p:spTree>
     <p:extLst>
       <p:ext uri="{BB962C8B-B14F-4D97-AF65-F5344CB8AC3E}">
-        <p14:creationId xmlns:p14="http://schemas.microsoft.com/office/powerpoint/2010/main" val="1400339475"/>
+        <p14:creationId xmlns:p14="http://schemas.microsoft.com/office/powerpoint/2010/main" val="4009982275"/>
       </p:ext>
     </p:extLst>
   </p:cSld>
@@ -1430,7 +1430,7 @@
           <p:cNvPr id="2" name="Titel 1">
             <a:extLst>
               <a:ext uri="{FF2B5EF4-FFF2-40B4-BE49-F238E27FC236}">
-                <a16:creationId xmlns:a16="http://schemas.microsoft.com/office/drawing/2014/main" id="{47A9F657-828C-8DAF-FC82-736C167B2B32}"/>
+                <a16:creationId xmlns:a16="http://schemas.microsoft.com/office/drawing/2014/main" id="{43369312-C313-F4FF-E62A-AA2A70961E2B}"/>
               </a:ext>
             </a:extLst>
           </p:cNvPr>
@@ -1458,7 +1458,7 @@
           <p:cNvPr id="3" name="Inhaltsplatzhalter 2">
             <a:extLst>
               <a:ext uri="{FF2B5EF4-FFF2-40B4-BE49-F238E27FC236}">
-                <a16:creationId xmlns:a16="http://schemas.microsoft.com/office/drawing/2014/main" id="{544DBD54-EF4C-0A34-6A2C-165D27065A67}"/>
+                <a16:creationId xmlns:a16="http://schemas.microsoft.com/office/drawing/2014/main" id="{6BA1BD6D-41FE-E824-7FF7-80F926253E32}"/>
               </a:ext>
             </a:extLst>
           </p:cNvPr>
@@ -1520,7 +1520,7 @@
           <p:cNvPr id="4" name="Inhaltsplatzhalter 3">
             <a:extLst>
               <a:ext uri="{FF2B5EF4-FFF2-40B4-BE49-F238E27FC236}">
-                <a16:creationId xmlns:a16="http://schemas.microsoft.com/office/drawing/2014/main" id="{A39A2205-D9E4-5BCB-8117-C16419E098B9}"/>
+                <a16:creationId xmlns:a16="http://schemas.microsoft.com/office/drawing/2014/main" id="{4BD4A4F9-5D1F-BC75-FDCB-228885EEE33A}"/>
               </a:ext>
             </a:extLst>
           </p:cNvPr>
@@ -1582,7 +1582,7 @@
           <p:cNvPr id="5" name="Datumsplatzhalter 4">
             <a:extLst>
               <a:ext uri="{FF2B5EF4-FFF2-40B4-BE49-F238E27FC236}">
-                <a16:creationId xmlns:a16="http://schemas.microsoft.com/office/drawing/2014/main" id="{6085FD6C-B0C9-2327-96E0-946DD146C805}"/>
+                <a16:creationId xmlns:a16="http://schemas.microsoft.com/office/drawing/2014/main" id="{85D7354D-E2FB-A2C9-2330-967491381C4E}"/>
               </a:ext>
             </a:extLst>
           </p:cNvPr>
@@ -1598,7 +1598,7 @@
           <a:bodyPr/>
           <a:lstStyle/>
           <a:p>
-            <a:fld id="{F0F1DE7D-D95E-4F7E-ACE0-C2CB09C0038C}" type="datetimeFigureOut">
+            <a:fld id="{BE01F26F-9781-4EC0-A938-D1A87336FB24}" type="datetimeFigureOut">
               <a:rPr lang="de-DE" smtClean="0"/>
               <a:t>08.10.2026</a:t>
             </a:fld>
@@ -1611,7 +1611,7 @@
           <p:cNvPr id="6" name="Fußzeilenplatzhalter 5">
             <a:extLst>
               <a:ext uri="{FF2B5EF4-FFF2-40B4-BE49-F238E27FC236}">
-                <a16:creationId xmlns:a16="http://schemas.microsoft.com/office/drawing/2014/main" id="{C84A82EF-F71F-ADA9-9034-1C192E295490}"/>
+                <a16:creationId xmlns:a16="http://schemas.microsoft.com/office/drawing/2014/main" id="{D77FB966-F8F9-8FFA-4590-B999AD5FFFFC}"/>
               </a:ext>
             </a:extLst>
           </p:cNvPr>
@@ -1636,7 +1636,7 @@
           <p:cNvPr id="7" name="Foliennummernplatzhalter 6">
             <a:extLst>
               <a:ext uri="{FF2B5EF4-FFF2-40B4-BE49-F238E27FC236}">
-                <a16:creationId xmlns:a16="http://schemas.microsoft.com/office/drawing/2014/main" id="{931AC9DE-A92F-9CCE-87E1-3DFA9EEF3791}"/>
+                <a16:creationId xmlns:a16="http://schemas.microsoft.com/office/drawing/2014/main" id="{C6E5371D-4583-2AC6-ADD1-C36DEF807AC3}"/>
               </a:ext>
             </a:extLst>
           </p:cNvPr>
@@ -1652,7 +1652,7 @@
           <a:bodyPr/>
           <a:lstStyle/>
           <a:p>
-            <a:fld id="{C36885A8-8839-4915-B7F5-BD5B8285522A}" type="slidenum">
+            <a:fld id="{6B9B57F8-08A7-4B0D-A141-8D0AAF84B932}" type="slidenum">
               <a:rPr lang="de-DE" smtClean="0"/>
               <a:t>‹Nr.›</a:t>
             </a:fld>
@@ -1663,7 +1663,7 @@
     </p:spTree>
     <p:extLst>
       <p:ext uri="{BB962C8B-B14F-4D97-AF65-F5344CB8AC3E}">
-        <p14:creationId xmlns:p14="http://schemas.microsoft.com/office/powerpoint/2010/main" val="1798963448"/>
+        <p14:creationId xmlns:p14="http://schemas.microsoft.com/office/powerpoint/2010/main" val="1465662414"/>
       </p:ext>
     </p:extLst>
   </p:cSld>
@@ -1695,7 +1695,7 @@
           <p:cNvPr id="2" name="Titel 1">
             <a:extLst>
               <a:ext uri="{FF2B5EF4-FFF2-40B4-BE49-F238E27FC236}">
-                <a16:creationId xmlns:a16="http://schemas.microsoft.com/office/drawing/2014/main" id="{E72BDE0E-125F-DAAC-A676-13026D12DDFE}"/>
+                <a16:creationId xmlns:a16="http://schemas.microsoft.com/office/drawing/2014/main" id="{B9923A8C-FF39-B0C1-DD04-9222464EF51F}"/>
               </a:ext>
             </a:extLst>
           </p:cNvPr>
@@ -1728,7 +1728,7 @@
           <p:cNvPr id="3" name="Textplatzhalter 2">
             <a:extLst>
               <a:ext uri="{FF2B5EF4-FFF2-40B4-BE49-F238E27FC236}">
-                <a16:creationId xmlns:a16="http://schemas.microsoft.com/office/drawing/2014/main" id="{31A6CD19-B739-1EE9-E6C5-983EFBD5C3D7}"/>
+                <a16:creationId xmlns:a16="http://schemas.microsoft.com/office/drawing/2014/main" id="{E7C4099D-8437-2366-B3EE-45B9EE90C1C8}"/>
               </a:ext>
             </a:extLst>
           </p:cNvPr>
@@ -1799,7 +1799,7 @@
           <p:cNvPr id="4" name="Inhaltsplatzhalter 3">
             <a:extLst>
               <a:ext uri="{FF2B5EF4-FFF2-40B4-BE49-F238E27FC236}">
-                <a16:creationId xmlns:a16="http://schemas.microsoft.com/office/drawing/2014/main" id="{0E6649AF-17B0-C47B-DCD8-2ABB4758F900}"/>
+                <a16:creationId xmlns:a16="http://schemas.microsoft.com/office/drawing/2014/main" id="{BDB8C4D6-B075-F5D2-89DA-83B172CC5375}"/>
               </a:ext>
             </a:extLst>
           </p:cNvPr>
@@ -1861,7 +1861,7 @@
           <p:cNvPr id="5" name="Textplatzhalter 4">
             <a:extLst>
               <a:ext uri="{FF2B5EF4-FFF2-40B4-BE49-F238E27FC236}">
-                <a16:creationId xmlns:a16="http://schemas.microsoft.com/office/drawing/2014/main" id="{0D738F1D-A88C-3083-027D-D2A488F04EBD}"/>
+                <a16:creationId xmlns:a16="http://schemas.microsoft.com/office/drawing/2014/main" id="{C2136657-7E3A-2B0D-B5D8-17BB41CCDF29}"/>
               </a:ext>
             </a:extLst>
           </p:cNvPr>
@@ -1932,7 +1932,7 @@
           <p:cNvPr id="6" name="Inhaltsplatzhalter 5">
             <a:extLst>
               <a:ext uri="{FF2B5EF4-FFF2-40B4-BE49-F238E27FC236}">
-                <a16:creationId xmlns:a16="http://schemas.microsoft.com/office/drawing/2014/main" id="{BA8880AE-1B49-5419-7CFF-83C68C6CB367}"/>
+                <a16:creationId xmlns:a16="http://schemas.microsoft.com/office/drawing/2014/main" id="{200F5B3B-6D43-BB6E-DC39-8E90A0220CD7}"/>
               </a:ext>
             </a:extLst>
           </p:cNvPr>
@@ -1994,7 +1994,7 @@
           <p:cNvPr id="7" name="Datumsplatzhalter 6">
             <a:extLst>
               <a:ext uri="{FF2B5EF4-FFF2-40B4-BE49-F238E27FC236}">
-                <a16:creationId xmlns:a16="http://schemas.microsoft.com/office/drawing/2014/main" id="{1BB76072-452E-837B-659E-33378E3286B8}"/>
+                <a16:creationId xmlns:a16="http://schemas.microsoft.com/office/drawing/2014/main" id="{F483F06D-99E5-A629-B96E-C98BC4441DCF}"/>
               </a:ext>
             </a:extLst>
           </p:cNvPr>
@@ -2010,7 +2010,7 @@
           <a:bodyPr/>
           <a:lstStyle/>
           <a:p>
-            <a:fld id="{F0F1DE7D-D95E-4F7E-ACE0-C2CB09C0038C}" type="datetimeFigureOut">
+            <a:fld id="{BE01F26F-9781-4EC0-A938-D1A87336FB24}" type="datetimeFigureOut">
               <a:rPr lang="de-DE" smtClean="0"/>
               <a:t>08.10.2026</a:t>
             </a:fld>
@@ -2023,7 +2023,7 @@
           <p:cNvPr id="8" name="Fußzeilenplatzhalter 7">
             <a:extLst>
               <a:ext uri="{FF2B5EF4-FFF2-40B4-BE49-F238E27FC236}">
-                <a16:creationId xmlns:a16="http://schemas.microsoft.com/office/drawing/2014/main" id="{7EA62B5E-6D12-FBA0-B392-45042ABF556E}"/>
+                <a16:creationId xmlns:a16="http://schemas.microsoft.com/office/drawing/2014/main" id="{1CCBAF0A-3662-E559-FBC2-2EB61B8EA716}"/>
               </a:ext>
             </a:extLst>
           </p:cNvPr>
@@ -2048,7 +2048,7 @@
           <p:cNvPr id="9" name="Foliennummernplatzhalter 8">
             <a:extLst>
               <a:ext uri="{FF2B5EF4-FFF2-40B4-BE49-F238E27FC236}">
-                <a16:creationId xmlns:a16="http://schemas.microsoft.com/office/drawing/2014/main" id="{4D533422-D95D-0B31-0157-B489A58216BC}"/>
+                <a16:creationId xmlns:a16="http://schemas.microsoft.com/office/drawing/2014/main" id="{AF3E32A1-39C0-9E0D-938C-C6CD8F117A99}"/>
               </a:ext>
             </a:extLst>
           </p:cNvPr>
@@ -2064,7 +2064,7 @@
           <a:bodyPr/>
           <a:lstStyle/>
           <a:p>
-            <a:fld id="{C36885A8-8839-4915-B7F5-BD5B8285522A}" type="slidenum">
+            <a:fld id="{6B9B57F8-08A7-4B0D-A141-8D0AAF84B932}" type="slidenum">
               <a:rPr lang="de-DE" smtClean="0"/>
               <a:t>‹Nr.›</a:t>
             </a:fld>
@@ -2075,7 +2075,7 @@
     </p:spTree>
     <p:extLst>
       <p:ext uri="{BB962C8B-B14F-4D97-AF65-F5344CB8AC3E}">
-        <p14:creationId xmlns:p14="http://schemas.microsoft.com/office/powerpoint/2010/main" val="690836749"/>
+        <p14:creationId xmlns:p14="http://schemas.microsoft.com/office/powerpoint/2010/main" val="1779667204"/>
       </p:ext>
     </p:extLst>
   </p:cSld>
@@ -2107,7 +2107,7 @@
           <p:cNvPr id="2" name="Titel 1">
             <a:extLst>
               <a:ext uri="{FF2B5EF4-FFF2-40B4-BE49-F238E27FC236}">
-                <a16:creationId xmlns:a16="http://schemas.microsoft.com/office/drawing/2014/main" id="{F20D7C72-F8AD-8023-91A2-71B2E0D0A749}"/>
+                <a16:creationId xmlns:a16="http://schemas.microsoft.com/office/drawing/2014/main" id="{E6C107FA-B726-C074-0F7B-B8DE3AF65FAB}"/>
               </a:ext>
             </a:extLst>
           </p:cNvPr>
@@ -2135,7 +2135,7 @@
           <p:cNvPr id="3" name="Datumsplatzhalter 2">
             <a:extLst>
               <a:ext uri="{FF2B5EF4-FFF2-40B4-BE49-F238E27FC236}">
-                <a16:creationId xmlns:a16="http://schemas.microsoft.com/office/drawing/2014/main" id="{9AE67795-86DF-77CC-A264-DF7EFE685EB1}"/>
+                <a16:creationId xmlns:a16="http://schemas.microsoft.com/office/drawing/2014/main" id="{49A232B9-0AFF-03A5-3358-646BC56FAFB3}"/>
               </a:ext>
             </a:extLst>
           </p:cNvPr>
@@ -2151,7 +2151,7 @@
           <a:bodyPr/>
           <a:lstStyle/>
           <a:p>
-            <a:fld id="{F0F1DE7D-D95E-4F7E-ACE0-C2CB09C0038C}" type="datetimeFigureOut">
+            <a:fld id="{BE01F26F-9781-4EC0-A938-D1A87336FB24}" type="datetimeFigureOut">
               <a:rPr lang="de-DE" smtClean="0"/>
               <a:t>08.10.2026</a:t>
             </a:fld>
@@ -2164,7 +2164,7 @@
           <p:cNvPr id="4" name="Fußzeilenplatzhalter 3">
             <a:extLst>
               <a:ext uri="{FF2B5EF4-FFF2-40B4-BE49-F238E27FC236}">
-                <a16:creationId xmlns:a16="http://schemas.microsoft.com/office/drawing/2014/main" id="{0517AA53-690C-B0E3-18C7-C8BA2347084F}"/>
+                <a16:creationId xmlns:a16="http://schemas.microsoft.com/office/drawing/2014/main" id="{AF7A184F-8E5B-0C34-5D3D-A6FB31F317E4}"/>
               </a:ext>
             </a:extLst>
           </p:cNvPr>
@@ -2189,7 +2189,7 @@
           <p:cNvPr id="5" name="Foliennummernplatzhalter 4">
             <a:extLst>
               <a:ext uri="{FF2B5EF4-FFF2-40B4-BE49-F238E27FC236}">
-                <a16:creationId xmlns:a16="http://schemas.microsoft.com/office/drawing/2014/main" id="{A61E1D11-3624-F87C-ADC0-56B549F63CC2}"/>
+                <a16:creationId xmlns:a16="http://schemas.microsoft.com/office/drawing/2014/main" id="{CEEABC2D-515B-245D-045E-FCF2D3637837}"/>
               </a:ext>
             </a:extLst>
           </p:cNvPr>
@@ -2205,7 +2205,7 @@
           <a:bodyPr/>
           <a:lstStyle/>
           <a:p>
-            <a:fld id="{C36885A8-8839-4915-B7F5-BD5B8285522A}" type="slidenum">
+            <a:fld id="{6B9B57F8-08A7-4B0D-A141-8D0AAF84B932}" type="slidenum">
               <a:rPr lang="de-DE" smtClean="0"/>
               <a:t>‹Nr.›</a:t>
             </a:fld>
@@ -2216,7 +2216,7 @@
     </p:spTree>
     <p:extLst>
       <p:ext uri="{BB962C8B-B14F-4D97-AF65-F5344CB8AC3E}">
-        <p14:creationId xmlns:p14="http://schemas.microsoft.com/office/powerpoint/2010/main" val="1633281488"/>
+        <p14:creationId xmlns:p14="http://schemas.microsoft.com/office/powerpoint/2010/main" val="2667800572"/>
       </p:ext>
     </p:extLst>
   </p:cSld>
@@ -2248,7 +2248,7 @@
           <p:cNvPr id="2" name="Datumsplatzhalter 1">
             <a:extLst>
               <a:ext uri="{FF2B5EF4-FFF2-40B4-BE49-F238E27FC236}">
-                <a16:creationId xmlns:a16="http://schemas.microsoft.com/office/drawing/2014/main" id="{4EBC2CC6-118F-C365-C53D-130286356F0E}"/>
+                <a16:creationId xmlns:a16="http://schemas.microsoft.com/office/drawing/2014/main" id="{D981177C-2F2B-E7DA-A154-201B1C62872B}"/>
               </a:ext>
             </a:extLst>
           </p:cNvPr>
@@ -2264,7 +2264,7 @@
           <a:bodyPr/>
           <a:lstStyle/>
           <a:p>
-            <a:fld id="{F0F1DE7D-D95E-4F7E-ACE0-C2CB09C0038C}" type="datetimeFigureOut">
+            <a:fld id="{BE01F26F-9781-4EC0-A938-D1A87336FB24}" type="datetimeFigureOut">
               <a:rPr lang="de-DE" smtClean="0"/>
               <a:t>08.10.2026</a:t>
             </a:fld>
@@ -2277,7 +2277,7 @@
           <p:cNvPr id="3" name="Fußzeilenplatzhalter 2">
             <a:extLst>
               <a:ext uri="{FF2B5EF4-FFF2-40B4-BE49-F238E27FC236}">
-                <a16:creationId xmlns:a16="http://schemas.microsoft.com/office/drawing/2014/main" id="{F5B5477F-6F31-C0E0-EBCA-605265ADA77E}"/>
+                <a16:creationId xmlns:a16="http://schemas.microsoft.com/office/drawing/2014/main" id="{5C2EEF3E-2455-2495-382E-7CD710D759A1}"/>
               </a:ext>
             </a:extLst>
           </p:cNvPr>
@@ -2302,7 +2302,7 @@
           <p:cNvPr id="4" name="Foliennummernplatzhalter 3">
             <a:extLst>
               <a:ext uri="{FF2B5EF4-FFF2-40B4-BE49-F238E27FC236}">
-                <a16:creationId xmlns:a16="http://schemas.microsoft.com/office/drawing/2014/main" id="{1767291F-6D82-7AD1-A71D-07C3100D5FC5}"/>
+                <a16:creationId xmlns:a16="http://schemas.microsoft.com/office/drawing/2014/main" id="{0195F442-78E6-FBF5-A9E6-E06ABE0EF988}"/>
               </a:ext>
             </a:extLst>
           </p:cNvPr>
@@ -2318,7 +2318,7 @@
           <a:bodyPr/>
           <a:lstStyle/>
           <a:p>
-            <a:fld id="{C36885A8-8839-4915-B7F5-BD5B8285522A}" type="slidenum">
+            <a:fld id="{6B9B57F8-08A7-4B0D-A141-8D0AAF84B932}" type="slidenum">
               <a:rPr lang="de-DE" smtClean="0"/>
               <a:t>‹Nr.›</a:t>
             </a:fld>
@@ -2329,7 +2329,7 @@
     </p:spTree>
     <p:extLst>
       <p:ext uri="{BB962C8B-B14F-4D97-AF65-F5344CB8AC3E}">
-        <p14:creationId xmlns:p14="http://schemas.microsoft.com/office/powerpoint/2010/main" val="4107711410"/>
+        <p14:creationId xmlns:p14="http://schemas.microsoft.com/office/powerpoint/2010/main" val="3073414845"/>
       </p:ext>
     </p:extLst>
   </p:cSld>
@@ -2361,7 +2361,7 @@
           <p:cNvPr id="2" name="Titel 1">
             <a:extLst>
               <a:ext uri="{FF2B5EF4-FFF2-40B4-BE49-F238E27FC236}">
-                <a16:creationId xmlns:a16="http://schemas.microsoft.com/office/drawing/2014/main" id="{B17651CE-D8A3-AA8F-1EE8-B65CA5987260}"/>
+                <a16:creationId xmlns:a16="http://schemas.microsoft.com/office/drawing/2014/main" id="{9DB97791-3096-EC64-8E96-AE3869DD3FDA}"/>
               </a:ext>
             </a:extLst>
           </p:cNvPr>
@@ -2398,7 +2398,7 @@
           <p:cNvPr id="3" name="Inhaltsplatzhalter 2">
             <a:extLst>
               <a:ext uri="{FF2B5EF4-FFF2-40B4-BE49-F238E27FC236}">
-                <a16:creationId xmlns:a16="http://schemas.microsoft.com/office/drawing/2014/main" id="{169973BF-90FD-0D24-1476-33239E3E7967}"/>
+                <a16:creationId xmlns:a16="http://schemas.microsoft.com/office/drawing/2014/main" id="{767ED40B-4683-647E-B8F0-8877B98673EF}"/>
               </a:ext>
             </a:extLst>
           </p:cNvPr>
@@ -2488,7 +2488,7 @@
           <p:cNvPr id="4" name="Textplatzhalter 3">
             <a:extLst>
               <a:ext uri="{FF2B5EF4-FFF2-40B4-BE49-F238E27FC236}">
-                <a16:creationId xmlns:a16="http://schemas.microsoft.com/office/drawing/2014/main" id="{526334F7-9D7B-33F2-ECD0-4B8FA5A2E21C}"/>
+                <a16:creationId xmlns:a16="http://schemas.microsoft.com/office/drawing/2014/main" id="{3A9B66B5-D199-F684-C35D-BDBE3F001312}"/>
               </a:ext>
             </a:extLst>
           </p:cNvPr>
@@ -2559,7 +2559,7 @@
           <p:cNvPr id="5" name="Datumsplatzhalter 4">
             <a:extLst>
               <a:ext uri="{FF2B5EF4-FFF2-40B4-BE49-F238E27FC236}">
-                <a16:creationId xmlns:a16="http://schemas.microsoft.com/office/drawing/2014/main" id="{97B4E932-5540-2BF5-7556-19D427E6AED1}"/>
+                <a16:creationId xmlns:a16="http://schemas.microsoft.com/office/drawing/2014/main" id="{DFA27202-15D3-52F8-D13B-F5847720B804}"/>
               </a:ext>
             </a:extLst>
           </p:cNvPr>
@@ -2575,7 +2575,7 @@
           <a:bodyPr/>
           <a:lstStyle/>
           <a:p>
-            <a:fld id="{F0F1DE7D-D95E-4F7E-ACE0-C2CB09C0038C}" type="datetimeFigureOut">
+            <a:fld id="{BE01F26F-9781-4EC0-A938-D1A87336FB24}" type="datetimeFigureOut">
               <a:rPr lang="de-DE" smtClean="0"/>
               <a:t>08.10.2026</a:t>
             </a:fld>
@@ -2588,7 +2588,7 @@
           <p:cNvPr id="6" name="Fußzeilenplatzhalter 5">
             <a:extLst>
               <a:ext uri="{FF2B5EF4-FFF2-40B4-BE49-F238E27FC236}">
-                <a16:creationId xmlns:a16="http://schemas.microsoft.com/office/drawing/2014/main" id="{480CBD2D-7180-765F-DCE5-AAA1ACF3F4CE}"/>
+                <a16:creationId xmlns:a16="http://schemas.microsoft.com/office/drawing/2014/main" id="{E211267B-531C-024B-A8E4-3B04D74D09F2}"/>
               </a:ext>
             </a:extLst>
           </p:cNvPr>
@@ -2613,7 +2613,7 @@
           <p:cNvPr id="7" name="Foliennummernplatzhalter 6">
             <a:extLst>
               <a:ext uri="{FF2B5EF4-FFF2-40B4-BE49-F238E27FC236}">
-                <a16:creationId xmlns:a16="http://schemas.microsoft.com/office/drawing/2014/main" id="{202864A4-DA7D-2426-4E4B-A54EF5B44605}"/>
+                <a16:creationId xmlns:a16="http://schemas.microsoft.com/office/drawing/2014/main" id="{A10B4824-C523-917D-7C04-81521C86F36B}"/>
               </a:ext>
             </a:extLst>
           </p:cNvPr>
@@ -2629,7 +2629,7 @@
           <a:bodyPr/>
           <a:lstStyle/>
           <a:p>
-            <a:fld id="{C36885A8-8839-4915-B7F5-BD5B8285522A}" type="slidenum">
+            <a:fld id="{6B9B57F8-08A7-4B0D-A141-8D0AAF84B932}" type="slidenum">
               <a:rPr lang="de-DE" smtClean="0"/>
               <a:t>‹Nr.›</a:t>
             </a:fld>
@@ -2640,7 +2640,7 @@
     </p:spTree>
     <p:extLst>
       <p:ext uri="{BB962C8B-B14F-4D97-AF65-F5344CB8AC3E}">
-        <p14:creationId xmlns:p14="http://schemas.microsoft.com/office/powerpoint/2010/main" val="3913126035"/>
+        <p14:creationId xmlns:p14="http://schemas.microsoft.com/office/powerpoint/2010/main" val="2521825864"/>
       </p:ext>
     </p:extLst>
   </p:cSld>
@@ -2672,7 +2672,7 @@
           <p:cNvPr id="2" name="Titel 1">
             <a:extLst>
               <a:ext uri="{FF2B5EF4-FFF2-40B4-BE49-F238E27FC236}">
-                <a16:creationId xmlns:a16="http://schemas.microsoft.com/office/drawing/2014/main" id="{F7485506-4A41-FA3A-94C0-70E950F1261D}"/>
+                <a16:creationId xmlns:a16="http://schemas.microsoft.com/office/drawing/2014/main" id="{1173C3F5-AB6F-659A-74D0-581049091E47}"/>
               </a:ext>
             </a:extLst>
           </p:cNvPr>
@@ -2709,7 +2709,7 @@
           <p:cNvPr id="3" name="Bildplatzhalter 2">
             <a:extLst>
               <a:ext uri="{FF2B5EF4-FFF2-40B4-BE49-F238E27FC236}">
-                <a16:creationId xmlns:a16="http://schemas.microsoft.com/office/drawing/2014/main" id="{64328359-2A8B-C023-DF99-AD76E09F0274}"/>
+                <a16:creationId xmlns:a16="http://schemas.microsoft.com/office/drawing/2014/main" id="{D9C40B7A-3A33-D041-C1A3-CBD8A7799774}"/>
               </a:ext>
             </a:extLst>
           </p:cNvPr>
@@ -2776,7 +2776,7 @@
           <p:cNvPr id="4" name="Textplatzhalter 3">
             <a:extLst>
               <a:ext uri="{FF2B5EF4-FFF2-40B4-BE49-F238E27FC236}">
-                <a16:creationId xmlns:a16="http://schemas.microsoft.com/office/drawing/2014/main" id="{9B7C3657-026F-1AF1-34A6-EC0C364A6FAF}"/>
+                <a16:creationId xmlns:a16="http://schemas.microsoft.com/office/drawing/2014/main" id="{35CA7E7B-8A59-50FF-F9E3-9BBDA270848A}"/>
               </a:ext>
             </a:extLst>
           </p:cNvPr>
@@ -2847,7 +2847,7 @@
           <p:cNvPr id="5" name="Datumsplatzhalter 4">
             <a:extLst>
               <a:ext uri="{FF2B5EF4-FFF2-40B4-BE49-F238E27FC236}">
-                <a16:creationId xmlns:a16="http://schemas.microsoft.com/office/drawing/2014/main" id="{6F247D45-63E1-6266-01FD-36B70FFC824B}"/>
+                <a16:creationId xmlns:a16="http://schemas.microsoft.com/office/drawing/2014/main" id="{4DC14A94-701B-EDB8-374F-558D7001A143}"/>
               </a:ext>
             </a:extLst>
           </p:cNvPr>
@@ -2863,7 +2863,7 @@
           <a:bodyPr/>
           <a:lstStyle/>
           <a:p>
-            <a:fld id="{F0F1DE7D-D95E-4F7E-ACE0-C2CB09C0038C}" type="datetimeFigureOut">
+            <a:fld id="{BE01F26F-9781-4EC0-A938-D1A87336FB24}" type="datetimeFigureOut">
               <a:rPr lang="de-DE" smtClean="0"/>
               <a:t>08.10.2026</a:t>
             </a:fld>
@@ -2876,7 +2876,7 @@
           <p:cNvPr id="6" name="Fußzeilenplatzhalter 5">
             <a:extLst>
               <a:ext uri="{FF2B5EF4-FFF2-40B4-BE49-F238E27FC236}">
-                <a16:creationId xmlns:a16="http://schemas.microsoft.com/office/drawing/2014/main" id="{E25B8DB7-B67D-6923-E97D-2CB7D9A01CA7}"/>
+                <a16:creationId xmlns:a16="http://schemas.microsoft.com/office/drawing/2014/main" id="{3BF4078E-6E6E-C30D-5943-02DFECCBED49}"/>
               </a:ext>
             </a:extLst>
           </p:cNvPr>
@@ -2901,7 +2901,7 @@
           <p:cNvPr id="7" name="Foliennummernplatzhalter 6">
             <a:extLst>
               <a:ext uri="{FF2B5EF4-FFF2-40B4-BE49-F238E27FC236}">
-                <a16:creationId xmlns:a16="http://schemas.microsoft.com/office/drawing/2014/main" id="{24775CE2-DADC-1749-1725-32984EA6D335}"/>
+                <a16:creationId xmlns:a16="http://schemas.microsoft.com/office/drawing/2014/main" id="{E8F6A1CF-32D0-8094-8CAB-A4B135E727AD}"/>
               </a:ext>
             </a:extLst>
           </p:cNvPr>
@@ -2917,7 +2917,7 @@
           <a:bodyPr/>
           <a:lstStyle/>
           <a:p>
-            <a:fld id="{C36885A8-8839-4915-B7F5-BD5B8285522A}" type="slidenum">
+            <a:fld id="{6B9B57F8-08A7-4B0D-A141-8D0AAF84B932}" type="slidenum">
               <a:rPr lang="de-DE" smtClean="0"/>
               <a:t>‹Nr.›</a:t>
             </a:fld>
@@ -2928,7 +2928,7 @@
     </p:spTree>
     <p:extLst>
       <p:ext uri="{BB962C8B-B14F-4D97-AF65-F5344CB8AC3E}">
-        <p14:creationId xmlns:p14="http://schemas.microsoft.com/office/powerpoint/2010/main" val="303160657"/>
+        <p14:creationId xmlns:p14="http://schemas.microsoft.com/office/powerpoint/2010/main" val="3217322089"/>
       </p:ext>
     </p:extLst>
   </p:cSld>
@@ -2965,7 +2965,7 @@
           <p:cNvPr id="2" name="Titelplatzhalter 1">
             <a:extLst>
               <a:ext uri="{FF2B5EF4-FFF2-40B4-BE49-F238E27FC236}">
-                <a16:creationId xmlns:a16="http://schemas.microsoft.com/office/drawing/2014/main" id="{5D291F26-678A-E621-B8EA-32678CB2D736}"/>
+                <a16:creationId xmlns:a16="http://schemas.microsoft.com/office/drawing/2014/main" id="{3D00247A-A910-2A97-E408-16B15DF90749}"/>
               </a:ext>
             </a:extLst>
           </p:cNvPr>
@@ -3003,7 +3003,7 @@
           <p:cNvPr id="3" name="Textplatzhalter 2">
             <a:extLst>
               <a:ext uri="{FF2B5EF4-FFF2-40B4-BE49-F238E27FC236}">
-                <a16:creationId xmlns:a16="http://schemas.microsoft.com/office/drawing/2014/main" id="{6C47F5EB-81B9-216E-222B-4AFA581320F3}"/>
+                <a16:creationId xmlns:a16="http://schemas.microsoft.com/office/drawing/2014/main" id="{35A2B2A9-519C-469B-1201-9062009F71FD}"/>
               </a:ext>
             </a:extLst>
           </p:cNvPr>
@@ -3070,7 +3070,7 @@
           <p:cNvPr id="4" name="Datumsplatzhalter 3">
             <a:extLst>
               <a:ext uri="{FF2B5EF4-FFF2-40B4-BE49-F238E27FC236}">
-                <a16:creationId xmlns:a16="http://schemas.microsoft.com/office/drawing/2014/main" id="{BEDD2D25-0B58-98E7-31DD-F304BBD9D2B5}"/>
+                <a16:creationId xmlns:a16="http://schemas.microsoft.com/office/drawing/2014/main" id="{08958FF9-D756-60BC-B66F-86B7A70F2360}"/>
               </a:ext>
             </a:extLst>
           </p:cNvPr>
@@ -3104,7 +3104,7 @@
             </a:lvl1pPr>
           </a:lstStyle>
           <a:p>
-            <a:fld id="{F0F1DE7D-D95E-4F7E-ACE0-C2CB09C0038C}" type="datetimeFigureOut">
+            <a:fld id="{BE01F26F-9781-4EC0-A938-D1A87336FB24}" type="datetimeFigureOut">
               <a:rPr lang="de-DE" smtClean="0"/>
               <a:t>08.10.2026</a:t>
             </a:fld>
@@ -3117,7 +3117,7 @@
           <p:cNvPr id="5" name="Fußzeilenplatzhalter 4">
             <a:extLst>
               <a:ext uri="{FF2B5EF4-FFF2-40B4-BE49-F238E27FC236}">
-                <a16:creationId xmlns:a16="http://schemas.microsoft.com/office/drawing/2014/main" id="{C4EEA028-EC22-E822-3BA1-F421A0CE063F}"/>
+                <a16:creationId xmlns:a16="http://schemas.microsoft.com/office/drawing/2014/main" id="{1A5EA2D3-E833-6629-2687-FCE97F5BEC3D}"/>
               </a:ext>
             </a:extLst>
           </p:cNvPr>
@@ -3160,7 +3160,7 @@
           <p:cNvPr id="6" name="Foliennummernplatzhalter 5">
             <a:extLst>
               <a:ext uri="{FF2B5EF4-FFF2-40B4-BE49-F238E27FC236}">
-                <a16:creationId xmlns:a16="http://schemas.microsoft.com/office/drawing/2014/main" id="{0A74E967-6F37-1AEF-BFE7-84CF2EB948C8}"/>
+                <a16:creationId xmlns:a16="http://schemas.microsoft.com/office/drawing/2014/main" id="{431B7C9E-78EF-F398-B5E1-1875FE4345DB}"/>
               </a:ext>
             </a:extLst>
           </p:cNvPr>
@@ -3194,7 +3194,7 @@
             </a:lvl1pPr>
           </a:lstStyle>
           <a:p>
-            <a:fld id="{C36885A8-8839-4915-B7F5-BD5B8285522A}" type="slidenum">
+            <a:fld id="{6B9B57F8-08A7-4B0D-A141-8D0AAF84B932}" type="slidenum">
               <a:rPr lang="de-DE" smtClean="0"/>
               <a:t>‹Nr.›</a:t>
             </a:fld>
@@ -3205,7 +3205,7 @@
     </p:spTree>
     <p:extLst>
       <p:ext uri="{BB962C8B-B14F-4D97-AF65-F5344CB8AC3E}">
-        <p14:creationId xmlns:p14="http://schemas.microsoft.com/office/powerpoint/2010/main" val="2172578487"/>
+        <p14:creationId xmlns:p14="http://schemas.microsoft.com/office/powerpoint/2010/main" val="3698530596"/>
       </p:ext>
     </p:extLst>
   </p:cSld>
@@ -3529,7 +3529,7 @@
           <p:cNvPr id="2" name="Titel 1">
             <a:extLst>
               <a:ext uri="{FF2B5EF4-FFF2-40B4-BE49-F238E27FC236}">
-                <a16:creationId xmlns:a16="http://schemas.microsoft.com/office/drawing/2014/main" id="{768D5927-0C37-0DDC-247D-4F005976B5DE}"/>
+                <a16:creationId xmlns:a16="http://schemas.microsoft.com/office/drawing/2014/main" id="{ADA23121-800C-7C76-11F7-BE7C81ABB307}"/>
               </a:ext>
             </a:extLst>
           </p:cNvPr>
@@ -3557,7 +3557,7 @@
           <p:cNvPr id="3" name="Untertitel 2">
             <a:extLst>
               <a:ext uri="{FF2B5EF4-FFF2-40B4-BE49-F238E27FC236}">
-                <a16:creationId xmlns:a16="http://schemas.microsoft.com/office/drawing/2014/main" id="{2D84E670-3D0A-F920-7DA7-030C88143E45}"/>
+                <a16:creationId xmlns:a16="http://schemas.microsoft.com/office/drawing/2014/main" id="{16DD6C6D-8D95-EAD8-1208-C2D5FA42F1C9}"/>
               </a:ext>
             </a:extLst>
           </p:cNvPr>
@@ -3584,7 +3584,7 @@
     </p:spTree>
     <p:extLst>
       <p:ext uri="{BB962C8B-B14F-4D97-AF65-F5344CB8AC3E}">
-        <p14:creationId xmlns:p14="http://schemas.microsoft.com/office/powerpoint/2010/main" val="344224745"/>
+        <p14:creationId xmlns:p14="http://schemas.microsoft.com/office/powerpoint/2010/main" val="3758656146"/>
       </p:ext>
     </p:extLst>
   </p:cSld>
@@ -3616,7 +3616,7 @@
           <p:cNvPr id="2" name="Titel 1">
             <a:extLst>
               <a:ext uri="{FF2B5EF4-FFF2-40B4-BE49-F238E27FC236}">
-                <a16:creationId xmlns:a16="http://schemas.microsoft.com/office/drawing/2014/main" id="{99D3A4A9-FE21-936B-CA7F-D59FE3E9F58D}"/>
+                <a16:creationId xmlns:a16="http://schemas.microsoft.com/office/drawing/2014/main" id="{521504AB-8497-72F4-A7B4-FC8A867D7853}"/>
               </a:ext>
             </a:extLst>
           </p:cNvPr>
@@ -3644,7 +3644,7 @@
           <p:cNvPr id="3" name="Textplatzhalter 2">
             <a:extLst>
               <a:ext uri="{FF2B5EF4-FFF2-40B4-BE49-F238E27FC236}">
-                <a16:creationId xmlns:a16="http://schemas.microsoft.com/office/drawing/2014/main" id="{01527D48-FACE-C341-8982-3B62F984F878}"/>
+                <a16:creationId xmlns:a16="http://schemas.microsoft.com/office/drawing/2014/main" id="{A7F7D1E4-9007-74A2-9689-12032B790211}"/>
               </a:ext>
             </a:extLst>
           </p:cNvPr>
@@ -3704,7 +3704,7 @@
     </p:spTree>
     <p:extLst>
       <p:ext uri="{BB962C8B-B14F-4D97-AF65-F5344CB8AC3E}">
-        <p14:creationId xmlns:p14="http://schemas.microsoft.com/office/powerpoint/2010/main" val="1944170990"/>
+        <p14:creationId xmlns:p14="http://schemas.microsoft.com/office/powerpoint/2010/main" val="1201410849"/>
       </p:ext>
     </p:extLst>
   </p:cSld>
@@ -3736,7 +3736,7 @@
           <p:cNvPr id="2" name="Titel 1">
             <a:extLst>
               <a:ext uri="{FF2B5EF4-FFF2-40B4-BE49-F238E27FC236}">
-                <a16:creationId xmlns:a16="http://schemas.microsoft.com/office/drawing/2014/main" id="{77289B82-21D8-D030-E274-CB46E30B2B87}"/>
+                <a16:creationId xmlns:a16="http://schemas.microsoft.com/office/drawing/2014/main" id="{A64E0EA4-7795-B6CC-D4EB-A4CCA33F3B2B}"/>
               </a:ext>
             </a:extLst>
           </p:cNvPr>
@@ -3764,7 +3764,7 @@
           <p:cNvPr id="3" name="Textfeld 2">
             <a:extLst>
               <a:ext uri="{FF2B5EF4-FFF2-40B4-BE49-F238E27FC236}">
-                <a16:creationId xmlns:a16="http://schemas.microsoft.com/office/drawing/2014/main" id="{78306841-93B6-E799-4D85-32FE2BA1A36A}"/>
+                <a16:creationId xmlns:a16="http://schemas.microsoft.com/office/drawing/2014/main" id="{AB2D35FE-FA63-DA3D-3675-FCACF55F7239}"/>
               </a:ext>
             </a:extLst>
           </p:cNvPr>
@@ -3810,7 +3810,7 @@
           <p:cNvPr id="4" name="Textfeld 3">
             <a:extLst>
               <a:ext uri="{FF2B5EF4-FFF2-40B4-BE49-F238E27FC236}">
-                <a16:creationId xmlns:a16="http://schemas.microsoft.com/office/drawing/2014/main" id="{B14FD1F8-E0CF-EDC9-58A7-307028FF2FB5}"/>
+                <a16:creationId xmlns:a16="http://schemas.microsoft.com/office/drawing/2014/main" id="{2EEC63EF-81D4-79CF-4827-30E3F307617A}"/>
               </a:ext>
             </a:extLst>
           </p:cNvPr>
@@ -3856,7 +3856,7 @@
           <p:cNvPr id="5" name="Textfeld 4">
             <a:extLst>
               <a:ext uri="{FF2B5EF4-FFF2-40B4-BE49-F238E27FC236}">
-                <a16:creationId xmlns:a16="http://schemas.microsoft.com/office/drawing/2014/main" id="{58D6BCDE-5995-A75D-4111-311C1D8941C8}"/>
+                <a16:creationId xmlns:a16="http://schemas.microsoft.com/office/drawing/2014/main" id="{89727E94-DBD3-5B72-2BCE-BD19AAB20CCD}"/>
               </a:ext>
             </a:extLst>
           </p:cNvPr>
@@ -3902,7 +3902,7 @@
           <p:cNvPr id="6" name="Textfeld 5">
             <a:extLst>
               <a:ext uri="{FF2B5EF4-FFF2-40B4-BE49-F238E27FC236}">
-                <a16:creationId xmlns:a16="http://schemas.microsoft.com/office/drawing/2014/main" id="{4F4D8E3B-7A3F-7BDA-C9A8-718D3C076B64}"/>
+                <a16:creationId xmlns:a16="http://schemas.microsoft.com/office/drawing/2014/main" id="{A2CB409C-0C10-50B9-03B3-C97B87A4AC92}"/>
               </a:ext>
             </a:extLst>
           </p:cNvPr>
@@ -3948,7 +3948,7 @@
           <p:cNvPr id="7" name="Textfeld 6">
             <a:extLst>
               <a:ext uri="{FF2B5EF4-FFF2-40B4-BE49-F238E27FC236}">
-                <a16:creationId xmlns:a16="http://schemas.microsoft.com/office/drawing/2014/main" id="{358FFF73-C6E8-1129-F098-8B64F9272150}"/>
+                <a16:creationId xmlns:a16="http://schemas.microsoft.com/office/drawing/2014/main" id="{8BE20E48-6DF7-CBF9-F702-2FBFD0C88D27}"/>
               </a:ext>
             </a:extLst>
           </p:cNvPr>
@@ -3994,7 +3994,7 @@
           <p:cNvPr id="8" name="Textfeld 7">
             <a:extLst>
               <a:ext uri="{FF2B5EF4-FFF2-40B4-BE49-F238E27FC236}">
-                <a16:creationId xmlns:a16="http://schemas.microsoft.com/office/drawing/2014/main" id="{2CEFCE16-7EBD-70E2-6C85-220D18758EF3}"/>
+                <a16:creationId xmlns:a16="http://schemas.microsoft.com/office/drawing/2014/main" id="{2C6E89B6-9846-317F-4402-3C213E88A8F2}"/>
               </a:ext>
             </a:extLst>
           </p:cNvPr>
@@ -4038,7 +4038,7 @@
     </p:spTree>
     <p:extLst>
       <p:ext uri="{BB962C8B-B14F-4D97-AF65-F5344CB8AC3E}">
-        <p14:creationId xmlns:p14="http://schemas.microsoft.com/office/powerpoint/2010/main" val="1079172150"/>
+        <p14:creationId xmlns:p14="http://schemas.microsoft.com/office/powerpoint/2010/main" val="457573650"/>
       </p:ext>
     </p:extLst>
   </p:cSld>
@@ -4070,7 +4070,7 @@
           <p:cNvPr id="2" name="Titel 1">
             <a:extLst>
               <a:ext uri="{FF2B5EF4-FFF2-40B4-BE49-F238E27FC236}">
-                <a16:creationId xmlns:a16="http://schemas.microsoft.com/office/drawing/2014/main" id="{2010E31E-796D-0D26-4E74-7534BCADC386}"/>
+                <a16:creationId xmlns:a16="http://schemas.microsoft.com/office/drawing/2014/main" id="{9B76DBAF-A610-62A5-A492-04C6A0CA77D3}"/>
               </a:ext>
             </a:extLst>
           </p:cNvPr>
@@ -4098,7 +4098,7 @@
           <p:cNvPr id="3" name="Rechteck 2">
             <a:extLst>
               <a:ext uri="{FF2B5EF4-FFF2-40B4-BE49-F238E27FC236}">
-                <a16:creationId xmlns:a16="http://schemas.microsoft.com/office/drawing/2014/main" id="{6524043D-FFF6-742E-032E-032F5CF0C168}"/>
+                <a16:creationId xmlns:a16="http://schemas.microsoft.com/office/drawing/2014/main" id="{C059A95E-19E1-2317-594A-0CC96F5A4B0C}"/>
               </a:ext>
             </a:extLst>
           </p:cNvPr>
@@ -4147,7 +4147,7 @@
           <p:cNvPr id="4" name="Rechteck 3">
             <a:extLst>
               <a:ext uri="{FF2B5EF4-FFF2-40B4-BE49-F238E27FC236}">
-                <a16:creationId xmlns:a16="http://schemas.microsoft.com/office/drawing/2014/main" id="{828404CD-76CB-5AF9-BB78-C51BA5395347}"/>
+                <a16:creationId xmlns:a16="http://schemas.microsoft.com/office/drawing/2014/main" id="{62B88974-CC73-C2CC-15A5-B36E7EEE1158}"/>
               </a:ext>
             </a:extLst>
           </p:cNvPr>
@@ -4196,7 +4196,7 @@
           <p:cNvPr id="5" name="Rechteck 4">
             <a:extLst>
               <a:ext uri="{FF2B5EF4-FFF2-40B4-BE49-F238E27FC236}">
-                <a16:creationId xmlns:a16="http://schemas.microsoft.com/office/drawing/2014/main" id="{02A41131-08E7-91E5-2409-EC77935315DC}"/>
+                <a16:creationId xmlns:a16="http://schemas.microsoft.com/office/drawing/2014/main" id="{F9D8B291-2501-517D-45C6-40B46913DF5D}"/>
               </a:ext>
             </a:extLst>
           </p:cNvPr>
@@ -4245,7 +4245,7 @@
           <p:cNvPr id="6" name="Rechteck 5">
             <a:extLst>
               <a:ext uri="{FF2B5EF4-FFF2-40B4-BE49-F238E27FC236}">
-                <a16:creationId xmlns:a16="http://schemas.microsoft.com/office/drawing/2014/main" id="{F777D43B-2576-125A-8D24-F36707991688}"/>
+                <a16:creationId xmlns:a16="http://schemas.microsoft.com/office/drawing/2014/main" id="{DFDBE3A3-CD9D-F67C-2932-37F52C50B97C}"/>
               </a:ext>
             </a:extLst>
           </p:cNvPr>
@@ -4295,7 +4295,7 @@
           <p:cNvPr id="7" name="Rechteck 6">
             <a:extLst>
               <a:ext uri="{FF2B5EF4-FFF2-40B4-BE49-F238E27FC236}">
-                <a16:creationId xmlns:a16="http://schemas.microsoft.com/office/drawing/2014/main" id="{64F0042D-2285-967A-5375-2EF04EFAF66F}"/>
+                <a16:creationId xmlns:a16="http://schemas.microsoft.com/office/drawing/2014/main" id="{87E0979B-137E-82F0-4966-1369EB94C736}"/>
               </a:ext>
             </a:extLst>
           </p:cNvPr>
@@ -4345,7 +4345,7 @@
           <p:cNvPr id="8" name="Rechteck 7">
             <a:extLst>
               <a:ext uri="{FF2B5EF4-FFF2-40B4-BE49-F238E27FC236}">
-                <a16:creationId xmlns:a16="http://schemas.microsoft.com/office/drawing/2014/main" id="{9D7CB3A7-7795-920A-9011-60C8B71C317E}"/>
+                <a16:creationId xmlns:a16="http://schemas.microsoft.com/office/drawing/2014/main" id="{12ACF793-312D-914A-3C47-3A1BB4F3AF47}"/>
               </a:ext>
             </a:extLst>
           </p:cNvPr>
@@ -4395,7 +4395,7 @@
           <p:cNvPr id="9" name="Rechteck 8">
             <a:extLst>
               <a:ext uri="{FF2B5EF4-FFF2-40B4-BE49-F238E27FC236}">
-                <a16:creationId xmlns:a16="http://schemas.microsoft.com/office/drawing/2014/main" id="{E8406BB8-F8B8-02E6-664A-54B3DEED69B4}"/>
+                <a16:creationId xmlns:a16="http://schemas.microsoft.com/office/drawing/2014/main" id="{3C66F6DE-D76C-64B2-945B-ECEBC1DF3C7E}"/>
               </a:ext>
             </a:extLst>
           </p:cNvPr>
@@ -4445,7 +4445,7 @@
           <p:cNvPr id="10" name="Rechteck 9">
             <a:extLst>
               <a:ext uri="{FF2B5EF4-FFF2-40B4-BE49-F238E27FC236}">
-                <a16:creationId xmlns:a16="http://schemas.microsoft.com/office/drawing/2014/main" id="{85055F90-48CE-71F0-BA52-3AD390A71353}"/>
+                <a16:creationId xmlns:a16="http://schemas.microsoft.com/office/drawing/2014/main" id="{E8FBC326-C0F1-DDD8-CF68-D92AFFF079F6}"/>
               </a:ext>
             </a:extLst>
           </p:cNvPr>
@@ -4495,7 +4495,7 @@
           <p:cNvPr id="11" name="Rechteck 10">
             <a:extLst>
               <a:ext uri="{FF2B5EF4-FFF2-40B4-BE49-F238E27FC236}">
-                <a16:creationId xmlns:a16="http://schemas.microsoft.com/office/drawing/2014/main" id="{669F91F1-2986-2398-6B47-1C9B79428DA9}"/>
+                <a16:creationId xmlns:a16="http://schemas.microsoft.com/office/drawing/2014/main" id="{8FC4B0BD-A532-95FF-BE51-C42A2D478650}"/>
               </a:ext>
             </a:extLst>
           </p:cNvPr>
@@ -4545,7 +4545,7 @@
           <p:cNvPr id="12" name="Rechteck 11">
             <a:extLst>
               <a:ext uri="{FF2B5EF4-FFF2-40B4-BE49-F238E27FC236}">
-                <a16:creationId xmlns:a16="http://schemas.microsoft.com/office/drawing/2014/main" id="{5259193E-C6C9-0E1A-3904-EDDD4C0CF43A}"/>
+                <a16:creationId xmlns:a16="http://schemas.microsoft.com/office/drawing/2014/main" id="{139DB5DB-EBD6-4B8A-06E6-0FFD3E43B5D3}"/>
               </a:ext>
             </a:extLst>
           </p:cNvPr>
@@ -4595,7 +4595,7 @@
           <p:cNvPr id="13" name="Rechteck 12">
             <a:extLst>
               <a:ext uri="{FF2B5EF4-FFF2-40B4-BE49-F238E27FC236}">
-                <a16:creationId xmlns:a16="http://schemas.microsoft.com/office/drawing/2014/main" id="{65B77E81-18CF-E6C7-E98D-EE675B5411AF}"/>
+                <a16:creationId xmlns:a16="http://schemas.microsoft.com/office/drawing/2014/main" id="{F8924068-915D-804B-D80E-2718D2986F9B}"/>
               </a:ext>
             </a:extLst>
           </p:cNvPr>
@@ -4645,7 +4645,7 @@
           <p:cNvPr id="14" name="Rechteck 13">
             <a:extLst>
               <a:ext uri="{FF2B5EF4-FFF2-40B4-BE49-F238E27FC236}">
-                <a16:creationId xmlns:a16="http://schemas.microsoft.com/office/drawing/2014/main" id="{4AAE57BC-9DF2-10D5-3A5B-F79BB6D679EA}"/>
+                <a16:creationId xmlns:a16="http://schemas.microsoft.com/office/drawing/2014/main" id="{EE7C207C-EF05-A43A-6A21-C0D70FF27875}"/>
               </a:ext>
             </a:extLst>
           </p:cNvPr>
@@ -4693,7 +4693,7 @@
     </p:spTree>
     <p:extLst>
       <p:ext uri="{BB962C8B-B14F-4D97-AF65-F5344CB8AC3E}">
-        <p14:creationId xmlns:p14="http://schemas.microsoft.com/office/powerpoint/2010/main" val="4144140358"/>
+        <p14:creationId xmlns:p14="http://schemas.microsoft.com/office/powerpoint/2010/main" val="311749482"/>
       </p:ext>
     </p:extLst>
   </p:cSld>
@@ -4725,7 +4725,7 @@
           <p:cNvPr id="2" name="Titel 1">
             <a:extLst>
               <a:ext uri="{FF2B5EF4-FFF2-40B4-BE49-F238E27FC236}">
-                <a16:creationId xmlns:a16="http://schemas.microsoft.com/office/drawing/2014/main" id="{1F81D4AA-0B35-738C-EF90-4409699B2B6C}"/>
+                <a16:creationId xmlns:a16="http://schemas.microsoft.com/office/drawing/2014/main" id="{CE6AB5D8-2BD9-CECB-A27F-07BF2B3D4A0D}"/>
               </a:ext>
             </a:extLst>
           </p:cNvPr>
@@ -4754,7 +4754,7 @@
           <p:cNvPr id="3" name="Textplatzhalter 2">
             <a:extLst>
               <a:ext uri="{FF2B5EF4-FFF2-40B4-BE49-F238E27FC236}">
-                <a16:creationId xmlns:a16="http://schemas.microsoft.com/office/drawing/2014/main" id="{F4578A5D-1B1D-2630-13E2-1D9268F81CCE}"/>
+                <a16:creationId xmlns:a16="http://schemas.microsoft.com/office/drawing/2014/main" id="{3F878CC8-2AB8-0228-2B02-3BE5C41376EE}"/>
               </a:ext>
             </a:extLst>
           </p:cNvPr>
@@ -4859,7 +4859,7 @@
     </p:spTree>
     <p:extLst>
       <p:ext uri="{BB962C8B-B14F-4D97-AF65-F5344CB8AC3E}">
-        <p14:creationId xmlns:p14="http://schemas.microsoft.com/office/powerpoint/2010/main" val="3010404774"/>
+        <p14:creationId xmlns:p14="http://schemas.microsoft.com/office/powerpoint/2010/main" val="4058205456"/>
       </p:ext>
     </p:extLst>
   </p:cSld>
